--- a/slides/Part 3 Basic Causal Structures and d-separation.pptx
+++ b/slides/Part 3 Basic Causal Structures and d-separation.pptx
@@ -16,8 +16,8 @@
     <p:sldId id="265" r:id="rId7"/>
     <p:sldId id="266" r:id="rId8"/>
     <p:sldId id="267" r:id="rId9"/>
-    <p:sldId id="268" r:id="rId10"/>
-    <p:sldId id="269" r:id="rId11"/>
+    <p:sldId id="291" r:id="rId10"/>
+    <p:sldId id="292" r:id="rId11"/>
     <p:sldId id="270" r:id="rId12"/>
     <p:sldId id="272" r:id="rId13"/>
     <p:sldId id="262" r:id="rId14"/>
@@ -2492,7 +2492,7 @@
         <p:cNvPr id="1" name="">
           <a:extLst>
             <a:ext uri="{FF2B5EF4-FFF2-40B4-BE49-F238E27FC236}">
-              <a16:creationId xmlns:a16="http://schemas.microsoft.com/office/drawing/2014/main" id="{C9D25A80-B72B-3915-D8E9-2F898D37CB16}"/>
+              <a16:creationId xmlns:a16="http://schemas.microsoft.com/office/drawing/2014/main" id="{18C91119-F0F4-BDA0-62C4-6C100A0111CD}"/>
             </a:ext>
           </a:extLst>
         </p:cNvPr>
@@ -2512,7 +2512,7 @@
           <p:cNvPr id="2" name="Platshållare för sidfot 1">
             <a:extLst>
               <a:ext uri="{FF2B5EF4-FFF2-40B4-BE49-F238E27FC236}">
-                <a16:creationId xmlns:a16="http://schemas.microsoft.com/office/drawing/2014/main" id="{91009E01-E977-7667-1E91-B0AC4F575C2C}"/>
+                <a16:creationId xmlns:a16="http://schemas.microsoft.com/office/drawing/2014/main" id="{8EB734EF-2868-81EB-A45B-7AF176ED88EB}"/>
               </a:ext>
             </a:extLst>
           </p:cNvPr>
@@ -2548,7 +2548,7 @@
           <p:cNvPr id="5" name="Rubrik 4">
             <a:extLst>
               <a:ext uri="{FF2B5EF4-FFF2-40B4-BE49-F238E27FC236}">
-                <a16:creationId xmlns:a16="http://schemas.microsoft.com/office/drawing/2014/main" id="{FB04ACAF-7AD6-203F-FF68-2AFC8FE36F29}"/>
+                <a16:creationId xmlns:a16="http://schemas.microsoft.com/office/drawing/2014/main" id="{E2B0A449-B512-1439-F29D-37EF2EE2D5CA}"/>
               </a:ext>
             </a:extLst>
           </p:cNvPr>
@@ -2579,7 +2579,7 @@
           <p:cNvPr id="4" name="Platshållare för bildnummer 3">
             <a:extLst>
               <a:ext uri="{FF2B5EF4-FFF2-40B4-BE49-F238E27FC236}">
-                <a16:creationId xmlns:a16="http://schemas.microsoft.com/office/drawing/2014/main" id="{F9A920C5-0A03-ED77-BA24-7FCDAB9BCEC4}"/>
+                <a16:creationId xmlns:a16="http://schemas.microsoft.com/office/drawing/2014/main" id="{C8BCD1BC-49CA-8D3D-07FD-155D9FDCCC6D}"/>
               </a:ext>
             </a:extLst>
           </p:cNvPr>
@@ -2610,7 +2610,7 @@
           <p:cNvPr id="7" name="Platshållare för innehåll 6">
             <a:extLst>
               <a:ext uri="{FF2B5EF4-FFF2-40B4-BE49-F238E27FC236}">
-                <a16:creationId xmlns:a16="http://schemas.microsoft.com/office/drawing/2014/main" id="{E70455D8-58EC-04BF-B9BF-5F2B2ECD413A}"/>
+                <a16:creationId xmlns:a16="http://schemas.microsoft.com/office/drawing/2014/main" id="{7FAFC216-8C4B-2714-63D3-2629D0936604}"/>
               </a:ext>
             </a:extLst>
           </p:cNvPr>
@@ -2682,7 +2682,7 @@
           <p:cNvPr id="91" name="Group 27">
             <a:extLst>
               <a:ext uri="{FF2B5EF4-FFF2-40B4-BE49-F238E27FC236}">
-                <a16:creationId xmlns:a16="http://schemas.microsoft.com/office/drawing/2014/main" id="{8EC4C251-58B4-C19D-B8D4-C97427A96810}"/>
+                <a16:creationId xmlns:a16="http://schemas.microsoft.com/office/drawing/2014/main" id="{D3F8EF15-CEAA-88A8-0BFD-7CE34DA229E0}"/>
               </a:ext>
             </a:extLst>
           </p:cNvPr>
@@ -2702,7 +2702,7 @@
             <p:cNvPr id="92" name="Oval 29">
               <a:extLst>
                 <a:ext uri="{FF2B5EF4-FFF2-40B4-BE49-F238E27FC236}">
-                  <a16:creationId xmlns:a16="http://schemas.microsoft.com/office/drawing/2014/main" id="{BEB07A53-9553-0713-721B-FCCE0605F9E9}"/>
+                  <a16:creationId xmlns:a16="http://schemas.microsoft.com/office/drawing/2014/main" id="{5517DA0C-C48E-DE83-C12B-A0EFDA89F882}"/>
                 </a:ext>
               </a:extLst>
             </p:cNvPr>
@@ -2774,7 +2774,7 @@
             <p:cNvPr id="93" name="Oval 30">
               <a:extLst>
                 <a:ext uri="{FF2B5EF4-FFF2-40B4-BE49-F238E27FC236}">
-                  <a16:creationId xmlns:a16="http://schemas.microsoft.com/office/drawing/2014/main" id="{82D308A5-39CC-74A7-324F-BBE0414A2D52}"/>
+                  <a16:creationId xmlns:a16="http://schemas.microsoft.com/office/drawing/2014/main" id="{86EEB4F4-9454-88C8-3F29-E7B90C1A6745}"/>
                 </a:ext>
               </a:extLst>
             </p:cNvPr>
@@ -2846,7 +2846,7 @@
             <p:cNvPr id="94" name="Straight Arrow Connector 31">
               <a:extLst>
                 <a:ext uri="{FF2B5EF4-FFF2-40B4-BE49-F238E27FC236}">
-                  <a16:creationId xmlns:a16="http://schemas.microsoft.com/office/drawing/2014/main" id="{15259FC8-663C-C113-EC36-854920D1B5C1}"/>
+                  <a16:creationId xmlns:a16="http://schemas.microsoft.com/office/drawing/2014/main" id="{5C598F86-9FE9-8C8A-36E4-B3FD9603884B}"/>
                 </a:ext>
               </a:extLst>
             </p:cNvPr>
@@ -2889,7 +2889,7 @@
             <p:cNvPr id="95" name="Oval 32">
               <a:extLst>
                 <a:ext uri="{FF2B5EF4-FFF2-40B4-BE49-F238E27FC236}">
-                  <a16:creationId xmlns:a16="http://schemas.microsoft.com/office/drawing/2014/main" id="{6887C7B8-44CC-7D96-810B-267A146511E0}"/>
+                  <a16:creationId xmlns:a16="http://schemas.microsoft.com/office/drawing/2014/main" id="{C80960E9-6EFA-C44B-021D-827D9FB7334C}"/>
                 </a:ext>
               </a:extLst>
             </p:cNvPr>
@@ -2971,7 +2971,7 @@
             <p:cNvPr id="96" name="Straight Arrow Connector 33">
               <a:extLst>
                 <a:ext uri="{FF2B5EF4-FFF2-40B4-BE49-F238E27FC236}">
-                  <a16:creationId xmlns:a16="http://schemas.microsoft.com/office/drawing/2014/main" id="{1703315E-666C-F65F-0EBC-12A0E1430ED9}"/>
+                  <a16:creationId xmlns:a16="http://schemas.microsoft.com/office/drawing/2014/main" id="{78A03E18-4976-0726-DBCE-3C0FF16AD53B}"/>
                 </a:ext>
               </a:extLst>
             </p:cNvPr>
@@ -3014,7 +3014,7 @@
             <p:cNvPr id="97" name="Straight Arrow Connector 34">
               <a:extLst>
                 <a:ext uri="{FF2B5EF4-FFF2-40B4-BE49-F238E27FC236}">
-                  <a16:creationId xmlns:a16="http://schemas.microsoft.com/office/drawing/2014/main" id="{E042981A-A8D7-8415-818D-821647132981}"/>
+                  <a16:creationId xmlns:a16="http://schemas.microsoft.com/office/drawing/2014/main" id="{92EB2434-66EB-F328-B298-BFBABB16F217}"/>
                 </a:ext>
               </a:extLst>
             </p:cNvPr>
@@ -3053,12 +3053,180 @@
           </p:style>
         </p:cxnSp>
       </p:grpSp>
+      <mc:AlternateContent xmlns:mc="http://schemas.openxmlformats.org/markup-compatibility/2006" xmlns:a14="http://schemas.microsoft.com/office/drawing/2010/main">
+        <mc:Choice Requires="a14">
+          <p:sp>
+            <p:nvSpPr>
+              <p:cNvPr id="42" name="TextBox 30">
+                <a:extLst>
+                  <a:ext uri="{FF2B5EF4-FFF2-40B4-BE49-F238E27FC236}">
+                    <a16:creationId xmlns:a16="http://schemas.microsoft.com/office/drawing/2014/main" id="{FC48F212-9A7F-A615-E9BD-76A7071A2672}"/>
+                  </a:ext>
+                </a:extLst>
+              </p:cNvPr>
+              <p:cNvSpPr txBox="1"/>
+              <p:nvPr/>
+            </p:nvSpPr>
+            <p:spPr>
+              <a:xfrm>
+                <a:off x="599817" y="2362734"/>
+                <a:ext cx="2888996" cy="276999"/>
+              </a:xfrm>
+              <a:prstGeom prst="rect">
+                <a:avLst/>
+              </a:prstGeom>
+              <a:noFill/>
+            </p:spPr>
+            <p:txBody>
+              <a:bodyPr wrap="none" lIns="0" tIns="0" rIns="0" bIns="0" rtlCol="0">
+                <a:spAutoFit/>
+              </a:bodyPr>
+              <a:lstStyle/>
+              <a:p>
+                <a:pPr/>
+                <a14:m>
+                  <m:oMathPara xmlns:m="http://schemas.openxmlformats.org/officeDocument/2006/math">
+                    <m:oMathParaPr>
+                      <m:jc m:val="centerGroup"/>
+                    </m:oMathParaPr>
+                    <m:oMath xmlns:m="http://schemas.openxmlformats.org/officeDocument/2006/math">
+                      <m:sSub>
+                        <m:sSubPr>
+                          <m:ctrlPr>
+                            <a:rPr lang="en-US" b="0" i="1" noProof="0" smtClean="0">
+                              <a:latin typeface="Cambria Math" panose="02040503050406030204" pitchFamily="18" charset="0"/>
+                            </a:rPr>
+                          </m:ctrlPr>
+                        </m:sSubPr>
+                        <m:e>
+                          <m:r>
+                            <a:rPr lang="en-US" b="0" i="1" noProof="0" smtClean="0">
+                              <a:latin typeface="Cambria Math" panose="02040503050406030204" pitchFamily="18" charset="0"/>
+                            </a:rPr>
+                            <m:t>𝑚</m:t>
+                          </m:r>
+                        </m:e>
+                        <m:sub>
+                          <m:r>
+                            <a:rPr lang="en-US" b="0" i="1" noProof="0" smtClean="0">
+                              <a:latin typeface="Cambria Math" panose="02040503050406030204" pitchFamily="18" charset="0"/>
+                            </a:rPr>
+                            <m:t>1</m:t>
+                          </m:r>
+                        </m:sub>
+                      </m:sSub>
+                      <m:r>
+                        <a:rPr lang="en-US" b="0" i="1" noProof="0" smtClean="0">
+                          <a:latin typeface="Cambria Math" panose="02040503050406030204" pitchFamily="18" charset="0"/>
+                        </a:rPr>
+                        <m:t>:</m:t>
+                      </m:r>
+                      <m:r>
+                        <a:rPr lang="en-US" b="0" i="1" noProof="0" smtClean="0">
+                          <a:solidFill>
+                            <a:srgbClr val="006D70"/>
+                          </a:solidFill>
+                          <a:latin typeface="Cambria Math" panose="02040503050406030204" pitchFamily="18" charset="0"/>
+                        </a:rPr>
+                        <m:t>𝑞𝑢𝑎𝑙𝑖𝑡𝑦</m:t>
+                      </m:r>
+                      <m:r>
+                        <a:rPr lang="en-US" b="0" i="1" noProof="0" smtClean="0">
+                          <a:latin typeface="Cambria Math" panose="02040503050406030204" pitchFamily="18" charset="0"/>
+                        </a:rPr>
+                        <m:t>~</m:t>
+                      </m:r>
+                      <m:r>
+                        <a:rPr lang="en-GB" b="0" i="1" noProof="0" smtClean="0">
+                          <a:latin typeface="Cambria Math" panose="02040503050406030204" pitchFamily="18" charset="0"/>
+                        </a:rPr>
+                        <m:t> </m:t>
+                      </m:r>
+                      <m:r>
+                        <a:rPr lang="en-US" b="0" i="1" noProof="0" smtClean="0">
+                          <a:solidFill>
+                            <a:srgbClr val="D0180A"/>
+                          </a:solidFill>
+                          <a:latin typeface="Cambria Math" panose="02040503050406030204" pitchFamily="18" charset="0"/>
+                        </a:rPr>
+                        <m:t>𝑠𝑖𝑧𝑒</m:t>
+                      </m:r>
+                      <m:r>
+                        <a:rPr lang="en-US" b="0" i="1" noProof="0" smtClean="0">
+                          <a:latin typeface="Cambria Math" panose="02040503050406030204" pitchFamily="18" charset="0"/>
+                        </a:rPr>
+                        <m:t>+</m:t>
+                      </m:r>
+                      <m:r>
+                        <a:rPr lang="en-US" b="0" i="1" noProof="0" smtClean="0">
+                          <a:solidFill>
+                            <a:schemeClr val="bg1">
+                              <a:lumMod val="50000"/>
+                            </a:schemeClr>
+                          </a:solidFill>
+                          <a:latin typeface="Cambria Math" panose="02040503050406030204" pitchFamily="18" charset="0"/>
+                        </a:rPr>
+                        <m:t>𝑠𝑢𝑐𝑐𝑒𝑠𝑠</m:t>
+                      </m:r>
+                    </m:oMath>
+                  </m:oMathPara>
+                </a14:m>
+                <a:endParaRPr lang="en-US" noProof="0" dirty="0"/>
+              </a:p>
+            </p:txBody>
+          </p:sp>
+        </mc:Choice>
+        <mc:Fallback xmlns="">
+          <p:sp>
+            <p:nvSpPr>
+              <p:cNvPr id="42" name="TextBox 30">
+                <a:extLst>
+                  <a:ext uri="{FF2B5EF4-FFF2-40B4-BE49-F238E27FC236}">
+                    <a16:creationId xmlns:a16="http://schemas.microsoft.com/office/drawing/2014/main" id="{FC48F212-9A7F-A615-E9BD-76A7071A2672}"/>
+                  </a:ext>
+                </a:extLst>
+              </p:cNvPr>
+              <p:cNvSpPr txBox="1">
+                <a:spLocks noRot="1" noChangeAspect="1" noMove="1" noResize="1" noEditPoints="1" noAdjustHandles="1" noChangeArrowheads="1" noChangeShapeType="1" noTextEdit="1"/>
+              </p:cNvSpPr>
+              <p:nvPr/>
+            </p:nvSpPr>
+            <p:spPr>
+              <a:xfrm>
+                <a:off x="599817" y="2362734"/>
+                <a:ext cx="2888996" cy="276999"/>
+              </a:xfrm>
+              <a:prstGeom prst="rect">
+                <a:avLst/>
+              </a:prstGeom>
+              <a:blipFill>
+                <a:blip r:embed="rId3"/>
+                <a:stretch>
+                  <a:fillRect l="-844" t="-4444" r="-844" b="-35556"/>
+                </a:stretch>
+              </a:blipFill>
+            </p:spPr>
+            <p:txBody>
+              <a:bodyPr/>
+              <a:lstStyle/>
+              <a:p>
+                <a:r>
+                  <a:rPr lang="en-SE">
+                    <a:noFill/>
+                  </a:rPr>
+                  <a:t> </a:t>
+                </a:r>
+              </a:p>
+            </p:txBody>
+          </p:sp>
+        </mc:Fallback>
+      </mc:AlternateContent>
       <p:pic>
         <p:nvPicPr>
-          <p:cNvPr id="6" name="Picture 10">
+          <p:cNvPr id="3" name="Picture 10">
             <a:extLst>
               <a:ext uri="{FF2B5EF4-FFF2-40B4-BE49-F238E27FC236}">
-                <a16:creationId xmlns:a16="http://schemas.microsoft.com/office/drawing/2014/main" id="{D0672498-B306-287A-0446-46CF7D4D210D}"/>
+                <a16:creationId xmlns:a16="http://schemas.microsoft.com/office/drawing/2014/main" id="{785B66DB-A94B-D73E-23FB-7BA448859655}"/>
               </a:ext>
             </a:extLst>
           </p:cNvPr>
@@ -3068,15 +3236,15 @@
           <p:nvPr/>
         </p:nvPicPr>
         <p:blipFill>
-          <a:blip r:embed="rId2"/>
+          <a:blip r:embed="rId4"/>
           <a:stretch>
             <a:fillRect/>
           </a:stretch>
         </p:blipFill>
         <p:spPr>
           <a:xfrm>
-            <a:off x="4643576" y="2124522"/>
-            <a:ext cx="4379241" cy="2701447"/>
+            <a:off x="640182" y="2662954"/>
+            <a:ext cx="3455020" cy="2131318"/>
           </a:xfrm>
           <a:prstGeom prst="rect">
             <a:avLst/>
@@ -3085,10 +3253,10 @@
       </p:pic>
       <p:sp>
         <p:nvSpPr>
-          <p:cNvPr id="3" name="TextBox 24">
+          <p:cNvPr id="6" name="TextBox 24">
             <a:extLst>
               <a:ext uri="{FF2B5EF4-FFF2-40B4-BE49-F238E27FC236}">
-                <a16:creationId xmlns:a16="http://schemas.microsoft.com/office/drawing/2014/main" id="{69582689-8954-2F87-33FE-80FC9D760F1F}"/>
+                <a16:creationId xmlns:a16="http://schemas.microsoft.com/office/drawing/2014/main" id="{BC2C14F9-7538-627D-65F0-64FB7BE98EEC}"/>
               </a:ext>
             </a:extLst>
           </p:cNvPr>
@@ -3097,8 +3265,8 @@
         </p:nvSpPr>
         <p:spPr>
           <a:xfrm>
-            <a:off x="425844" y="2169182"/>
-            <a:ext cx="4217732" cy="830997"/>
+            <a:off x="3488813" y="2615034"/>
+            <a:ext cx="5055370" cy="584775"/>
           </a:xfrm>
           <a:prstGeom prst="rect">
             <a:avLst/>
@@ -3200,7 +3368,7 @@
           <p:cNvPr id="8" name="TextBox 25">
             <a:extLst>
               <a:ext uri="{FF2B5EF4-FFF2-40B4-BE49-F238E27FC236}">
-                <a16:creationId xmlns:a16="http://schemas.microsoft.com/office/drawing/2014/main" id="{63344C52-5178-67E4-2347-9A077C3B40DB}"/>
+                <a16:creationId xmlns:a16="http://schemas.microsoft.com/office/drawing/2014/main" id="{5F77476C-FFD4-85C1-F8D3-F1CDBF9173B1}"/>
               </a:ext>
             </a:extLst>
           </p:cNvPr>
@@ -3209,8 +3377,8 @@
         </p:nvSpPr>
         <p:spPr>
           <a:xfrm>
-            <a:off x="425844" y="3764071"/>
-            <a:ext cx="4146156" cy="830997"/>
+            <a:off x="3488813" y="4124959"/>
+            <a:ext cx="5055370" cy="584775"/>
           </a:xfrm>
           <a:prstGeom prst="rect">
             <a:avLst/>
@@ -3312,7 +3480,7 @@
           <p:cNvPr id="9" name="Rectangle 10">
             <a:extLst>
               <a:ext uri="{FF2B5EF4-FFF2-40B4-BE49-F238E27FC236}">
-                <a16:creationId xmlns:a16="http://schemas.microsoft.com/office/drawing/2014/main" id="{7085932F-D3E2-CBC7-CDE9-2E58671981AE}"/>
+                <a16:creationId xmlns:a16="http://schemas.microsoft.com/office/drawing/2014/main" id="{E99B9B0D-DA4A-4F28-AE9F-20EB481C6773}"/>
               </a:ext>
             </a:extLst>
           </p:cNvPr>
@@ -3321,8 +3489,8 @@
         </p:nvSpPr>
         <p:spPr>
           <a:xfrm>
-            <a:off x="425844" y="2199662"/>
-            <a:ext cx="7760317" cy="760209"/>
+            <a:off x="783866" y="2644989"/>
+            <a:ext cx="7760317" cy="513370"/>
           </a:xfrm>
           <a:prstGeom prst="rect">
             <a:avLst/>
@@ -3364,7 +3532,7 @@
           <p:cNvPr id="10" name="Rectangle 10">
             <a:extLst>
               <a:ext uri="{FF2B5EF4-FFF2-40B4-BE49-F238E27FC236}">
-                <a16:creationId xmlns:a16="http://schemas.microsoft.com/office/drawing/2014/main" id="{02E9A907-664A-0326-48B3-0B6D3DA7FA10}"/>
+                <a16:creationId xmlns:a16="http://schemas.microsoft.com/office/drawing/2014/main" id="{32F40087-4A29-2B6E-2180-1CAC3FC50932}"/>
               </a:ext>
             </a:extLst>
           </p:cNvPr>
@@ -3373,8 +3541,8 @@
         </p:nvSpPr>
         <p:spPr>
           <a:xfrm>
-            <a:off x="423045" y="3764071"/>
-            <a:ext cx="7760317" cy="804870"/>
+            <a:off x="783865" y="4167480"/>
+            <a:ext cx="7760317" cy="513370"/>
           </a:xfrm>
           <a:prstGeom prst="rect">
             <a:avLst/>
@@ -3414,7 +3582,7 @@
     </p:spTree>
     <p:extLst>
       <p:ext uri="{BB962C8B-B14F-4D97-AF65-F5344CB8AC3E}">
-        <p14:creationId xmlns:p14="http://schemas.microsoft.com/office/powerpoint/2010/main" val="3411624497"/>
+        <p14:creationId xmlns:p14="http://schemas.microsoft.com/office/powerpoint/2010/main" val="590517132"/>
       </p:ext>
     </p:extLst>
   </p:cSld>
@@ -3442,7 +3610,7 @@
                             </p:stCondLst>
                             <p:childTnLst>
                               <p:par>
-                                <p:cTn id="5" presetID="1" presetClass="entr" presetSubtype="0" fill="hold" nodeType="clickEffect">
+                                <p:cTn id="5" presetID="1" presetClass="entr" presetSubtype="0" fill="hold" grpId="0" nodeType="clickEffect">
                                   <p:stCondLst>
                                     <p:cond delay="0"/>
                                   </p:stCondLst>
@@ -3455,7 +3623,7 @@
                                           </p:stCondLst>
                                         </p:cTn>
                                         <p:tgtEl>
-                                          <p:spTgt spid="6"/>
+                                          <p:spTgt spid="9"/>
                                         </p:tgtEl>
                                         <p:attrNameLst>
                                           <p:attrName>style.visibility</p:attrName>
@@ -3482,34 +3650,7 @@
                                           </p:stCondLst>
                                         </p:cTn>
                                         <p:tgtEl>
-                                          <p:spTgt spid="3"/>
-                                        </p:tgtEl>
-                                        <p:attrNameLst>
-                                          <p:attrName>style.visibility</p:attrName>
-                                        </p:attrNameLst>
-                                      </p:cBhvr>
-                                      <p:to>
-                                        <p:strVal val="visible"/>
-                                      </p:to>
-                                    </p:set>
-                                  </p:childTnLst>
-                                </p:cTn>
-                              </p:par>
-                              <p:par>
-                                <p:cTn id="9" presetID="1" presetClass="entr" presetSubtype="0" fill="hold" grpId="0" nodeType="withEffect">
-                                  <p:stCondLst>
-                                    <p:cond delay="0"/>
-                                  </p:stCondLst>
-                                  <p:childTnLst>
-                                    <p:set>
-                                      <p:cBhvr>
-                                        <p:cTn id="10" dur="1" fill="hold">
-                                          <p:stCondLst>
-                                            <p:cond delay="0"/>
-                                          </p:stCondLst>
-                                        </p:cTn>
-                                        <p:tgtEl>
-                                          <p:spTgt spid="8"/>
+                                          <p:spTgt spid="6"/>
                                         </p:tgtEl>
                                         <p:attrNameLst>
                                           <p:attrName>style.visibility</p:attrName>
@@ -3529,19 +3670,46 @@
                     </p:cTn>
                   </p:par>
                   <p:par>
-                    <p:cTn id="11" fill="hold">
+                    <p:cTn id="9" fill="hold">
                       <p:stCondLst>
                         <p:cond delay="indefinite"/>
                       </p:stCondLst>
                       <p:childTnLst>
                         <p:par>
-                          <p:cTn id="12" fill="hold">
+                          <p:cTn id="10" fill="hold">
                             <p:stCondLst>
                               <p:cond delay="0"/>
                             </p:stCondLst>
                             <p:childTnLst>
                               <p:par>
-                                <p:cTn id="13" presetID="1" presetClass="entr" presetSubtype="0" fill="hold" grpId="0" nodeType="clickEffect">
+                                <p:cTn id="11" presetID="1" presetClass="entr" presetSubtype="0" fill="hold" grpId="0" nodeType="clickEffect">
+                                  <p:stCondLst>
+                                    <p:cond delay="0"/>
+                                  </p:stCondLst>
+                                  <p:childTnLst>
+                                    <p:set>
+                                      <p:cBhvr>
+                                        <p:cTn id="12" dur="1" fill="hold">
+                                          <p:stCondLst>
+                                            <p:cond delay="0"/>
+                                          </p:stCondLst>
+                                        </p:cTn>
+                                        <p:tgtEl>
+                                          <p:spTgt spid="10"/>
+                                        </p:tgtEl>
+                                        <p:attrNameLst>
+                                          <p:attrName>style.visibility</p:attrName>
+                                        </p:attrNameLst>
+                                      </p:cBhvr>
+                                      <p:to>
+                                        <p:strVal val="visible"/>
+                                      </p:to>
+                                    </p:set>
+                                  </p:childTnLst>
+                                </p:cTn>
+                              </p:par>
+                              <p:par>
+                                <p:cTn id="13" presetID="1" presetClass="entr" presetSubtype="0" fill="hold" grpId="0" nodeType="withEffect">
                                   <p:stCondLst>
                                     <p:cond delay="0"/>
                                   </p:stCondLst>
@@ -3554,52 +3722,7 @@
                                           </p:stCondLst>
                                         </p:cTn>
                                         <p:tgtEl>
-                                          <p:spTgt spid="9"/>
-                                        </p:tgtEl>
-                                        <p:attrNameLst>
-                                          <p:attrName>style.visibility</p:attrName>
-                                        </p:attrNameLst>
-                                      </p:cBhvr>
-                                      <p:to>
-                                        <p:strVal val="visible"/>
-                                      </p:to>
-                                    </p:set>
-                                  </p:childTnLst>
-                                </p:cTn>
-                              </p:par>
-                            </p:childTnLst>
-                          </p:cTn>
-                        </p:par>
-                      </p:childTnLst>
-                    </p:cTn>
-                  </p:par>
-                  <p:par>
-                    <p:cTn id="15" fill="hold">
-                      <p:stCondLst>
-                        <p:cond delay="indefinite"/>
-                      </p:stCondLst>
-                      <p:childTnLst>
-                        <p:par>
-                          <p:cTn id="16" fill="hold">
-                            <p:stCondLst>
-                              <p:cond delay="0"/>
-                            </p:stCondLst>
-                            <p:childTnLst>
-                              <p:par>
-                                <p:cTn id="17" presetID="1" presetClass="entr" presetSubtype="0" fill="hold" grpId="0" nodeType="clickEffect">
-                                  <p:stCondLst>
-                                    <p:cond delay="0"/>
-                                  </p:stCondLst>
-                                  <p:childTnLst>
-                                    <p:set>
-                                      <p:cBhvr>
-                                        <p:cTn id="18" dur="1" fill="hold">
-                                          <p:stCondLst>
-                                            <p:cond delay="0"/>
-                                          </p:stCondLst>
-                                        </p:cTn>
-                                        <p:tgtEl>
-                                          <p:spTgt spid="10"/>
+                                          <p:spTgt spid="8"/>
                                         </p:tgtEl>
                                         <p:attrNameLst>
                                           <p:attrName>style.visibility</p:attrName>
@@ -3640,7 +3763,7 @@
       </p:par>
     </p:tnLst>
     <p:bldLst>
-      <p:bldP spid="3" grpId="0"/>
+      <p:bldP spid="6" grpId="0"/>
       <p:bldP spid="8" grpId="0"/>
       <p:bldP spid="9" grpId="0" animBg="1"/>
       <p:bldP spid="10" grpId="0" animBg="1"/>
@@ -4619,39 +4742,8 @@
         </p:blipFill>
         <p:spPr>
           <a:xfrm>
-            <a:off x="4279107" y="1999136"/>
-            <a:ext cx="4702467" cy="2825745"/>
-          </a:xfrm>
-          <a:prstGeom prst="rect">
-            <a:avLst/>
-          </a:prstGeom>
-        </p:spPr>
-      </p:pic>
-      <p:pic>
-        <p:nvPicPr>
-          <p:cNvPr id="8" name="Picture 2">
-            <a:extLst>
-              <a:ext uri="{FF2B5EF4-FFF2-40B4-BE49-F238E27FC236}">
-                <a16:creationId xmlns:a16="http://schemas.microsoft.com/office/drawing/2014/main" id="{8676CC08-ED3D-8E21-D8E7-55388987DEE8}"/>
-              </a:ext>
-            </a:extLst>
-          </p:cNvPr>
-          <p:cNvPicPr>
-            <a:picLocks noChangeAspect="1"/>
-          </p:cNvPicPr>
-          <p:nvPr/>
-        </p:nvPicPr>
-        <p:blipFill>
-          <a:blip r:embed="rId4"/>
-          <a:srcRect l="2506" t="43037" b="2"/>
-          <a:stretch>
-            <a:fillRect/>
-          </a:stretch>
-        </p:blipFill>
-        <p:spPr>
-          <a:xfrm>
-            <a:off x="0" y="3790827"/>
-            <a:ext cx="4439921" cy="963236"/>
+            <a:off x="4376470" y="2057642"/>
+            <a:ext cx="4605104" cy="2767239"/>
           </a:xfrm>
           <a:prstGeom prst="rect">
             <a:avLst/>
@@ -6297,9 +6389,6 @@
                     <p:cTn id="3" fill="hold">
                       <p:stCondLst>
                         <p:cond delay="indefinite"/>
-                        <p:cond evt="onBegin" delay="0">
-                          <p:tn val="2"/>
-                        </p:cond>
                       </p:stCondLst>
                       <p:childTnLst>
                         <p:par>
@@ -6309,7 +6398,7 @@
                             </p:stCondLst>
                             <p:childTnLst>
                               <p:par>
-                                <p:cTn id="5" presetID="1" presetClass="entr" presetSubtype="0" fill="hold" grpId="0" nodeType="withEffect">
+                                <p:cTn id="5" presetID="10" presetClass="entr" presetSubtype="0" fill="hold" grpId="0" nodeType="clickEffect">
                                   <p:stCondLst>
                                     <p:cond delay="0"/>
                                   </p:stCondLst>
@@ -6317,6 +6406,41 @@
                                     <p:set>
                                       <p:cBhvr>
                                         <p:cTn id="6" dur="1" fill="hold">
+                                          <p:stCondLst>
+                                            <p:cond delay="0"/>
+                                          </p:stCondLst>
+                                        </p:cTn>
+                                        <p:tgtEl>
+                                          <p:spTgt spid="10"/>
+                                        </p:tgtEl>
+                                        <p:attrNameLst>
+                                          <p:attrName>style.visibility</p:attrName>
+                                        </p:attrNameLst>
+                                      </p:cBhvr>
+                                      <p:to>
+                                        <p:strVal val="visible"/>
+                                      </p:to>
+                                    </p:set>
+                                    <p:animEffect transition="in" filter="fade">
+                                      <p:cBhvr>
+                                        <p:cTn id="7" dur="500"/>
+                                        <p:tgtEl>
+                                          <p:spTgt spid="10"/>
+                                        </p:tgtEl>
+                                      </p:cBhvr>
+                                    </p:animEffect>
+                                  </p:childTnLst>
+                                </p:cTn>
+                              </p:par>
+                              <p:par>
+                                <p:cTn id="8" presetID="1" presetClass="entr" presetSubtype="0" fill="hold" grpId="0" nodeType="withEffect">
+                                  <p:stCondLst>
+                                    <p:cond delay="0"/>
+                                  </p:stCondLst>
+                                  <p:childTnLst>
+                                    <p:set>
+                                      <p:cBhvr>
+                                        <p:cTn id="9" dur="1" fill="hold">
                                           <p:stCondLst>
                                             <p:cond delay="0"/>
                                           </p:stCondLst>
@@ -6336,14 +6460,14 @@
                                 </p:cTn>
                               </p:par>
                               <p:par>
-                                <p:cTn id="7" presetID="1" presetClass="entr" presetSubtype="0" fill="hold" grpId="0" nodeType="withEffect">
+                                <p:cTn id="10" presetID="1" presetClass="entr" presetSubtype="0" fill="hold" grpId="0" nodeType="withEffect">
                                   <p:stCondLst>
                                     <p:cond delay="0"/>
                                   </p:stCondLst>
                                   <p:childTnLst>
                                     <p:set>
                                       <p:cBhvr>
-                                        <p:cTn id="8" dur="1" fill="hold">
+                                        <p:cTn id="11" dur="1" fill="hold">
                                           <p:stCondLst>
                                             <p:cond delay="0"/>
                                           </p:stCondLst>
@@ -6392,6 +6516,7 @@
     <p:bldLst>
       <p:bldP spid="41" grpId="0"/>
       <p:bldP spid="42" grpId="0"/>
+      <p:bldP spid="10" grpId="0" animBg="1"/>
     </p:bldLst>
   </p:timing>
 </p:sld>
@@ -10365,7 +10490,7 @@
                             </p:stCondLst>
                             <p:childTnLst>
                               <p:par>
-                                <p:cTn id="5" presetID="1" presetClass="entr" presetSubtype="0" fill="hold" nodeType="clickEffect">
+                                <p:cTn id="5" presetID="10" presetClass="entr" presetSubtype="0" fill="hold" grpId="0" nodeType="clickEffect">
                                   <p:stCondLst>
                                     <p:cond delay="0"/>
                                   </p:stCondLst>
@@ -10378,7 +10503,7 @@
                                           </p:stCondLst>
                                         </p:cTn>
                                         <p:tgtEl>
-                                          <p:spTgt spid="10"/>
+                                          <p:spTgt spid="8"/>
                                         </p:tgtEl>
                                         <p:attrNameLst>
                                           <p:attrName>style.visibility</p:attrName>
@@ -10388,6 +10513,14 @@
                                         <p:strVal val="visible"/>
                                       </p:to>
                                     </p:set>
+                                    <p:animEffect transition="in" filter="fade">
+                                      <p:cBhvr>
+                                        <p:cTn id="7" dur="500"/>
+                                        <p:tgtEl>
+                                          <p:spTgt spid="8"/>
+                                        </p:tgtEl>
+                                      </p:cBhvr>
+                                    </p:animEffect>
                                   </p:childTnLst>
                                 </p:cTn>
                               </p:par>
@@ -10398,32 +10531,32 @@
                     </p:cTn>
                   </p:par>
                   <p:par>
-                    <p:cTn id="7" fill="hold">
+                    <p:cTn id="8" fill="hold">
                       <p:stCondLst>
                         <p:cond delay="indefinite"/>
                       </p:stCondLst>
                       <p:childTnLst>
                         <p:par>
-                          <p:cTn id="8" fill="hold">
+                          <p:cTn id="9" fill="hold">
                             <p:stCondLst>
                               <p:cond delay="0"/>
                             </p:stCondLst>
                             <p:childTnLst>
                               <p:par>
-                                <p:cTn id="9" presetID="1" presetClass="entr" presetSubtype="0" fill="hold" nodeType="clickEffect">
+                                <p:cTn id="10" presetID="10" presetClass="entr" presetSubtype="0" fill="hold" grpId="0" nodeType="clickEffect">
                                   <p:stCondLst>
                                     <p:cond delay="0"/>
                                   </p:stCondLst>
                                   <p:childTnLst>
                                     <p:set>
                                       <p:cBhvr>
-                                        <p:cTn id="10" dur="1" fill="hold">
+                                        <p:cTn id="11" dur="1" fill="hold">
                                           <p:stCondLst>
                                             <p:cond delay="0"/>
                                           </p:stCondLst>
                                         </p:cTn>
                                         <p:tgtEl>
-                                          <p:spTgt spid="19"/>
+                                          <p:spTgt spid="34"/>
                                         </p:tgtEl>
                                         <p:attrNameLst>
                                           <p:attrName>style.visibility</p:attrName>
@@ -10433,29 +10566,19 @@
                                         <p:strVal val="visible"/>
                                       </p:to>
                                     </p:set>
+                                    <p:animEffect transition="in" filter="fade">
+                                      <p:cBhvr>
+                                        <p:cTn id="12" dur="500"/>
+                                        <p:tgtEl>
+                                          <p:spTgt spid="34"/>
+                                        </p:tgtEl>
+                                      </p:cBhvr>
+                                    </p:animEffect>
                                   </p:childTnLst>
                                 </p:cTn>
                               </p:par>
-                            </p:childTnLst>
-                          </p:cTn>
-                        </p:par>
-                      </p:childTnLst>
-                    </p:cTn>
-                  </p:par>
-                  <p:par>
-                    <p:cTn id="11" fill="hold">
-                      <p:stCondLst>
-                        <p:cond delay="indefinite"/>
-                      </p:stCondLst>
-                      <p:childTnLst>
-                        <p:par>
-                          <p:cTn id="12" fill="hold">
-                            <p:stCondLst>
-                              <p:cond delay="0"/>
-                            </p:stCondLst>
-                            <p:childTnLst>
                               <p:par>
-                                <p:cTn id="13" presetID="1" presetClass="entr" presetSubtype="0" fill="hold" grpId="0" nodeType="clickEffect">
+                                <p:cTn id="13" presetID="10" presetClass="entr" presetSubtype="0" fill="hold" grpId="0" nodeType="withEffect">
                                   <p:stCondLst>
                                     <p:cond delay="0"/>
                                   </p:stCondLst>
@@ -10478,18 +10601,71 @@
                                         <p:strVal val="visible"/>
                                       </p:to>
                                     </p:set>
+                                    <p:animEffect transition="in" filter="fade">
+                                      <p:cBhvr>
+                                        <p:cTn id="15" dur="500"/>
+                                        <p:tgtEl>
+                                          <p:spTgt spid="35"/>
+                                        </p:tgtEl>
+                                      </p:cBhvr>
+                                    </p:animEffect>
                                   </p:childTnLst>
                                 </p:cTn>
                               </p:par>
+                            </p:childTnLst>
+                          </p:cTn>
+                        </p:par>
+                      </p:childTnLst>
+                    </p:cTn>
+                  </p:par>
+                  <p:par>
+                    <p:cTn id="16" fill="hold">
+                      <p:stCondLst>
+                        <p:cond delay="indefinite"/>
+                      </p:stCondLst>
+                      <p:childTnLst>
+                        <p:par>
+                          <p:cTn id="17" fill="hold">
+                            <p:stCondLst>
+                              <p:cond delay="0"/>
+                            </p:stCondLst>
+                            <p:childTnLst>
                               <p:par>
-                                <p:cTn id="15" presetID="1" presetClass="entr" presetSubtype="0" fill="hold" grpId="0" nodeType="withEffect">
+                                <p:cTn id="18" presetID="1" presetClass="entr" presetSubtype="0" fill="hold" nodeType="clickEffect">
                                   <p:stCondLst>
                                     <p:cond delay="0"/>
                                   </p:stCondLst>
                                   <p:childTnLst>
                                     <p:set>
                                       <p:cBhvr>
-                                        <p:cTn id="16" dur="1" fill="hold">
+                                        <p:cTn id="19" dur="1" fill="hold">
+                                          <p:stCondLst>
+                                            <p:cond delay="0"/>
+                                          </p:stCondLst>
+                                        </p:cTn>
+                                        <p:tgtEl>
+                                          <p:spTgt spid="10"/>
+                                        </p:tgtEl>
+                                        <p:attrNameLst>
+                                          <p:attrName>style.visibility</p:attrName>
+                                        </p:attrNameLst>
+                                      </p:cBhvr>
+                                      <p:to>
+                                        <p:strVal val="visible"/>
+                                      </p:to>
+                                    </p:set>
+                                  </p:childTnLst>
+                                </p:cTn>
+                              </p:par>
+                              <p:par>
+                                <p:cTn id="20" presetID="1" presetClass="entr" presetSubtype="0" fill="hold" grpId="0" nodeType="withEffect">
+                                  <p:stCondLst>
+                                    <p:cond delay="0"/>
+                                  </p:stCondLst>
+                                  <p:childTnLst>
+                                    <p:set>
+                                      <p:cBhvr>
+                                        <p:cTn id="21" dur="1" fill="hold">
                                           <p:stCondLst>
                                             <p:cond delay="0"/>
                                           </p:stCondLst>
@@ -10508,15 +10684,60 @@
                                   </p:childTnLst>
                                 </p:cTn>
                               </p:par>
+                            </p:childTnLst>
+                          </p:cTn>
+                        </p:par>
+                      </p:childTnLst>
+                    </p:cTn>
+                  </p:par>
+                  <p:par>
+                    <p:cTn id="22" fill="hold">
+                      <p:stCondLst>
+                        <p:cond delay="indefinite"/>
+                      </p:stCondLst>
+                      <p:childTnLst>
+                        <p:par>
+                          <p:cTn id="23" fill="hold">
+                            <p:stCondLst>
+                              <p:cond delay="0"/>
+                            </p:stCondLst>
+                            <p:childTnLst>
                               <p:par>
-                                <p:cTn id="17" presetID="1" presetClass="entr" presetSubtype="0" fill="hold" grpId="0" nodeType="withEffect">
+                                <p:cTn id="24" presetID="1" presetClass="entr" presetSubtype="0" fill="hold" nodeType="clickEffect">
                                   <p:stCondLst>
                                     <p:cond delay="0"/>
                                   </p:stCondLst>
                                   <p:childTnLst>
                                     <p:set>
                                       <p:cBhvr>
-                                        <p:cTn id="18" dur="1" fill="hold">
+                                        <p:cTn id="25" dur="1" fill="hold">
+                                          <p:stCondLst>
+                                            <p:cond delay="0"/>
+                                          </p:stCondLst>
+                                        </p:cTn>
+                                        <p:tgtEl>
+                                          <p:spTgt spid="19"/>
+                                        </p:tgtEl>
+                                        <p:attrNameLst>
+                                          <p:attrName>style.visibility</p:attrName>
+                                        </p:attrNameLst>
+                                      </p:cBhvr>
+                                      <p:to>
+                                        <p:strVal val="visible"/>
+                                      </p:to>
+                                    </p:set>
+                                  </p:childTnLst>
+                                </p:cTn>
+                              </p:par>
+                              <p:par>
+                                <p:cTn id="26" presetID="1" presetClass="entr" presetSubtype="0" fill="hold" grpId="0" nodeType="withEffect">
+                                  <p:stCondLst>
+                                    <p:cond delay="0"/>
+                                  </p:stCondLst>
+                                  <p:childTnLst>
+                                    <p:set>
+                                      <p:cBhvr>
+                                        <p:cTn id="27" dur="1" fill="hold">
                                           <p:stCondLst>
                                             <p:cond delay="0"/>
                                           </p:stCondLst>
@@ -10542,26 +10763,26 @@
                     </p:cTn>
                   </p:par>
                   <p:par>
-                    <p:cTn id="19" fill="hold">
+                    <p:cTn id="28" fill="hold">
                       <p:stCondLst>
                         <p:cond delay="indefinite"/>
                       </p:stCondLst>
                       <p:childTnLst>
                         <p:par>
-                          <p:cTn id="20" fill="hold">
+                          <p:cTn id="29" fill="hold">
                             <p:stCondLst>
                               <p:cond delay="0"/>
                             </p:stCondLst>
                             <p:childTnLst>
                               <p:par>
-                                <p:cTn id="21" presetID="1" presetClass="entr" presetSubtype="0" fill="hold" nodeType="clickEffect">
+                                <p:cTn id="30" presetID="1" presetClass="entr" presetSubtype="0" fill="hold" nodeType="clickEffect">
                                   <p:stCondLst>
                                     <p:cond delay="0"/>
                                   </p:stCondLst>
                                   <p:childTnLst>
                                     <p:set>
                                       <p:cBhvr>
-                                        <p:cTn id="22" dur="1" fill="hold">
+                                        <p:cTn id="31" dur="1" fill="hold">
                                           <p:stCondLst>
                                             <p:cond delay="0"/>
                                           </p:stCondLst>
@@ -10608,8 +10829,10 @@
       </p:par>
     </p:tnLst>
     <p:bldLst>
+      <p:bldP spid="8" grpId="0" animBg="1"/>
       <p:bldP spid="32" grpId="0"/>
       <p:bldP spid="33" grpId="0"/>
+      <p:bldP spid="34" grpId="0"/>
       <p:bldP spid="35" grpId="0"/>
     </p:bldLst>
   </p:timing>
@@ -10988,6 +11211,397 @@
   <p:clrMapOvr>
     <a:masterClrMapping/>
   </p:clrMapOvr>
+  <p:timing>
+    <p:tnLst>
+      <p:par>
+        <p:cTn id="1" dur="indefinite" restart="never" nodeType="tmRoot">
+          <p:childTnLst>
+            <p:seq concurrent="1" nextAc="seek">
+              <p:cTn id="2" dur="indefinite" nodeType="mainSeq">
+                <p:childTnLst>
+                  <p:par>
+                    <p:cTn id="3" fill="hold">
+                      <p:stCondLst>
+                        <p:cond delay="indefinite"/>
+                      </p:stCondLst>
+                      <p:childTnLst>
+                        <p:par>
+                          <p:cTn id="4" fill="hold">
+                            <p:stCondLst>
+                              <p:cond delay="0"/>
+                            </p:stCondLst>
+                            <p:childTnLst>
+                              <p:par>
+                                <p:cTn id="5" presetID="10" presetClass="entr" presetSubtype="0" fill="hold" nodeType="clickEffect">
+                                  <p:stCondLst>
+                                    <p:cond delay="0"/>
+                                  </p:stCondLst>
+                                  <p:childTnLst>
+                                    <p:set>
+                                      <p:cBhvr>
+                                        <p:cTn id="6" dur="1" fill="hold">
+                                          <p:stCondLst>
+                                            <p:cond delay="0"/>
+                                          </p:stCondLst>
+                                        </p:cTn>
+                                        <p:tgtEl>
+                                          <p:spTgt spid="6">
+                                            <p:txEl>
+                                              <p:pRg st="1" end="1"/>
+                                            </p:txEl>
+                                          </p:spTgt>
+                                        </p:tgtEl>
+                                        <p:attrNameLst>
+                                          <p:attrName>style.visibility</p:attrName>
+                                        </p:attrNameLst>
+                                      </p:cBhvr>
+                                      <p:to>
+                                        <p:strVal val="visible"/>
+                                      </p:to>
+                                    </p:set>
+                                    <p:animEffect transition="in" filter="fade">
+                                      <p:cBhvr>
+                                        <p:cTn id="7" dur="500"/>
+                                        <p:tgtEl>
+                                          <p:spTgt spid="6">
+                                            <p:txEl>
+                                              <p:pRg st="1" end="1"/>
+                                            </p:txEl>
+                                          </p:spTgt>
+                                        </p:tgtEl>
+                                      </p:cBhvr>
+                                    </p:animEffect>
+                                  </p:childTnLst>
+                                </p:cTn>
+                              </p:par>
+                            </p:childTnLst>
+                          </p:cTn>
+                        </p:par>
+                      </p:childTnLst>
+                    </p:cTn>
+                  </p:par>
+                  <p:par>
+                    <p:cTn id="8" fill="hold">
+                      <p:stCondLst>
+                        <p:cond delay="indefinite"/>
+                      </p:stCondLst>
+                      <p:childTnLst>
+                        <p:par>
+                          <p:cTn id="9" fill="hold">
+                            <p:stCondLst>
+                              <p:cond delay="0"/>
+                            </p:stCondLst>
+                            <p:childTnLst>
+                              <p:par>
+                                <p:cTn id="10" presetID="10" presetClass="entr" presetSubtype="0" fill="hold" nodeType="clickEffect">
+                                  <p:stCondLst>
+                                    <p:cond delay="0"/>
+                                  </p:stCondLst>
+                                  <p:childTnLst>
+                                    <p:set>
+                                      <p:cBhvr>
+                                        <p:cTn id="11" dur="1" fill="hold">
+                                          <p:stCondLst>
+                                            <p:cond delay="0"/>
+                                          </p:stCondLst>
+                                        </p:cTn>
+                                        <p:tgtEl>
+                                          <p:spTgt spid="6">
+                                            <p:txEl>
+                                              <p:pRg st="2" end="2"/>
+                                            </p:txEl>
+                                          </p:spTgt>
+                                        </p:tgtEl>
+                                        <p:attrNameLst>
+                                          <p:attrName>style.visibility</p:attrName>
+                                        </p:attrNameLst>
+                                      </p:cBhvr>
+                                      <p:to>
+                                        <p:strVal val="visible"/>
+                                      </p:to>
+                                    </p:set>
+                                    <p:animEffect transition="in" filter="fade">
+                                      <p:cBhvr>
+                                        <p:cTn id="12" dur="500"/>
+                                        <p:tgtEl>
+                                          <p:spTgt spid="6">
+                                            <p:txEl>
+                                              <p:pRg st="2" end="2"/>
+                                            </p:txEl>
+                                          </p:spTgt>
+                                        </p:tgtEl>
+                                      </p:cBhvr>
+                                    </p:animEffect>
+                                  </p:childTnLst>
+                                </p:cTn>
+                              </p:par>
+                            </p:childTnLst>
+                          </p:cTn>
+                        </p:par>
+                      </p:childTnLst>
+                    </p:cTn>
+                  </p:par>
+                  <p:par>
+                    <p:cTn id="13" fill="hold">
+                      <p:stCondLst>
+                        <p:cond delay="indefinite"/>
+                      </p:stCondLst>
+                      <p:childTnLst>
+                        <p:par>
+                          <p:cTn id="14" fill="hold">
+                            <p:stCondLst>
+                              <p:cond delay="0"/>
+                            </p:stCondLst>
+                            <p:childTnLst>
+                              <p:par>
+                                <p:cTn id="15" presetID="10" presetClass="entr" presetSubtype="0" fill="hold" nodeType="clickEffect">
+                                  <p:stCondLst>
+                                    <p:cond delay="0"/>
+                                  </p:stCondLst>
+                                  <p:childTnLst>
+                                    <p:set>
+                                      <p:cBhvr>
+                                        <p:cTn id="16" dur="1" fill="hold">
+                                          <p:stCondLst>
+                                            <p:cond delay="0"/>
+                                          </p:stCondLst>
+                                        </p:cTn>
+                                        <p:tgtEl>
+                                          <p:spTgt spid="6">
+                                            <p:txEl>
+                                              <p:pRg st="3" end="3"/>
+                                            </p:txEl>
+                                          </p:spTgt>
+                                        </p:tgtEl>
+                                        <p:attrNameLst>
+                                          <p:attrName>style.visibility</p:attrName>
+                                        </p:attrNameLst>
+                                      </p:cBhvr>
+                                      <p:to>
+                                        <p:strVal val="visible"/>
+                                      </p:to>
+                                    </p:set>
+                                    <p:animEffect transition="in" filter="fade">
+                                      <p:cBhvr>
+                                        <p:cTn id="17" dur="500"/>
+                                        <p:tgtEl>
+                                          <p:spTgt spid="6">
+                                            <p:txEl>
+                                              <p:pRg st="3" end="3"/>
+                                            </p:txEl>
+                                          </p:spTgt>
+                                        </p:tgtEl>
+                                      </p:cBhvr>
+                                    </p:animEffect>
+                                  </p:childTnLst>
+                                </p:cTn>
+                              </p:par>
+                            </p:childTnLst>
+                          </p:cTn>
+                        </p:par>
+                      </p:childTnLst>
+                    </p:cTn>
+                  </p:par>
+                  <p:par>
+                    <p:cTn id="18" fill="hold">
+                      <p:stCondLst>
+                        <p:cond delay="indefinite"/>
+                      </p:stCondLst>
+                      <p:childTnLst>
+                        <p:par>
+                          <p:cTn id="19" fill="hold">
+                            <p:stCondLst>
+                              <p:cond delay="0"/>
+                            </p:stCondLst>
+                            <p:childTnLst>
+                              <p:par>
+                                <p:cTn id="20" presetID="10" presetClass="entr" presetSubtype="0" fill="hold" nodeType="clickEffect">
+                                  <p:stCondLst>
+                                    <p:cond delay="0"/>
+                                  </p:stCondLst>
+                                  <p:childTnLst>
+                                    <p:set>
+                                      <p:cBhvr>
+                                        <p:cTn id="21" dur="1" fill="hold">
+                                          <p:stCondLst>
+                                            <p:cond delay="0"/>
+                                          </p:stCondLst>
+                                        </p:cTn>
+                                        <p:tgtEl>
+                                          <p:spTgt spid="6">
+                                            <p:txEl>
+                                              <p:pRg st="4" end="4"/>
+                                            </p:txEl>
+                                          </p:spTgt>
+                                        </p:tgtEl>
+                                        <p:attrNameLst>
+                                          <p:attrName>style.visibility</p:attrName>
+                                        </p:attrNameLst>
+                                      </p:cBhvr>
+                                      <p:to>
+                                        <p:strVal val="visible"/>
+                                      </p:to>
+                                    </p:set>
+                                    <p:animEffect transition="in" filter="fade">
+                                      <p:cBhvr>
+                                        <p:cTn id="22" dur="500"/>
+                                        <p:tgtEl>
+                                          <p:spTgt spid="6">
+                                            <p:txEl>
+                                              <p:pRg st="4" end="4"/>
+                                            </p:txEl>
+                                          </p:spTgt>
+                                        </p:tgtEl>
+                                      </p:cBhvr>
+                                    </p:animEffect>
+                                  </p:childTnLst>
+                                </p:cTn>
+                              </p:par>
+                            </p:childTnLst>
+                          </p:cTn>
+                        </p:par>
+                      </p:childTnLst>
+                    </p:cTn>
+                  </p:par>
+                  <p:par>
+                    <p:cTn id="23" fill="hold">
+                      <p:stCondLst>
+                        <p:cond delay="indefinite"/>
+                      </p:stCondLst>
+                      <p:childTnLst>
+                        <p:par>
+                          <p:cTn id="24" fill="hold">
+                            <p:stCondLst>
+                              <p:cond delay="0"/>
+                            </p:stCondLst>
+                            <p:childTnLst>
+                              <p:par>
+                                <p:cTn id="25" presetID="10" presetClass="entr" presetSubtype="0" fill="hold" nodeType="clickEffect">
+                                  <p:stCondLst>
+                                    <p:cond delay="0"/>
+                                  </p:stCondLst>
+                                  <p:childTnLst>
+                                    <p:set>
+                                      <p:cBhvr>
+                                        <p:cTn id="26" dur="1" fill="hold">
+                                          <p:stCondLst>
+                                            <p:cond delay="0"/>
+                                          </p:stCondLst>
+                                        </p:cTn>
+                                        <p:tgtEl>
+                                          <p:spTgt spid="6">
+                                            <p:txEl>
+                                              <p:pRg st="5" end="5"/>
+                                            </p:txEl>
+                                          </p:spTgt>
+                                        </p:tgtEl>
+                                        <p:attrNameLst>
+                                          <p:attrName>style.visibility</p:attrName>
+                                        </p:attrNameLst>
+                                      </p:cBhvr>
+                                      <p:to>
+                                        <p:strVal val="visible"/>
+                                      </p:to>
+                                    </p:set>
+                                    <p:animEffect transition="in" filter="fade">
+                                      <p:cBhvr>
+                                        <p:cTn id="27" dur="500"/>
+                                        <p:tgtEl>
+                                          <p:spTgt spid="6">
+                                            <p:txEl>
+                                              <p:pRg st="5" end="5"/>
+                                            </p:txEl>
+                                          </p:spTgt>
+                                        </p:tgtEl>
+                                      </p:cBhvr>
+                                    </p:animEffect>
+                                  </p:childTnLst>
+                                </p:cTn>
+                              </p:par>
+                            </p:childTnLst>
+                          </p:cTn>
+                        </p:par>
+                      </p:childTnLst>
+                    </p:cTn>
+                  </p:par>
+                  <p:par>
+                    <p:cTn id="28" fill="hold">
+                      <p:stCondLst>
+                        <p:cond delay="indefinite"/>
+                      </p:stCondLst>
+                      <p:childTnLst>
+                        <p:par>
+                          <p:cTn id="29" fill="hold">
+                            <p:stCondLst>
+                              <p:cond delay="0"/>
+                            </p:stCondLst>
+                            <p:childTnLst>
+                              <p:par>
+                                <p:cTn id="30" presetID="10" presetClass="entr" presetSubtype="0" fill="hold" grpId="0" nodeType="clickEffect">
+                                  <p:stCondLst>
+                                    <p:cond delay="0"/>
+                                  </p:stCondLst>
+                                  <p:childTnLst>
+                                    <p:set>
+                                      <p:cBhvr>
+                                        <p:cTn id="31" dur="1" fill="hold">
+                                          <p:stCondLst>
+                                            <p:cond delay="0"/>
+                                          </p:stCondLst>
+                                        </p:cTn>
+                                        <p:tgtEl>
+                                          <p:spTgt spid="10"/>
+                                        </p:tgtEl>
+                                        <p:attrNameLst>
+                                          <p:attrName>style.visibility</p:attrName>
+                                        </p:attrNameLst>
+                                      </p:cBhvr>
+                                      <p:to>
+                                        <p:strVal val="visible"/>
+                                      </p:to>
+                                    </p:set>
+                                    <p:animEffect transition="in" filter="fade">
+                                      <p:cBhvr>
+                                        <p:cTn id="32" dur="500"/>
+                                        <p:tgtEl>
+                                          <p:spTgt spid="10"/>
+                                        </p:tgtEl>
+                                      </p:cBhvr>
+                                    </p:animEffect>
+                                  </p:childTnLst>
+                                </p:cTn>
+                              </p:par>
+                            </p:childTnLst>
+                          </p:cTn>
+                        </p:par>
+                      </p:childTnLst>
+                    </p:cTn>
+                  </p:par>
+                </p:childTnLst>
+              </p:cTn>
+              <p:prevCondLst>
+                <p:cond evt="onPrev" delay="0">
+                  <p:tgtEl>
+                    <p:sldTgt/>
+                  </p:tgtEl>
+                </p:cond>
+              </p:prevCondLst>
+              <p:nextCondLst>
+                <p:cond evt="onNext" delay="0">
+                  <p:tgtEl>
+                    <p:sldTgt/>
+                  </p:tgtEl>
+                </p:cond>
+              </p:nextCondLst>
+            </p:seq>
+          </p:childTnLst>
+        </p:cTn>
+      </p:par>
+    </p:tnLst>
+    <p:bldLst>
+      <p:bldP spid="10" grpId="0" animBg="1"/>
+    </p:bldLst>
+  </p:timing>
 </p:sld>
 </file>
 
@@ -15268,9 +15882,8 @@
                 <a:ea typeface="Calibri" pitchFamily="34" charset="-122"/>
                 <a:cs typeface="Calibri" pitchFamily="34" charset="-120"/>
               </a:rPr>
-              <a:t>Section title</a:t>
+              <a:t>Basic Causal Structures</a:t>
             </a:r>
-            <a:endParaRPr lang="en-US" sz="900" dirty="0"/>
           </a:p>
         </p:txBody>
       </p:sp>
@@ -20500,36 +21113,6 @@
           </a:extLst>
         </p:spPr>
       </p:pic>
-      <p:pic>
-        <p:nvPicPr>
-          <p:cNvPr id="41" name="Picture 14">
-            <a:extLst>
-              <a:ext uri="{FF2B5EF4-FFF2-40B4-BE49-F238E27FC236}">
-                <a16:creationId xmlns:a16="http://schemas.microsoft.com/office/drawing/2014/main" id="{845996A4-BF4E-07BD-CB5D-314917C0217A}"/>
-              </a:ext>
-            </a:extLst>
-          </p:cNvPr>
-          <p:cNvPicPr>
-            <a:picLocks noChangeAspect="1"/>
-          </p:cNvPicPr>
-          <p:nvPr/>
-        </p:nvPicPr>
-        <p:blipFill>
-          <a:blip r:embed="rId8"/>
-          <a:stretch>
-            <a:fillRect/>
-          </a:stretch>
-        </p:blipFill>
-        <p:spPr>
-          <a:xfrm>
-            <a:off x="6548544" y="3990502"/>
-            <a:ext cx="2539987" cy="326757"/>
-          </a:xfrm>
-          <a:prstGeom prst="rect">
-            <a:avLst/>
-          </a:prstGeom>
-        </p:spPr>
-      </p:pic>
     </p:spTree>
     <p:extLst>
       <p:ext uri="{BB962C8B-B14F-4D97-AF65-F5344CB8AC3E}">
@@ -20588,7 +21171,7 @@
                                 </p:cTn>
                               </p:par>
                               <p:par>
-                                <p:cTn id="7" presetID="1" presetClass="entr" presetSubtype="0" fill="hold" nodeType="withEffect">
+                                <p:cTn id="7" presetID="1" presetClass="entr" presetSubtype="0" fill="hold" grpId="0" nodeType="withEffect">
                                   <p:stCondLst>
                                     <p:cond delay="0"/>
                                   </p:stCondLst>
@@ -20596,6 +21179,60 @@
                                     <p:set>
                                       <p:cBhvr>
                                         <p:cTn id="8" dur="1" fill="hold">
+                                          <p:stCondLst>
+                                            <p:cond delay="0"/>
+                                          </p:stCondLst>
+                                        </p:cTn>
+                                        <p:tgtEl>
+                                          <p:spTgt spid="17"/>
+                                        </p:tgtEl>
+                                        <p:attrNameLst>
+                                          <p:attrName>style.visibility</p:attrName>
+                                        </p:attrNameLst>
+                                      </p:cBhvr>
+                                      <p:to>
+                                        <p:strVal val="visible"/>
+                                      </p:to>
+                                    </p:set>
+                                  </p:childTnLst>
+                                </p:cTn>
+                              </p:par>
+                              <p:par>
+                                <p:cTn id="9" presetID="1" presetClass="entr" presetSubtype="0" fill="hold" nodeType="withEffect">
+                                  <p:stCondLst>
+                                    <p:cond delay="0"/>
+                                  </p:stCondLst>
+                                  <p:childTnLst>
+                                    <p:set>
+                                      <p:cBhvr>
+                                        <p:cTn id="10" dur="1" fill="hold">
+                                          <p:stCondLst>
+                                            <p:cond delay="0"/>
+                                          </p:stCondLst>
+                                        </p:cTn>
+                                        <p:tgtEl>
+                                          <p:spTgt spid="28"/>
+                                        </p:tgtEl>
+                                        <p:attrNameLst>
+                                          <p:attrName>style.visibility</p:attrName>
+                                        </p:attrNameLst>
+                                      </p:cBhvr>
+                                      <p:to>
+                                        <p:strVal val="visible"/>
+                                      </p:to>
+                                    </p:set>
+                                  </p:childTnLst>
+                                </p:cTn>
+                              </p:par>
+                              <p:par>
+                                <p:cTn id="11" presetID="1" presetClass="entr" presetSubtype="0" fill="hold" nodeType="withEffect">
+                                  <p:stCondLst>
+                                    <p:cond delay="0"/>
+                                  </p:stCondLst>
+                                  <p:childTnLst>
+                                    <p:set>
+                                      <p:cBhvr>
+                                        <p:cTn id="12" dur="1" fill="hold">
                                           <p:stCondLst>
                                             <p:cond delay="0"/>
                                           </p:stCondLst>
@@ -20615,52 +21252,7 @@
                                 </p:cTn>
                               </p:par>
                               <p:par>
-                                <p:cTn id="9" presetID="1" presetClass="entr" presetSubtype="0" fill="hold" grpId="0" nodeType="withEffect">
-                                  <p:stCondLst>
-                                    <p:cond delay="0"/>
-                                  </p:stCondLst>
-                                  <p:childTnLst>
-                                    <p:set>
-                                      <p:cBhvr>
-                                        <p:cTn id="10" dur="1" fill="hold">
-                                          <p:stCondLst>
-                                            <p:cond delay="0"/>
-                                          </p:stCondLst>
-                                        </p:cTn>
-                                        <p:tgtEl>
-                                          <p:spTgt spid="17"/>
-                                        </p:tgtEl>
-                                        <p:attrNameLst>
-                                          <p:attrName>style.visibility</p:attrName>
-                                        </p:attrNameLst>
-                                      </p:cBhvr>
-                                      <p:to>
-                                        <p:strVal val="visible"/>
-                                      </p:to>
-                                    </p:set>
-                                  </p:childTnLst>
-                                </p:cTn>
-                              </p:par>
-                            </p:childTnLst>
-                          </p:cTn>
-                        </p:par>
-                      </p:childTnLst>
-                    </p:cTn>
-                  </p:par>
-                  <p:par>
-                    <p:cTn id="11" fill="hold">
-                      <p:stCondLst>
-                        <p:cond delay="indefinite"/>
-                      </p:stCondLst>
-                      <p:childTnLst>
-                        <p:par>
-                          <p:cTn id="12" fill="hold">
-                            <p:stCondLst>
-                              <p:cond delay="0"/>
-                            </p:stCondLst>
-                            <p:childTnLst>
-                              <p:par>
-                                <p:cTn id="13" presetID="1" presetClass="entr" presetSubtype="0" fill="hold" nodeType="clickEffect">
+                                <p:cTn id="13" presetID="1" presetClass="entr" presetSubtype="0" fill="hold" grpId="0" nodeType="withEffect">
                                   <p:stCondLst>
                                     <p:cond delay="0"/>
                                   </p:stCondLst>
@@ -20668,33 +21260,6 @@
                                     <p:set>
                                       <p:cBhvr>
                                         <p:cTn id="14" dur="1" fill="hold">
-                                          <p:stCondLst>
-                                            <p:cond delay="0"/>
-                                          </p:stCondLst>
-                                        </p:cTn>
-                                        <p:tgtEl>
-                                          <p:spTgt spid="28"/>
-                                        </p:tgtEl>
-                                        <p:attrNameLst>
-                                          <p:attrName>style.visibility</p:attrName>
-                                        </p:attrNameLst>
-                                      </p:cBhvr>
-                                      <p:to>
-                                        <p:strVal val="visible"/>
-                                      </p:to>
-                                    </p:set>
-                                  </p:childTnLst>
-                                </p:cTn>
-                              </p:par>
-                              <p:par>
-                                <p:cTn id="15" presetID="1" presetClass="entr" presetSubtype="0" fill="hold" grpId="0" nodeType="withEffect">
-                                  <p:stCondLst>
-                                    <p:cond delay="0"/>
-                                  </p:stCondLst>
-                                  <p:childTnLst>
-                                    <p:set>
-                                      <p:cBhvr>
-                                        <p:cTn id="16" dur="1" fill="hold">
                                           <p:stCondLst>
                                             <p:cond delay="0"/>
                                           </p:stCondLst>
@@ -20713,6 +21278,41 @@
                                   </p:childTnLst>
                                 </p:cTn>
                               </p:par>
+                              <p:par>
+                                <p:cTn id="15" presetID="10" presetClass="entr" presetSubtype="0" fill="hold" nodeType="withEffect">
+                                  <p:stCondLst>
+                                    <p:cond delay="0"/>
+                                  </p:stCondLst>
+                                  <p:childTnLst>
+                                    <p:set>
+                                      <p:cBhvr>
+                                        <p:cTn id="16" dur="1" fill="hold">
+                                          <p:stCondLst>
+                                            <p:cond delay="0"/>
+                                          </p:stCondLst>
+                                        </p:cTn>
+                                        <p:tgtEl>
+                                          <p:spTgt spid="40"/>
+                                        </p:tgtEl>
+                                        <p:attrNameLst>
+                                          <p:attrName>style.visibility</p:attrName>
+                                        </p:attrNameLst>
+                                      </p:cBhvr>
+                                      <p:to>
+                                        <p:strVal val="visible"/>
+                                      </p:to>
+                                    </p:set>
+                                    <p:animEffect transition="in" filter="fade">
+                                      <p:cBhvr>
+                                        <p:cTn id="17" dur="500"/>
+                                        <p:tgtEl>
+                                          <p:spTgt spid="40"/>
+                                        </p:tgtEl>
+                                      </p:cBhvr>
+                                    </p:animEffect>
+                                  </p:childTnLst>
+                                </p:cTn>
+                              </p:par>
                             </p:childTnLst>
                           </p:cTn>
                         </p:par>
@@ -20720,26 +21320,26 @@
                     </p:cTn>
                   </p:par>
                   <p:par>
-                    <p:cTn id="17" fill="hold">
+                    <p:cTn id="18" fill="hold">
                       <p:stCondLst>
                         <p:cond delay="indefinite"/>
                       </p:stCondLst>
                       <p:childTnLst>
                         <p:par>
-                          <p:cTn id="18" fill="hold">
+                          <p:cTn id="19" fill="hold">
                             <p:stCondLst>
                               <p:cond delay="0"/>
                             </p:stCondLst>
                             <p:childTnLst>
                               <p:par>
-                                <p:cTn id="19" presetID="1" presetClass="entr" presetSubtype="0" fill="hold" nodeType="clickEffect">
+                                <p:cTn id="20" presetID="1" presetClass="entr" presetSubtype="0" fill="hold" nodeType="clickEffect">
                                   <p:stCondLst>
                                     <p:cond delay="0"/>
                                   </p:stCondLst>
                                   <p:childTnLst>
                                     <p:set>
                                       <p:cBhvr>
-                                        <p:cTn id="20" dur="1" fill="hold">
+                                        <p:cTn id="21" dur="1" fill="hold">
                                           <p:stCondLst>
                                             <p:cond delay="0"/>
                                           </p:stCondLst>
@@ -20759,14 +21359,14 @@
                                 </p:cTn>
                               </p:par>
                               <p:par>
-                                <p:cTn id="21" presetID="1" presetClass="entr" presetSubtype="0" fill="hold" nodeType="withEffect">
+                                <p:cTn id="22" presetID="1" presetClass="entr" presetSubtype="0" fill="hold" nodeType="withEffect">
                                   <p:stCondLst>
                                     <p:cond delay="0"/>
                                   </p:stCondLst>
                                   <p:childTnLst>
                                     <p:set>
                                       <p:cBhvr>
-                                        <p:cTn id="22" dur="1" fill="hold">
+                                        <p:cTn id="23" dur="1" fill="hold">
                                           <p:stCondLst>
                                             <p:cond delay="0"/>
                                           </p:stCondLst>
@@ -20786,65 +21386,20 @@
                                 </p:cTn>
                               </p:par>
                               <p:par>
-                                <p:cTn id="23" presetID="1" presetClass="entr" presetSubtype="0" fill="hold" grpId="0" nodeType="withEffect">
+                                <p:cTn id="24" presetID="1" presetClass="entr" presetSubtype="0" fill="hold" grpId="0" nodeType="withEffect">
                                   <p:stCondLst>
                                     <p:cond delay="0"/>
                                   </p:stCondLst>
                                   <p:childTnLst>
                                     <p:set>
                                       <p:cBhvr>
-                                        <p:cTn id="24" dur="1" fill="hold">
+                                        <p:cTn id="25" dur="1" fill="hold">
                                           <p:stCondLst>
                                             <p:cond delay="0"/>
                                           </p:stCondLst>
                                         </p:cTn>
                                         <p:tgtEl>
                                           <p:spTgt spid="18"/>
-                                        </p:tgtEl>
-                                        <p:attrNameLst>
-                                          <p:attrName>style.visibility</p:attrName>
-                                        </p:attrNameLst>
-                                      </p:cBhvr>
-                                      <p:to>
-                                        <p:strVal val="visible"/>
-                                      </p:to>
-                                    </p:set>
-                                  </p:childTnLst>
-                                </p:cTn>
-                              </p:par>
-                            </p:childTnLst>
-                          </p:cTn>
-                        </p:par>
-                      </p:childTnLst>
-                    </p:cTn>
-                  </p:par>
-                  <p:par>
-                    <p:cTn id="25" fill="hold">
-                      <p:stCondLst>
-                        <p:cond delay="indefinite"/>
-                      </p:stCondLst>
-                      <p:childTnLst>
-                        <p:par>
-                          <p:cTn id="26" fill="hold">
-                            <p:stCondLst>
-                              <p:cond delay="0"/>
-                            </p:stCondLst>
-                            <p:childTnLst>
-                              <p:par>
-                                <p:cTn id="27" presetID="1" presetClass="entr" presetSubtype="0" fill="hold" nodeType="clickEffect">
-                                  <p:stCondLst>
-                                    <p:cond delay="0"/>
-                                  </p:stCondLst>
-                                  <p:childTnLst>
-                                    <p:set>
-                                      <p:cBhvr>
-                                        <p:cTn id="28" dur="1" fill="hold">
-                                          <p:stCondLst>
-                                            <p:cond delay="0"/>
-                                          </p:stCondLst>
-                                        </p:cTn>
-                                        <p:tgtEl>
-                                          <p:spTgt spid="41"/>
                                         </p:tgtEl>
                                         <p:attrNameLst>
                                           <p:attrName>style.visibility</p:attrName>
@@ -23595,6 +24150,92 @@
   <p:clrMapOvr>
     <a:masterClrMapping/>
   </p:clrMapOvr>
+  <p:timing>
+    <p:tnLst>
+      <p:par>
+        <p:cTn id="1" dur="indefinite" restart="never" nodeType="tmRoot">
+          <p:childTnLst>
+            <p:seq concurrent="1" nextAc="seek">
+              <p:cTn id="2" dur="indefinite" nodeType="mainSeq">
+                <p:childTnLst>
+                  <p:par>
+                    <p:cTn id="3" fill="hold">
+                      <p:stCondLst>
+                        <p:cond delay="indefinite"/>
+                      </p:stCondLst>
+                      <p:childTnLst>
+                        <p:par>
+                          <p:cTn id="4" fill="hold">
+                            <p:stCondLst>
+                              <p:cond delay="0"/>
+                            </p:stCondLst>
+                            <p:childTnLst>
+                              <p:par>
+                                <p:cTn id="5" presetID="10" presetClass="entr" presetSubtype="0" fill="hold" grpId="0" nodeType="clickEffect">
+                                  <p:stCondLst>
+                                    <p:cond delay="0"/>
+                                  </p:stCondLst>
+                                  <p:childTnLst>
+                                    <p:set>
+                                      <p:cBhvr>
+                                        <p:cTn id="6" dur="1" fill="hold">
+                                          <p:stCondLst>
+                                            <p:cond delay="0"/>
+                                          </p:stCondLst>
+                                        </p:cTn>
+                                        <p:tgtEl>
+                                          <p:spTgt spid="63"/>
+                                        </p:tgtEl>
+                                        <p:attrNameLst>
+                                          <p:attrName>style.visibility</p:attrName>
+                                        </p:attrNameLst>
+                                      </p:cBhvr>
+                                      <p:to>
+                                        <p:strVal val="visible"/>
+                                      </p:to>
+                                    </p:set>
+                                    <p:animEffect transition="in" filter="fade">
+                                      <p:cBhvr>
+                                        <p:cTn id="7" dur="500"/>
+                                        <p:tgtEl>
+                                          <p:spTgt spid="63"/>
+                                        </p:tgtEl>
+                                      </p:cBhvr>
+                                    </p:animEffect>
+                                  </p:childTnLst>
+                                </p:cTn>
+                              </p:par>
+                            </p:childTnLst>
+                          </p:cTn>
+                        </p:par>
+                      </p:childTnLst>
+                    </p:cTn>
+                  </p:par>
+                </p:childTnLst>
+              </p:cTn>
+              <p:prevCondLst>
+                <p:cond evt="onPrev" delay="0">
+                  <p:tgtEl>
+                    <p:sldTgt/>
+                  </p:tgtEl>
+                </p:cond>
+              </p:prevCondLst>
+              <p:nextCondLst>
+                <p:cond evt="onNext" delay="0">
+                  <p:tgtEl>
+                    <p:sldTgt/>
+                  </p:tgtEl>
+                </p:cond>
+              </p:nextCondLst>
+            </p:seq>
+          </p:childTnLst>
+        </p:cTn>
+      </p:par>
+    </p:tnLst>
+    <p:bldLst>
+      <p:bldP spid="63" grpId="0" animBg="1"/>
+    </p:bldLst>
+  </p:timing>
 </p:sld>
 </file>
 
@@ -31515,6 +32156,463 @@
   <p:clrMapOvr>
     <a:masterClrMapping/>
   </p:clrMapOvr>
+  <p:timing>
+    <p:tnLst>
+      <p:par>
+        <p:cTn id="1" dur="indefinite" restart="never" nodeType="tmRoot">
+          <p:childTnLst>
+            <p:seq concurrent="1" nextAc="seek">
+              <p:cTn id="2" dur="indefinite" nodeType="mainSeq">
+                <p:childTnLst>
+                  <p:par>
+                    <p:cTn id="3" fill="hold">
+                      <p:stCondLst>
+                        <p:cond delay="indefinite"/>
+                      </p:stCondLst>
+                      <p:childTnLst>
+                        <p:par>
+                          <p:cTn id="4" fill="hold">
+                            <p:stCondLst>
+                              <p:cond delay="0"/>
+                            </p:stCondLst>
+                            <p:childTnLst>
+                              <p:par>
+                                <p:cTn id="5" presetID="10" presetClass="entr" presetSubtype="0" fill="hold" nodeType="clickEffect">
+                                  <p:stCondLst>
+                                    <p:cond delay="0"/>
+                                  </p:stCondLst>
+                                  <p:childTnLst>
+                                    <p:set>
+                                      <p:cBhvr>
+                                        <p:cTn id="6" dur="1" fill="hold">
+                                          <p:stCondLst>
+                                            <p:cond delay="0"/>
+                                          </p:stCondLst>
+                                        </p:cTn>
+                                        <p:tgtEl>
+                                          <p:spTgt spid="8"/>
+                                        </p:tgtEl>
+                                        <p:attrNameLst>
+                                          <p:attrName>style.visibility</p:attrName>
+                                        </p:attrNameLst>
+                                      </p:cBhvr>
+                                      <p:to>
+                                        <p:strVal val="visible"/>
+                                      </p:to>
+                                    </p:set>
+                                    <p:animEffect transition="in" filter="fade">
+                                      <p:cBhvr>
+                                        <p:cTn id="7" dur="500"/>
+                                        <p:tgtEl>
+                                          <p:spTgt spid="8"/>
+                                        </p:tgtEl>
+                                      </p:cBhvr>
+                                    </p:animEffect>
+                                  </p:childTnLst>
+                                </p:cTn>
+                              </p:par>
+                              <p:par>
+                                <p:cTn id="8" presetID="10" presetClass="entr" presetSubtype="0" fill="hold" grpId="0" nodeType="withEffect">
+                                  <p:stCondLst>
+                                    <p:cond delay="0"/>
+                                  </p:stCondLst>
+                                  <p:childTnLst>
+                                    <p:set>
+                                      <p:cBhvr>
+                                        <p:cTn id="9" dur="1" fill="hold">
+                                          <p:stCondLst>
+                                            <p:cond delay="0"/>
+                                          </p:stCondLst>
+                                        </p:cTn>
+                                        <p:tgtEl>
+                                          <p:spTgt spid="38"/>
+                                        </p:tgtEl>
+                                        <p:attrNameLst>
+                                          <p:attrName>style.visibility</p:attrName>
+                                        </p:attrNameLst>
+                                      </p:cBhvr>
+                                      <p:to>
+                                        <p:strVal val="visible"/>
+                                      </p:to>
+                                    </p:set>
+                                    <p:animEffect transition="in" filter="fade">
+                                      <p:cBhvr>
+                                        <p:cTn id="10" dur="500"/>
+                                        <p:tgtEl>
+                                          <p:spTgt spid="38"/>
+                                        </p:tgtEl>
+                                      </p:cBhvr>
+                                    </p:animEffect>
+                                  </p:childTnLst>
+                                </p:cTn>
+                              </p:par>
+                              <p:par>
+                                <p:cTn id="11" presetID="10" presetClass="entr" presetSubtype="0" fill="hold" nodeType="withEffect">
+                                  <p:stCondLst>
+                                    <p:cond delay="0"/>
+                                  </p:stCondLst>
+                                  <p:childTnLst>
+                                    <p:set>
+                                      <p:cBhvr>
+                                        <p:cTn id="12" dur="1" fill="hold">
+                                          <p:stCondLst>
+                                            <p:cond delay="0"/>
+                                          </p:stCondLst>
+                                        </p:cTn>
+                                        <p:tgtEl>
+                                          <p:spTgt spid="17"/>
+                                        </p:tgtEl>
+                                        <p:attrNameLst>
+                                          <p:attrName>style.visibility</p:attrName>
+                                        </p:attrNameLst>
+                                      </p:cBhvr>
+                                      <p:to>
+                                        <p:strVal val="visible"/>
+                                      </p:to>
+                                    </p:set>
+                                    <p:animEffect transition="in" filter="fade">
+                                      <p:cBhvr>
+                                        <p:cTn id="13" dur="500"/>
+                                        <p:tgtEl>
+                                          <p:spTgt spid="17"/>
+                                        </p:tgtEl>
+                                      </p:cBhvr>
+                                    </p:animEffect>
+                                  </p:childTnLst>
+                                </p:cTn>
+                              </p:par>
+                              <p:par>
+                                <p:cTn id="14" presetID="10" presetClass="entr" presetSubtype="0" fill="hold" nodeType="withEffect">
+                                  <p:stCondLst>
+                                    <p:cond delay="0"/>
+                                  </p:stCondLst>
+                                  <p:childTnLst>
+                                    <p:set>
+                                      <p:cBhvr>
+                                        <p:cTn id="15" dur="1" fill="hold">
+                                          <p:stCondLst>
+                                            <p:cond delay="0"/>
+                                          </p:stCondLst>
+                                        </p:cTn>
+                                        <p:tgtEl>
+                                          <p:spTgt spid="11"/>
+                                        </p:tgtEl>
+                                        <p:attrNameLst>
+                                          <p:attrName>style.visibility</p:attrName>
+                                        </p:attrNameLst>
+                                      </p:cBhvr>
+                                      <p:to>
+                                        <p:strVal val="visible"/>
+                                      </p:to>
+                                    </p:set>
+                                    <p:animEffect transition="in" filter="fade">
+                                      <p:cBhvr>
+                                        <p:cTn id="16" dur="500"/>
+                                        <p:tgtEl>
+                                          <p:spTgt spid="11"/>
+                                        </p:tgtEl>
+                                      </p:cBhvr>
+                                    </p:animEffect>
+                                  </p:childTnLst>
+                                </p:cTn>
+                              </p:par>
+                              <p:par>
+                                <p:cTn id="17" presetID="10" presetClass="entr" presetSubtype="0" fill="hold" grpId="0" nodeType="withEffect">
+                                  <p:stCondLst>
+                                    <p:cond delay="0"/>
+                                  </p:stCondLst>
+                                  <p:childTnLst>
+                                    <p:set>
+                                      <p:cBhvr>
+                                        <p:cTn id="18" dur="1" fill="hold">
+                                          <p:stCondLst>
+                                            <p:cond delay="0"/>
+                                          </p:stCondLst>
+                                        </p:cTn>
+                                        <p:tgtEl>
+                                          <p:spTgt spid="35"/>
+                                        </p:tgtEl>
+                                        <p:attrNameLst>
+                                          <p:attrName>style.visibility</p:attrName>
+                                        </p:attrNameLst>
+                                      </p:cBhvr>
+                                      <p:to>
+                                        <p:strVal val="visible"/>
+                                      </p:to>
+                                    </p:set>
+                                    <p:animEffect transition="in" filter="fade">
+                                      <p:cBhvr>
+                                        <p:cTn id="19" dur="500"/>
+                                        <p:tgtEl>
+                                          <p:spTgt spid="35"/>
+                                        </p:tgtEl>
+                                      </p:cBhvr>
+                                    </p:animEffect>
+                                  </p:childTnLst>
+                                </p:cTn>
+                              </p:par>
+                              <p:par>
+                                <p:cTn id="20" presetID="10" presetClass="entr" presetSubtype="0" fill="hold" nodeType="withEffect">
+                                  <p:stCondLst>
+                                    <p:cond delay="0"/>
+                                  </p:stCondLst>
+                                  <p:childTnLst>
+                                    <p:set>
+                                      <p:cBhvr>
+                                        <p:cTn id="21" dur="1" fill="hold">
+                                          <p:stCondLst>
+                                            <p:cond delay="0"/>
+                                          </p:stCondLst>
+                                        </p:cTn>
+                                        <p:tgtEl>
+                                          <p:spTgt spid="18"/>
+                                        </p:tgtEl>
+                                        <p:attrNameLst>
+                                          <p:attrName>style.visibility</p:attrName>
+                                        </p:attrNameLst>
+                                      </p:cBhvr>
+                                      <p:to>
+                                        <p:strVal val="visible"/>
+                                      </p:to>
+                                    </p:set>
+                                    <p:animEffect transition="in" filter="fade">
+                                      <p:cBhvr>
+                                        <p:cTn id="22" dur="500"/>
+                                        <p:tgtEl>
+                                          <p:spTgt spid="18"/>
+                                        </p:tgtEl>
+                                      </p:cBhvr>
+                                    </p:animEffect>
+                                  </p:childTnLst>
+                                </p:cTn>
+                              </p:par>
+                              <p:par>
+                                <p:cTn id="23" presetID="10" presetClass="entr" presetSubtype="0" fill="hold" nodeType="withEffect">
+                                  <p:stCondLst>
+                                    <p:cond delay="0"/>
+                                  </p:stCondLst>
+                                  <p:childTnLst>
+                                    <p:set>
+                                      <p:cBhvr>
+                                        <p:cTn id="24" dur="1" fill="hold">
+                                          <p:stCondLst>
+                                            <p:cond delay="0"/>
+                                          </p:stCondLst>
+                                        </p:cTn>
+                                        <p:tgtEl>
+                                          <p:spTgt spid="19"/>
+                                        </p:tgtEl>
+                                        <p:attrNameLst>
+                                          <p:attrName>style.visibility</p:attrName>
+                                        </p:attrNameLst>
+                                      </p:cBhvr>
+                                      <p:to>
+                                        <p:strVal val="visible"/>
+                                      </p:to>
+                                    </p:set>
+                                    <p:animEffect transition="in" filter="fade">
+                                      <p:cBhvr>
+                                        <p:cTn id="25" dur="500"/>
+                                        <p:tgtEl>
+                                          <p:spTgt spid="19"/>
+                                        </p:tgtEl>
+                                      </p:cBhvr>
+                                    </p:animEffect>
+                                  </p:childTnLst>
+                                </p:cTn>
+                              </p:par>
+                              <p:par>
+                                <p:cTn id="26" presetID="10" presetClass="entr" presetSubtype="0" fill="hold" grpId="0" nodeType="withEffect">
+                                  <p:stCondLst>
+                                    <p:cond delay="0"/>
+                                  </p:stCondLst>
+                                  <p:childTnLst>
+                                    <p:set>
+                                      <p:cBhvr>
+                                        <p:cTn id="27" dur="1" fill="hold">
+                                          <p:stCondLst>
+                                            <p:cond delay="0"/>
+                                          </p:stCondLst>
+                                        </p:cTn>
+                                        <p:tgtEl>
+                                          <p:spTgt spid="36"/>
+                                        </p:tgtEl>
+                                        <p:attrNameLst>
+                                          <p:attrName>style.visibility</p:attrName>
+                                        </p:attrNameLst>
+                                      </p:cBhvr>
+                                      <p:to>
+                                        <p:strVal val="visible"/>
+                                      </p:to>
+                                    </p:set>
+                                    <p:animEffect transition="in" filter="fade">
+                                      <p:cBhvr>
+                                        <p:cTn id="28" dur="500"/>
+                                        <p:tgtEl>
+                                          <p:spTgt spid="36"/>
+                                        </p:tgtEl>
+                                      </p:cBhvr>
+                                    </p:animEffect>
+                                  </p:childTnLst>
+                                </p:cTn>
+                              </p:par>
+                              <p:par>
+                                <p:cTn id="29" presetID="10" presetClass="entr" presetSubtype="0" fill="hold" nodeType="withEffect">
+                                  <p:stCondLst>
+                                    <p:cond delay="0"/>
+                                  </p:stCondLst>
+                                  <p:childTnLst>
+                                    <p:set>
+                                      <p:cBhvr>
+                                        <p:cTn id="30" dur="1" fill="hold">
+                                          <p:stCondLst>
+                                            <p:cond delay="0"/>
+                                          </p:stCondLst>
+                                        </p:cTn>
+                                        <p:tgtEl>
+                                          <p:spTgt spid="22"/>
+                                        </p:tgtEl>
+                                        <p:attrNameLst>
+                                          <p:attrName>style.visibility</p:attrName>
+                                        </p:attrNameLst>
+                                      </p:cBhvr>
+                                      <p:to>
+                                        <p:strVal val="visible"/>
+                                      </p:to>
+                                    </p:set>
+                                    <p:animEffect transition="in" filter="fade">
+                                      <p:cBhvr>
+                                        <p:cTn id="31" dur="500"/>
+                                        <p:tgtEl>
+                                          <p:spTgt spid="22"/>
+                                        </p:tgtEl>
+                                      </p:cBhvr>
+                                    </p:animEffect>
+                                  </p:childTnLst>
+                                </p:cTn>
+                              </p:par>
+                              <p:par>
+                                <p:cTn id="32" presetID="10" presetClass="entr" presetSubtype="0" fill="hold" nodeType="withEffect">
+                                  <p:stCondLst>
+                                    <p:cond delay="0"/>
+                                  </p:stCondLst>
+                                  <p:childTnLst>
+                                    <p:set>
+                                      <p:cBhvr>
+                                        <p:cTn id="33" dur="1" fill="hold">
+                                          <p:stCondLst>
+                                            <p:cond delay="0"/>
+                                          </p:stCondLst>
+                                        </p:cTn>
+                                        <p:tgtEl>
+                                          <p:spTgt spid="33"/>
+                                        </p:tgtEl>
+                                        <p:attrNameLst>
+                                          <p:attrName>style.visibility</p:attrName>
+                                        </p:attrNameLst>
+                                      </p:cBhvr>
+                                      <p:to>
+                                        <p:strVal val="visible"/>
+                                      </p:to>
+                                    </p:set>
+                                    <p:animEffect transition="in" filter="fade">
+                                      <p:cBhvr>
+                                        <p:cTn id="34" dur="500"/>
+                                        <p:tgtEl>
+                                          <p:spTgt spid="33"/>
+                                        </p:tgtEl>
+                                      </p:cBhvr>
+                                    </p:animEffect>
+                                  </p:childTnLst>
+                                </p:cTn>
+                              </p:par>
+                            </p:childTnLst>
+                          </p:cTn>
+                        </p:par>
+                      </p:childTnLst>
+                    </p:cTn>
+                  </p:par>
+                  <p:par>
+                    <p:cTn id="35" fill="hold">
+                      <p:stCondLst>
+                        <p:cond delay="indefinite"/>
+                      </p:stCondLst>
+                      <p:childTnLst>
+                        <p:par>
+                          <p:cTn id="36" fill="hold">
+                            <p:stCondLst>
+                              <p:cond delay="0"/>
+                            </p:stCondLst>
+                            <p:childTnLst>
+                              <p:par>
+                                <p:cTn id="37" presetID="10" presetClass="entr" presetSubtype="0" fill="hold" grpId="0" nodeType="clickEffect">
+                                  <p:stCondLst>
+                                    <p:cond delay="0"/>
+                                  </p:stCondLst>
+                                  <p:childTnLst>
+                                    <p:set>
+                                      <p:cBhvr>
+                                        <p:cTn id="38" dur="1" fill="hold">
+                                          <p:stCondLst>
+                                            <p:cond delay="0"/>
+                                          </p:stCondLst>
+                                        </p:cTn>
+                                        <p:tgtEl>
+                                          <p:spTgt spid="63"/>
+                                        </p:tgtEl>
+                                        <p:attrNameLst>
+                                          <p:attrName>style.visibility</p:attrName>
+                                        </p:attrNameLst>
+                                      </p:cBhvr>
+                                      <p:to>
+                                        <p:strVal val="visible"/>
+                                      </p:to>
+                                    </p:set>
+                                    <p:animEffect transition="in" filter="fade">
+                                      <p:cBhvr>
+                                        <p:cTn id="39" dur="500"/>
+                                        <p:tgtEl>
+                                          <p:spTgt spid="63"/>
+                                        </p:tgtEl>
+                                      </p:cBhvr>
+                                    </p:animEffect>
+                                  </p:childTnLst>
+                                </p:cTn>
+                              </p:par>
+                            </p:childTnLst>
+                          </p:cTn>
+                        </p:par>
+                      </p:childTnLst>
+                    </p:cTn>
+                  </p:par>
+                </p:childTnLst>
+              </p:cTn>
+              <p:prevCondLst>
+                <p:cond evt="onPrev" delay="0">
+                  <p:tgtEl>
+                    <p:sldTgt/>
+                  </p:tgtEl>
+                </p:cond>
+              </p:prevCondLst>
+              <p:nextCondLst>
+                <p:cond evt="onNext" delay="0">
+                  <p:tgtEl>
+                    <p:sldTgt/>
+                  </p:tgtEl>
+                </p:cond>
+              </p:nextCondLst>
+            </p:seq>
+          </p:childTnLst>
+        </p:cTn>
+      </p:par>
+    </p:tnLst>
+    <p:bldLst>
+      <p:bldP spid="35" grpId="0"/>
+      <p:bldP spid="36" grpId="0"/>
+      <p:bldP spid="38" grpId="0"/>
+      <p:bldP spid="63" grpId="0" animBg="1"/>
+    </p:bldLst>
+  </p:timing>
 </p:sld>
 </file>
 
@@ -34519,6 +35617,94 @@
                       </p:childTnLst>
                     </p:cTn>
                   </p:par>
+                  <p:par>
+                    <p:cTn id="15" fill="hold">
+                      <p:stCondLst>
+                        <p:cond delay="indefinite"/>
+                      </p:stCondLst>
+                      <p:childTnLst>
+                        <p:par>
+                          <p:cTn id="16" fill="hold">
+                            <p:stCondLst>
+                              <p:cond delay="0"/>
+                            </p:stCondLst>
+                            <p:childTnLst>
+                              <p:par>
+                                <p:cTn id="17" presetID="10" presetClass="entr" presetSubtype="0" fill="hold" grpId="0" nodeType="clickEffect">
+                                  <p:stCondLst>
+                                    <p:cond delay="0"/>
+                                  </p:stCondLst>
+                                  <p:childTnLst>
+                                    <p:set>
+                                      <p:cBhvr>
+                                        <p:cTn id="18" dur="1" fill="hold">
+                                          <p:stCondLst>
+                                            <p:cond delay="0"/>
+                                          </p:stCondLst>
+                                        </p:cTn>
+                                        <p:tgtEl>
+                                          <p:spTgt spid="26"/>
+                                        </p:tgtEl>
+                                        <p:attrNameLst>
+                                          <p:attrName>style.visibility</p:attrName>
+                                        </p:attrNameLst>
+                                      </p:cBhvr>
+                                      <p:to>
+                                        <p:strVal val="visible"/>
+                                      </p:to>
+                                    </p:set>
+                                    <p:animEffect transition="in" filter="fade">
+                                      <p:cBhvr>
+                                        <p:cTn id="19" dur="500"/>
+                                        <p:tgtEl>
+                                          <p:spTgt spid="26"/>
+                                        </p:tgtEl>
+                                      </p:cBhvr>
+                                    </p:animEffect>
+                                  </p:childTnLst>
+                                </p:cTn>
+                              </p:par>
+                              <p:par>
+                                <p:cTn id="20" presetID="10" presetClass="entr" presetSubtype="0" fill="hold" nodeType="withEffect">
+                                  <p:stCondLst>
+                                    <p:cond delay="0"/>
+                                  </p:stCondLst>
+                                  <p:childTnLst>
+                                    <p:set>
+                                      <p:cBhvr>
+                                        <p:cTn id="21" dur="1" fill="hold">
+                                          <p:stCondLst>
+                                            <p:cond delay="0"/>
+                                          </p:stCondLst>
+                                        </p:cTn>
+                                        <p:tgtEl>
+                                          <p:spTgt spid="25"/>
+                                        </p:tgtEl>
+                                        <p:attrNameLst>
+                                          <p:attrName>style.visibility</p:attrName>
+                                        </p:attrNameLst>
+                                      </p:cBhvr>
+                                      <p:to>
+                                        <p:strVal val="visible"/>
+                                      </p:to>
+                                    </p:set>
+                                    <p:animEffect transition="in" filter="fade">
+                                      <p:cBhvr>
+                                        <p:cTn id="22" dur="500"/>
+                                        <p:tgtEl>
+                                          <p:spTgt spid="25"/>
+                                        </p:tgtEl>
+                                      </p:cBhvr>
+                                    </p:animEffect>
+                                  </p:childTnLst>
+                                </p:cTn>
+                              </p:par>
+                            </p:childTnLst>
+                          </p:cTn>
+                        </p:par>
+                      </p:childTnLst>
+                    </p:cTn>
+                  </p:par>
                 </p:childTnLst>
               </p:cTn>
               <p:prevCondLst>
@@ -34543,6 +35729,7 @@
     <p:bldLst>
       <p:bldP spid="13" grpId="0"/>
       <p:bldP spid="22" grpId="0"/>
+      <p:bldP spid="26" grpId="0"/>
     </p:bldLst>
   </p:timing>
 </p:sld>
@@ -35115,15 +36302,121 @@
                                   </p:childTnLst>
                                 </p:cTn>
                               </p:par>
+                            </p:childTnLst>
+                          </p:cTn>
+                        </p:par>
+                      </p:childTnLst>
+                    </p:cTn>
+                  </p:par>
+                  <p:par>
+                    <p:cTn id="11" fill="hold">
+                      <p:stCondLst>
+                        <p:cond delay="indefinite"/>
+                      </p:stCondLst>
+                      <p:childTnLst>
+                        <p:par>
+                          <p:cTn id="12" fill="hold">
+                            <p:stCondLst>
+                              <p:cond delay="0"/>
+                            </p:stCondLst>
+                            <p:childTnLst>
                               <p:par>
-                                <p:cTn id="11" presetID="1" presetClass="entr" presetSubtype="0" fill="hold" grpId="0" nodeType="withEffect">
+                                <p:cTn id="13" presetID="10" presetClass="entr" presetSubtype="0" fill="hold" nodeType="clickEffect">
                                   <p:stCondLst>
                                     <p:cond delay="0"/>
                                   </p:stCondLst>
                                   <p:childTnLst>
                                     <p:set>
                                       <p:cBhvr>
-                                        <p:cTn id="12" dur="1" fill="hold">
+                                        <p:cTn id="14" dur="1" fill="hold">
+                                          <p:stCondLst>
+                                            <p:cond delay="0"/>
+                                          </p:stCondLst>
+                                        </p:cTn>
+                                        <p:tgtEl>
+                                          <p:spTgt spid="27"/>
+                                        </p:tgtEl>
+                                        <p:attrNameLst>
+                                          <p:attrName>style.visibility</p:attrName>
+                                        </p:attrNameLst>
+                                      </p:cBhvr>
+                                      <p:to>
+                                        <p:strVal val="visible"/>
+                                      </p:to>
+                                    </p:set>
+                                    <p:animEffect transition="in" filter="fade">
+                                      <p:cBhvr>
+                                        <p:cTn id="15" dur="500"/>
+                                        <p:tgtEl>
+                                          <p:spTgt spid="27"/>
+                                        </p:tgtEl>
+                                      </p:cBhvr>
+                                    </p:animEffect>
+                                  </p:childTnLst>
+                                </p:cTn>
+                              </p:par>
+                            </p:childTnLst>
+                          </p:cTn>
+                        </p:par>
+                      </p:childTnLst>
+                    </p:cTn>
+                  </p:par>
+                  <p:par>
+                    <p:cTn id="16" fill="hold">
+                      <p:stCondLst>
+                        <p:cond delay="indefinite"/>
+                      </p:stCondLst>
+                      <p:childTnLst>
+                        <p:par>
+                          <p:cTn id="17" fill="hold">
+                            <p:stCondLst>
+                              <p:cond delay="0"/>
+                            </p:stCondLst>
+                            <p:childTnLst>
+                              <p:par>
+                                <p:cTn id="18" presetID="10" presetClass="entr" presetSubtype="0" fill="hold" nodeType="clickEffect">
+                                  <p:stCondLst>
+                                    <p:cond delay="0"/>
+                                  </p:stCondLst>
+                                  <p:childTnLst>
+                                    <p:set>
+                                      <p:cBhvr>
+                                        <p:cTn id="19" dur="1" fill="hold">
+                                          <p:stCondLst>
+                                            <p:cond delay="0"/>
+                                          </p:stCondLst>
+                                        </p:cTn>
+                                        <p:tgtEl>
+                                          <p:spTgt spid="39"/>
+                                        </p:tgtEl>
+                                        <p:attrNameLst>
+                                          <p:attrName>style.visibility</p:attrName>
+                                        </p:attrNameLst>
+                                      </p:cBhvr>
+                                      <p:to>
+                                        <p:strVal val="visible"/>
+                                      </p:to>
+                                    </p:set>
+                                    <p:animEffect transition="in" filter="fade">
+                                      <p:cBhvr>
+                                        <p:cTn id="20" dur="500"/>
+                                        <p:tgtEl>
+                                          <p:spTgt spid="39"/>
+                                        </p:tgtEl>
+                                      </p:cBhvr>
+                                    </p:animEffect>
+                                  </p:childTnLst>
+                                </p:cTn>
+                              </p:par>
+                              <p:par>
+                                <p:cTn id="21" presetID="1" presetClass="entr" presetSubtype="0" fill="hold" grpId="0" nodeType="withEffect">
+                                  <p:stCondLst>
+                                    <p:cond delay="0"/>
+                                  </p:stCondLst>
+                                  <p:childTnLst>
+                                    <p:set>
+                                      <p:cBhvr>
+                                        <p:cTn id="22" dur="1" fill="hold">
                                           <p:stCondLst>
                                             <p:cond delay="0"/>
                                           </p:stCondLst>
@@ -36267,6 +37560,49 @@
                                   </p:childTnLst>
                                 </p:cTn>
                               </p:par>
+                              <p:par>
+                                <p:cTn id="7" presetID="10" presetClass="entr" presetSubtype="0" fill="hold" nodeType="withEffect">
+                                  <p:stCondLst>
+                                    <p:cond delay="0"/>
+                                  </p:stCondLst>
+                                  <p:childTnLst>
+                                    <p:set>
+                                      <p:cBhvr>
+                                        <p:cTn id="8" dur="1" fill="hold">
+                                          <p:stCondLst>
+                                            <p:cond delay="0"/>
+                                          </p:stCondLst>
+                                        </p:cTn>
+                                        <p:tgtEl>
+                                          <p:spTgt spid="22">
+                                            <p:txEl>
+                                              <p:pRg st="0" end="0"/>
+                                            </p:txEl>
+                                          </p:spTgt>
+                                        </p:tgtEl>
+                                        <p:attrNameLst>
+                                          <p:attrName>style.visibility</p:attrName>
+                                        </p:attrNameLst>
+                                      </p:cBhvr>
+                                      <p:to>
+                                        <p:strVal val="visible"/>
+                                      </p:to>
+                                    </p:set>
+                                    <p:animEffect transition="in" filter="fade">
+                                      <p:cBhvr>
+                                        <p:cTn id="9" dur="500"/>
+                                        <p:tgtEl>
+                                          <p:spTgt spid="22">
+                                            <p:txEl>
+                                              <p:pRg st="0" end="0"/>
+                                            </p:txEl>
+                                          </p:spTgt>
+                                        </p:tgtEl>
+                                      </p:cBhvr>
+                                    </p:animEffect>
+                                  </p:childTnLst>
+                                </p:cTn>
+                              </p:par>
                             </p:childTnLst>
                           </p:cTn>
                         </p:par>
@@ -36274,26 +37610,130 @@
                     </p:cTn>
                   </p:par>
                   <p:par>
-                    <p:cTn id="7" fill="hold">
+                    <p:cTn id="10" fill="hold">
                       <p:stCondLst>
                         <p:cond delay="indefinite"/>
                       </p:stCondLst>
                       <p:childTnLst>
                         <p:par>
-                          <p:cTn id="8" fill="hold">
+                          <p:cTn id="11" fill="hold">
                             <p:stCondLst>
                               <p:cond delay="0"/>
                             </p:stCondLst>
                             <p:childTnLst>
                               <p:par>
-                                <p:cTn id="9" presetID="1" presetClass="entr" presetSubtype="0" fill="hold" nodeType="clickEffect">
+                                <p:cTn id="12" presetID="10" presetClass="entr" presetSubtype="0" fill="hold" nodeType="clickEffect">
                                   <p:stCondLst>
                                     <p:cond delay="0"/>
                                   </p:stCondLst>
                                   <p:childTnLst>
                                     <p:set>
                                       <p:cBhvr>
-                                        <p:cTn id="10" dur="1" fill="hold">
+                                        <p:cTn id="13" dur="1" fill="hold">
+                                          <p:stCondLst>
+                                            <p:cond delay="0"/>
+                                          </p:stCondLst>
+                                        </p:cTn>
+                                        <p:tgtEl>
+                                          <p:spTgt spid="22">
+                                            <p:txEl>
+                                              <p:pRg st="1" end="1"/>
+                                            </p:txEl>
+                                          </p:spTgt>
+                                        </p:tgtEl>
+                                        <p:attrNameLst>
+                                          <p:attrName>style.visibility</p:attrName>
+                                        </p:attrNameLst>
+                                      </p:cBhvr>
+                                      <p:to>
+                                        <p:strVal val="visible"/>
+                                      </p:to>
+                                    </p:set>
+                                    <p:animEffect transition="in" filter="fade">
+                                      <p:cBhvr>
+                                        <p:cTn id="14" dur="500"/>
+                                        <p:tgtEl>
+                                          <p:spTgt spid="22">
+                                            <p:txEl>
+                                              <p:pRg st="1" end="1"/>
+                                            </p:txEl>
+                                          </p:spTgt>
+                                        </p:tgtEl>
+                                      </p:cBhvr>
+                                    </p:animEffect>
+                                  </p:childTnLst>
+                                </p:cTn>
+                              </p:par>
+                            </p:childTnLst>
+                          </p:cTn>
+                        </p:par>
+                      </p:childTnLst>
+                    </p:cTn>
+                  </p:par>
+                  <p:par>
+                    <p:cTn id="15" fill="hold">
+                      <p:stCondLst>
+                        <p:cond delay="indefinite"/>
+                      </p:stCondLst>
+                      <p:childTnLst>
+                        <p:par>
+                          <p:cTn id="16" fill="hold">
+                            <p:stCondLst>
+                              <p:cond delay="0"/>
+                            </p:stCondLst>
+                            <p:childTnLst>
+                              <p:par>
+                                <p:cTn id="17" presetID="10" presetClass="entr" presetSubtype="0" fill="hold" nodeType="clickEffect">
+                                  <p:stCondLst>
+                                    <p:cond delay="0"/>
+                                  </p:stCondLst>
+                                  <p:childTnLst>
+                                    <p:set>
+                                      <p:cBhvr>
+                                        <p:cTn id="18" dur="1" fill="hold">
+                                          <p:stCondLst>
+                                            <p:cond delay="0"/>
+                                          </p:stCondLst>
+                                        </p:cTn>
+                                        <p:tgtEl>
+                                          <p:spTgt spid="22">
+                                            <p:txEl>
+                                              <p:pRg st="2" end="2"/>
+                                            </p:txEl>
+                                          </p:spTgt>
+                                        </p:tgtEl>
+                                        <p:attrNameLst>
+                                          <p:attrName>style.visibility</p:attrName>
+                                        </p:attrNameLst>
+                                      </p:cBhvr>
+                                      <p:to>
+                                        <p:strVal val="visible"/>
+                                      </p:to>
+                                    </p:set>
+                                    <p:animEffect transition="in" filter="fade">
+                                      <p:cBhvr>
+                                        <p:cTn id="19" dur="500"/>
+                                        <p:tgtEl>
+                                          <p:spTgt spid="22">
+                                            <p:txEl>
+                                              <p:pRg st="2" end="2"/>
+                                            </p:txEl>
+                                          </p:spTgt>
+                                        </p:tgtEl>
+                                      </p:cBhvr>
+                                    </p:animEffect>
+                                  </p:childTnLst>
+                                </p:cTn>
+                              </p:par>
+                              <p:par>
+                                <p:cTn id="20" presetID="1" presetClass="entr" presetSubtype="0" fill="hold" nodeType="withEffect">
+                                  <p:stCondLst>
+                                    <p:cond delay="0"/>
+                                  </p:stCondLst>
+                                  <p:childTnLst>
+                                    <p:set>
+                                      <p:cBhvr>
+                                        <p:cTn id="21" dur="1" fill="hold">
                                           <p:stCondLst>
                                             <p:cond delay="0"/>
                                           </p:stCondLst>
@@ -36319,32 +37759,32 @@
                     </p:cTn>
                   </p:par>
                   <p:par>
-                    <p:cTn id="11" fill="hold">
+                    <p:cTn id="22" fill="hold">
                       <p:stCondLst>
                         <p:cond delay="indefinite"/>
                       </p:stCondLst>
                       <p:childTnLst>
                         <p:par>
-                          <p:cTn id="12" fill="hold">
+                          <p:cTn id="23" fill="hold">
                             <p:stCondLst>
                               <p:cond delay="0"/>
                             </p:stCondLst>
                             <p:childTnLst>
                               <p:par>
-                                <p:cTn id="13" presetID="1" presetClass="entr" presetSubtype="0" fill="hold" nodeType="clickEffect">
+                                <p:cTn id="24" presetID="10" presetClass="entr" presetSubtype="0" fill="hold" grpId="0" nodeType="clickEffect">
                                   <p:stCondLst>
                                     <p:cond delay="0"/>
                                   </p:stCondLst>
                                   <p:childTnLst>
                                     <p:set>
                                       <p:cBhvr>
-                                        <p:cTn id="14" dur="1" fill="hold">
+                                        <p:cTn id="25" dur="1" fill="hold">
                                           <p:stCondLst>
                                             <p:cond delay="0"/>
                                           </p:stCondLst>
                                         </p:cTn>
                                         <p:tgtEl>
-                                          <p:spTgt spid="23"/>
+                                          <p:spTgt spid="8"/>
                                         </p:tgtEl>
                                         <p:attrNameLst>
                                           <p:attrName>style.visibility</p:attrName>
@@ -36354,6 +37794,14 @@
                                         <p:strVal val="visible"/>
                                       </p:to>
                                     </p:set>
+                                    <p:animEffect transition="in" filter="fade">
+                                      <p:cBhvr>
+                                        <p:cTn id="26" dur="500"/>
+                                        <p:tgtEl>
+                                          <p:spTgt spid="8"/>
+                                        </p:tgtEl>
+                                      </p:cBhvr>
+                                    </p:animEffect>
                                   </p:childTnLst>
                                 </p:cTn>
                               </p:par>
@@ -36384,6 +37832,9 @@
         </p:cTn>
       </p:par>
     </p:tnLst>
+    <p:bldLst>
+      <p:bldP spid="8" grpId="0" animBg="1"/>
+    </p:bldLst>
   </p:timing>
 </p:sld>
 </file>
@@ -37402,7 +38853,7 @@
         <p:spPr>
           <a:xfrm>
             <a:off x="4901629" y="2159565"/>
-            <a:ext cx="3954500" cy="1557905"/>
+            <a:ext cx="3954500" cy="2711980"/>
           </a:xfrm>
           <a:prstGeom prst="rect">
             <a:avLst/>
@@ -37645,7 +39096,7 @@
                             </p:stCondLst>
                             <p:childTnLst>
                               <p:par>
-                                <p:cTn id="5" presetID="1" presetClass="entr" presetSubtype="0" fill="hold" nodeType="clickEffect">
+                                <p:cTn id="5" presetID="10" presetClass="entr" presetSubtype="0" fill="hold" grpId="0" nodeType="clickEffect">
                                   <p:stCondLst>
                                     <p:cond delay="0"/>
                                   </p:stCondLst>
@@ -37658,7 +39109,7 @@
                                           </p:stCondLst>
                                         </p:cTn>
                                         <p:tgtEl>
-                                          <p:spTgt spid="16"/>
+                                          <p:spTgt spid="23"/>
                                         </p:tgtEl>
                                         <p:attrNameLst>
                                           <p:attrName>style.visibility</p:attrName>
@@ -37668,6 +39119,520 @@
                                         <p:strVal val="visible"/>
                                       </p:to>
                                     </p:set>
+                                    <p:animEffect transition="in" filter="fade">
+                                      <p:cBhvr>
+                                        <p:cTn id="7" dur="500"/>
+                                        <p:tgtEl>
+                                          <p:spTgt spid="23"/>
+                                        </p:tgtEl>
+                                      </p:cBhvr>
+                                    </p:animEffect>
+                                  </p:childTnLst>
+                                </p:cTn>
+                              </p:par>
+                              <p:par>
+                                <p:cTn id="8" presetID="10" presetClass="entr" presetSubtype="0" fill="hold" grpId="0" nodeType="withEffect">
+                                  <p:stCondLst>
+                                    <p:cond delay="0"/>
+                                  </p:stCondLst>
+                                  <p:childTnLst>
+                                    <p:set>
+                                      <p:cBhvr>
+                                        <p:cTn id="9" dur="1" fill="hold">
+                                          <p:stCondLst>
+                                            <p:cond delay="0"/>
+                                          </p:stCondLst>
+                                        </p:cTn>
+                                        <p:tgtEl>
+                                          <p:spTgt spid="26"/>
+                                        </p:tgtEl>
+                                        <p:attrNameLst>
+                                          <p:attrName>style.visibility</p:attrName>
+                                        </p:attrNameLst>
+                                      </p:cBhvr>
+                                      <p:to>
+                                        <p:strVal val="visible"/>
+                                      </p:to>
+                                    </p:set>
+                                    <p:animEffect transition="in" filter="fade">
+                                      <p:cBhvr>
+                                        <p:cTn id="10" dur="500"/>
+                                        <p:tgtEl>
+                                          <p:spTgt spid="26"/>
+                                        </p:tgtEl>
+                                      </p:cBhvr>
+                                    </p:animEffect>
+                                  </p:childTnLst>
+                                </p:cTn>
+                              </p:par>
+                              <p:par>
+                                <p:cTn id="11" presetID="10" presetClass="entr" presetSubtype="0" fill="hold" nodeType="withEffect">
+                                  <p:stCondLst>
+                                    <p:cond delay="0"/>
+                                  </p:stCondLst>
+                                  <p:childTnLst>
+                                    <p:set>
+                                      <p:cBhvr>
+                                        <p:cTn id="12" dur="1" fill="hold">
+                                          <p:stCondLst>
+                                            <p:cond delay="0"/>
+                                          </p:stCondLst>
+                                        </p:cTn>
+                                        <p:tgtEl>
+                                          <p:spTgt spid="25"/>
+                                        </p:tgtEl>
+                                        <p:attrNameLst>
+                                          <p:attrName>style.visibility</p:attrName>
+                                        </p:attrNameLst>
+                                      </p:cBhvr>
+                                      <p:to>
+                                        <p:strVal val="visible"/>
+                                      </p:to>
+                                    </p:set>
+                                    <p:animEffect transition="in" filter="fade">
+                                      <p:cBhvr>
+                                        <p:cTn id="13" dur="500"/>
+                                        <p:tgtEl>
+                                          <p:spTgt spid="25"/>
+                                        </p:tgtEl>
+                                      </p:cBhvr>
+                                    </p:animEffect>
+                                  </p:childTnLst>
+                                </p:cTn>
+                              </p:par>
+                              <p:par>
+                                <p:cTn id="14" presetID="10" presetClass="entr" presetSubtype="0" fill="hold" grpId="0" nodeType="withEffect">
+                                  <p:stCondLst>
+                                    <p:cond delay="0"/>
+                                  </p:stCondLst>
+                                  <p:childTnLst>
+                                    <p:set>
+                                      <p:cBhvr>
+                                        <p:cTn id="15" dur="1" fill="hold">
+                                          <p:stCondLst>
+                                            <p:cond delay="0"/>
+                                          </p:stCondLst>
+                                        </p:cTn>
+                                        <p:tgtEl>
+                                          <p:spTgt spid="24"/>
+                                        </p:tgtEl>
+                                        <p:attrNameLst>
+                                          <p:attrName>style.visibility</p:attrName>
+                                        </p:attrNameLst>
+                                      </p:cBhvr>
+                                      <p:to>
+                                        <p:strVal val="visible"/>
+                                      </p:to>
+                                    </p:set>
+                                    <p:animEffect transition="in" filter="fade">
+                                      <p:cBhvr>
+                                        <p:cTn id="16" dur="500"/>
+                                        <p:tgtEl>
+                                          <p:spTgt spid="24"/>
+                                        </p:tgtEl>
+                                      </p:cBhvr>
+                                    </p:animEffect>
+                                  </p:childTnLst>
+                                </p:cTn>
+                              </p:par>
+                              <p:par>
+                                <p:cTn id="17" presetID="10" presetClass="entr" presetSubtype="0" fill="hold" grpId="0" nodeType="withEffect">
+                                  <p:stCondLst>
+                                    <p:cond delay="0"/>
+                                  </p:stCondLst>
+                                  <p:childTnLst>
+                                    <p:set>
+                                      <p:cBhvr>
+                                        <p:cTn id="18" dur="1" fill="hold">
+                                          <p:stCondLst>
+                                            <p:cond delay="0"/>
+                                          </p:stCondLst>
+                                        </p:cTn>
+                                        <p:tgtEl>
+                                          <p:spTgt spid="28"/>
+                                        </p:tgtEl>
+                                        <p:attrNameLst>
+                                          <p:attrName>style.visibility</p:attrName>
+                                        </p:attrNameLst>
+                                      </p:cBhvr>
+                                      <p:to>
+                                        <p:strVal val="visible"/>
+                                      </p:to>
+                                    </p:set>
+                                    <p:animEffect transition="in" filter="fade">
+                                      <p:cBhvr>
+                                        <p:cTn id="19" dur="500"/>
+                                        <p:tgtEl>
+                                          <p:spTgt spid="28"/>
+                                        </p:tgtEl>
+                                      </p:cBhvr>
+                                    </p:animEffect>
+                                  </p:childTnLst>
+                                </p:cTn>
+                              </p:par>
+                              <p:par>
+                                <p:cTn id="20" presetID="10" presetClass="entr" presetSubtype="0" fill="hold" nodeType="withEffect">
+                                  <p:stCondLst>
+                                    <p:cond delay="0"/>
+                                  </p:stCondLst>
+                                  <p:childTnLst>
+                                    <p:set>
+                                      <p:cBhvr>
+                                        <p:cTn id="21" dur="1" fill="hold">
+                                          <p:stCondLst>
+                                            <p:cond delay="0"/>
+                                          </p:stCondLst>
+                                        </p:cTn>
+                                        <p:tgtEl>
+                                          <p:spTgt spid="33">
+                                            <p:txEl>
+                                              <p:pRg st="0" end="0"/>
+                                            </p:txEl>
+                                          </p:spTgt>
+                                        </p:tgtEl>
+                                        <p:attrNameLst>
+                                          <p:attrName>style.visibility</p:attrName>
+                                        </p:attrNameLst>
+                                      </p:cBhvr>
+                                      <p:to>
+                                        <p:strVal val="visible"/>
+                                      </p:to>
+                                    </p:set>
+                                    <p:animEffect transition="in" filter="fade">
+                                      <p:cBhvr>
+                                        <p:cTn id="22" dur="500"/>
+                                        <p:tgtEl>
+                                          <p:spTgt spid="33">
+                                            <p:txEl>
+                                              <p:pRg st="0" end="0"/>
+                                            </p:txEl>
+                                          </p:spTgt>
+                                        </p:tgtEl>
+                                      </p:cBhvr>
+                                    </p:animEffect>
+                                  </p:childTnLst>
+                                </p:cTn>
+                              </p:par>
+                            </p:childTnLst>
+                          </p:cTn>
+                        </p:par>
+                      </p:childTnLst>
+                    </p:cTn>
+                  </p:par>
+                  <p:par>
+                    <p:cTn id="23" fill="hold">
+                      <p:stCondLst>
+                        <p:cond delay="indefinite"/>
+                      </p:stCondLst>
+                      <p:childTnLst>
+                        <p:par>
+                          <p:cTn id="24" fill="hold">
+                            <p:stCondLst>
+                              <p:cond delay="0"/>
+                            </p:stCondLst>
+                            <p:childTnLst>
+                              <p:par>
+                                <p:cTn id="25" presetID="10" presetClass="entr" presetSubtype="0" fill="hold" nodeType="clickEffect">
+                                  <p:stCondLst>
+                                    <p:cond delay="0"/>
+                                  </p:stCondLst>
+                                  <p:childTnLst>
+                                    <p:set>
+                                      <p:cBhvr>
+                                        <p:cTn id="26" dur="1" fill="hold">
+                                          <p:stCondLst>
+                                            <p:cond delay="0"/>
+                                          </p:stCondLst>
+                                        </p:cTn>
+                                        <p:tgtEl>
+                                          <p:spTgt spid="33">
+                                            <p:txEl>
+                                              <p:pRg st="1" end="1"/>
+                                            </p:txEl>
+                                          </p:spTgt>
+                                        </p:tgtEl>
+                                        <p:attrNameLst>
+                                          <p:attrName>style.visibility</p:attrName>
+                                        </p:attrNameLst>
+                                      </p:cBhvr>
+                                      <p:to>
+                                        <p:strVal val="visible"/>
+                                      </p:to>
+                                    </p:set>
+                                    <p:animEffect transition="in" filter="fade">
+                                      <p:cBhvr>
+                                        <p:cTn id="27" dur="500"/>
+                                        <p:tgtEl>
+                                          <p:spTgt spid="33">
+                                            <p:txEl>
+                                              <p:pRg st="1" end="1"/>
+                                            </p:txEl>
+                                          </p:spTgt>
+                                        </p:tgtEl>
+                                      </p:cBhvr>
+                                    </p:animEffect>
+                                  </p:childTnLst>
+                                </p:cTn>
+                              </p:par>
+                              <p:par>
+                                <p:cTn id="28" presetID="10" presetClass="entr" presetSubtype="0" fill="hold" nodeType="withEffect">
+                                  <p:stCondLst>
+                                    <p:cond delay="0"/>
+                                  </p:stCondLst>
+                                  <p:childTnLst>
+                                    <p:set>
+                                      <p:cBhvr>
+                                        <p:cTn id="29" dur="1" fill="hold">
+                                          <p:stCondLst>
+                                            <p:cond delay="0"/>
+                                          </p:stCondLst>
+                                        </p:cTn>
+                                        <p:tgtEl>
+                                          <p:spTgt spid="32"/>
+                                        </p:tgtEl>
+                                        <p:attrNameLst>
+                                          <p:attrName>style.visibility</p:attrName>
+                                        </p:attrNameLst>
+                                      </p:cBhvr>
+                                      <p:to>
+                                        <p:strVal val="visible"/>
+                                      </p:to>
+                                    </p:set>
+                                    <p:animEffect transition="in" filter="fade">
+                                      <p:cBhvr>
+                                        <p:cTn id="30" dur="500"/>
+                                        <p:tgtEl>
+                                          <p:spTgt spid="32"/>
+                                        </p:tgtEl>
+                                      </p:cBhvr>
+                                    </p:animEffect>
+                                  </p:childTnLst>
+                                </p:cTn>
+                              </p:par>
+                              <p:par>
+                                <p:cTn id="31" presetID="10" presetClass="entr" presetSubtype="0" fill="hold" grpId="0" nodeType="withEffect">
+                                  <p:stCondLst>
+                                    <p:cond delay="0"/>
+                                  </p:stCondLst>
+                                  <p:childTnLst>
+                                    <p:set>
+                                      <p:cBhvr>
+                                        <p:cTn id="32" dur="1" fill="hold">
+                                          <p:stCondLst>
+                                            <p:cond delay="0"/>
+                                          </p:stCondLst>
+                                        </p:cTn>
+                                        <p:tgtEl>
+                                          <p:spTgt spid="29"/>
+                                        </p:tgtEl>
+                                        <p:attrNameLst>
+                                          <p:attrName>style.visibility</p:attrName>
+                                        </p:attrNameLst>
+                                      </p:cBhvr>
+                                      <p:to>
+                                        <p:strVal val="visible"/>
+                                      </p:to>
+                                    </p:set>
+                                    <p:animEffect transition="in" filter="fade">
+                                      <p:cBhvr>
+                                        <p:cTn id="33" dur="500"/>
+                                        <p:tgtEl>
+                                          <p:spTgt spid="29"/>
+                                        </p:tgtEl>
+                                      </p:cBhvr>
+                                    </p:animEffect>
+                                  </p:childTnLst>
+                                </p:cTn>
+                              </p:par>
+                              <p:par>
+                                <p:cTn id="34" presetID="10" presetClass="entr" presetSubtype="0" fill="hold" grpId="0" nodeType="withEffect">
+                                  <p:stCondLst>
+                                    <p:cond delay="0"/>
+                                  </p:stCondLst>
+                                  <p:childTnLst>
+                                    <p:set>
+                                      <p:cBhvr>
+                                        <p:cTn id="35" dur="1" fill="hold">
+                                          <p:stCondLst>
+                                            <p:cond delay="0"/>
+                                          </p:stCondLst>
+                                        </p:cTn>
+                                        <p:tgtEl>
+                                          <p:spTgt spid="30"/>
+                                        </p:tgtEl>
+                                        <p:attrNameLst>
+                                          <p:attrName>style.visibility</p:attrName>
+                                        </p:attrNameLst>
+                                      </p:cBhvr>
+                                      <p:to>
+                                        <p:strVal val="visible"/>
+                                      </p:to>
+                                    </p:set>
+                                    <p:animEffect transition="in" filter="fade">
+                                      <p:cBhvr>
+                                        <p:cTn id="36" dur="500"/>
+                                        <p:tgtEl>
+                                          <p:spTgt spid="30"/>
+                                        </p:tgtEl>
+                                      </p:cBhvr>
+                                    </p:animEffect>
+                                  </p:childTnLst>
+                                </p:cTn>
+                              </p:par>
+                            </p:childTnLst>
+                          </p:cTn>
+                        </p:par>
+                      </p:childTnLst>
+                    </p:cTn>
+                  </p:par>
+                  <p:par>
+                    <p:cTn id="37" fill="hold">
+                      <p:stCondLst>
+                        <p:cond delay="indefinite"/>
+                      </p:stCondLst>
+                      <p:childTnLst>
+                        <p:par>
+                          <p:cTn id="38" fill="hold">
+                            <p:stCondLst>
+                              <p:cond delay="0"/>
+                            </p:stCondLst>
+                            <p:childTnLst>
+                              <p:par>
+                                <p:cTn id="39" presetID="10" presetClass="entr" presetSubtype="0" fill="hold" nodeType="clickEffect">
+                                  <p:stCondLst>
+                                    <p:cond delay="0"/>
+                                  </p:stCondLst>
+                                  <p:childTnLst>
+                                    <p:set>
+                                      <p:cBhvr>
+                                        <p:cTn id="40" dur="1" fill="hold">
+                                          <p:stCondLst>
+                                            <p:cond delay="0"/>
+                                          </p:stCondLst>
+                                        </p:cTn>
+                                        <p:tgtEl>
+                                          <p:spTgt spid="33">
+                                            <p:txEl>
+                                              <p:pRg st="2" end="2"/>
+                                            </p:txEl>
+                                          </p:spTgt>
+                                        </p:tgtEl>
+                                        <p:attrNameLst>
+                                          <p:attrName>style.visibility</p:attrName>
+                                        </p:attrNameLst>
+                                      </p:cBhvr>
+                                      <p:to>
+                                        <p:strVal val="visible"/>
+                                      </p:to>
+                                    </p:set>
+                                    <p:animEffect transition="in" filter="fade">
+                                      <p:cBhvr>
+                                        <p:cTn id="41" dur="500"/>
+                                        <p:tgtEl>
+                                          <p:spTgt spid="33">
+                                            <p:txEl>
+                                              <p:pRg st="2" end="2"/>
+                                            </p:txEl>
+                                          </p:spTgt>
+                                        </p:tgtEl>
+                                      </p:cBhvr>
+                                    </p:animEffect>
+                                  </p:childTnLst>
+                                </p:cTn>
+                              </p:par>
+                              <p:par>
+                                <p:cTn id="42" presetID="10" presetClass="entr" presetSubtype="0" fill="hold" nodeType="withEffect">
+                                  <p:stCondLst>
+                                    <p:cond delay="0"/>
+                                  </p:stCondLst>
+                                  <p:childTnLst>
+                                    <p:set>
+                                      <p:cBhvr>
+                                        <p:cTn id="43" dur="1" fill="hold">
+                                          <p:stCondLst>
+                                            <p:cond delay="0"/>
+                                          </p:stCondLst>
+                                        </p:cTn>
+                                        <p:tgtEl>
+                                          <p:spTgt spid="31"/>
+                                        </p:tgtEl>
+                                        <p:attrNameLst>
+                                          <p:attrName>style.visibility</p:attrName>
+                                        </p:attrNameLst>
+                                      </p:cBhvr>
+                                      <p:to>
+                                        <p:strVal val="visible"/>
+                                      </p:to>
+                                    </p:set>
+                                    <p:animEffect transition="in" filter="fade">
+                                      <p:cBhvr>
+                                        <p:cTn id="44" dur="500"/>
+                                        <p:tgtEl>
+                                          <p:spTgt spid="31"/>
+                                        </p:tgtEl>
+                                      </p:cBhvr>
+                                    </p:animEffect>
+                                  </p:childTnLst>
+                                </p:cTn>
+                              </p:par>
+                            </p:childTnLst>
+                          </p:cTn>
+                        </p:par>
+                      </p:childTnLst>
+                    </p:cTn>
+                  </p:par>
+                  <p:par>
+                    <p:cTn id="45" fill="hold">
+                      <p:stCondLst>
+                        <p:cond delay="indefinite"/>
+                      </p:stCondLst>
+                      <p:childTnLst>
+                        <p:par>
+                          <p:cTn id="46" fill="hold">
+                            <p:stCondLst>
+                              <p:cond delay="0"/>
+                            </p:stCondLst>
+                            <p:childTnLst>
+                              <p:par>
+                                <p:cTn id="47" presetID="10" presetClass="entr" presetSubtype="0" fill="hold" nodeType="clickEffect">
+                                  <p:stCondLst>
+                                    <p:cond delay="0"/>
+                                  </p:stCondLst>
+                                  <p:childTnLst>
+                                    <p:set>
+                                      <p:cBhvr>
+                                        <p:cTn id="48" dur="1" fill="hold">
+                                          <p:stCondLst>
+                                            <p:cond delay="0"/>
+                                          </p:stCondLst>
+                                        </p:cTn>
+                                        <p:tgtEl>
+                                          <p:spTgt spid="33">
+                                            <p:txEl>
+                                              <p:pRg st="3" end="3"/>
+                                            </p:txEl>
+                                          </p:spTgt>
+                                        </p:tgtEl>
+                                        <p:attrNameLst>
+                                          <p:attrName>style.visibility</p:attrName>
+                                        </p:attrNameLst>
+                                      </p:cBhvr>
+                                      <p:to>
+                                        <p:strVal val="visible"/>
+                                      </p:to>
+                                    </p:set>
+                                    <p:animEffect transition="in" filter="fade">
+                                      <p:cBhvr>
+                                        <p:cTn id="49" dur="500"/>
+                                        <p:tgtEl>
+                                          <p:spTgt spid="33">
+                                            <p:txEl>
+                                              <p:pRg st="3" end="3"/>
+                                            </p:txEl>
+                                          </p:spTgt>
+                                        </p:tgtEl>
+                                      </p:cBhvr>
+                                    </p:animEffect>
                                   </p:childTnLst>
                                 </p:cTn>
                               </p:par>
@@ -37698,6 +39663,14 @@
         </p:cTn>
       </p:par>
     </p:tnLst>
+    <p:bldLst>
+      <p:bldP spid="23" grpId="0" animBg="1"/>
+      <p:bldP spid="24" grpId="0" animBg="1"/>
+      <p:bldP spid="26" grpId="0"/>
+      <p:bldP spid="28" grpId="0"/>
+      <p:bldP spid="29" grpId="0" animBg="1"/>
+      <p:bldP spid="30" grpId="0"/>
+    </p:bldLst>
   </p:timing>
 </p:sld>
 </file>
@@ -38520,8 +40493,8 @@
           </p:sp>
         </mc:Fallback>
       </mc:AlternateContent>
-      <mc:AlternateContent xmlns:mc="http://schemas.openxmlformats.org/markup-compatibility/2006" xmlns:a14="http://schemas.microsoft.com/office/drawing/2010/main">
-        <mc:Choice Requires="a14">
+      <mc:AlternateContent xmlns:mc="http://schemas.openxmlformats.org/markup-compatibility/2006">
+        <mc:Choice xmlns:a14="http://schemas.microsoft.com/office/drawing/2010/main" Requires="a14">
           <p:sp>
             <p:nvSpPr>
               <p:cNvPr id="47" name="TextBox 34">
@@ -38536,7 +40509,7 @@
             </p:nvSpPr>
             <p:spPr>
               <a:xfrm>
-                <a:off x="3060413" y="1994020"/>
+                <a:off x="3021909" y="1999892"/>
                 <a:ext cx="4118371" cy="276999"/>
               </a:xfrm>
               <a:prstGeom prst="rect">
@@ -38643,7 +40616,7 @@
             </p:txBody>
           </p:sp>
         </mc:Choice>
-        <mc:Fallback xmlns="">
+        <mc:Fallback>
           <p:sp>
             <p:nvSpPr>
               <p:cNvPr id="47" name="TextBox 34">
@@ -38660,7 +40633,7 @@
             </p:nvSpPr>
             <p:spPr>
               <a:xfrm>
-                <a:off x="3060413" y="1994020"/>
+                <a:off x="3021909" y="1999892"/>
                 <a:ext cx="4118371" cy="276999"/>
               </a:xfrm>
               <a:prstGeom prst="rect">
@@ -38669,7 +40642,7 @@
               <a:blipFill>
                 <a:blip r:embed="rId4"/>
                 <a:stretch>
-                  <a:fillRect t="-2174" b="-32609"/>
+                  <a:fillRect t="-2174" r="-148" b="-32609"/>
                 </a:stretch>
               </a:blipFill>
             </p:spPr>
@@ -39003,8 +40976,8 @@
           </p:sp>
         </mc:Fallback>
       </mc:AlternateContent>
-      <mc:AlternateContent xmlns:mc="http://schemas.openxmlformats.org/markup-compatibility/2006" xmlns:a14="http://schemas.microsoft.com/office/drawing/2010/main">
-        <mc:Choice Requires="a14">
+      <mc:AlternateContent xmlns:mc="http://schemas.openxmlformats.org/markup-compatibility/2006">
+        <mc:Choice xmlns:a14="http://schemas.microsoft.com/office/drawing/2010/main" Requires="a14">
           <p:sp>
             <p:nvSpPr>
               <p:cNvPr id="55" name="TextBox 32">
@@ -39020,7 +40993,7 @@
             <p:spPr>
               <a:xfrm>
                 <a:off x="3327229" y="2395355"/>
-                <a:ext cx="5601470" cy="1477328"/>
+                <a:ext cx="5554982" cy="1477328"/>
               </a:xfrm>
               <a:prstGeom prst="rect">
                 <a:avLst/>
@@ -39138,7 +41111,19 @@
                       <a:rPr lang="en-US" b="0" i="1" noProof="0" smtClean="0">
                         <a:latin typeface="Cambria Math" panose="02040503050406030204" pitchFamily="18" charset="0"/>
                       </a:rPr>
-                      <m:t>−1∗2=−2</m:t>
+                      <m:t>−1</m:t>
+                    </m:r>
+                    <m:r>
+                      <a:rPr lang="en-GB" b="0" i="1" noProof="0" smtClean="0">
+                        <a:latin typeface="Cambria Math" panose="02040503050406030204" pitchFamily="18" charset="0"/>
+                      </a:rPr>
+                      <m:t>⋅</m:t>
+                    </m:r>
+                    <m:r>
+                      <a:rPr lang="en-US" b="0" i="1" noProof="0" smtClean="0">
+                        <a:latin typeface="Cambria Math" panose="02040503050406030204" pitchFamily="18" charset="0"/>
+                      </a:rPr>
+                      <m:t>2=−2</m:t>
                     </m:r>
                   </m:oMath>
                 </a14:m>
@@ -39240,93 +41225,38 @@
                   </a:rPr>
                   <a:t>t</a:t>
                 </a:r>
-                <a:r>
-                  <a:rPr lang="en-US" noProof="0" dirty="0">
-                    <a:solidFill>
-                      <a:srgbClr val="46B1E1"/>
-                    </a:solidFill>
-                  </a:rPr>
-                  <a:t> </a:t>
-                </a:r>
-                <a:r>
-                  <a:rPr lang="en-US" dirty="0"/>
-                  <a:t>= </a:t>
-                </a:r>
-                <a:r>
-                  <a:rPr lang="en-US" b="1" dirty="0">
-                    <a:solidFill>
-                      <a:srgbClr val="FFC000"/>
-                    </a:solidFill>
-                  </a:rPr>
-                  <a:t>Direct effect </a:t>
-                </a:r>
-                <a:r>
-                  <a:rPr lang="en-US" dirty="0">
-                    <a:solidFill>
-                      <a:schemeClr val="tx1">
-                        <a:lumMod val="65000"/>
-                        <a:lumOff val="35000"/>
-                      </a:schemeClr>
-                    </a:solidFill>
-                  </a:rPr>
-                  <a:t>+</a:t>
-                </a:r>
-                <a:r>
-                  <a:rPr lang="en-US" b="1" dirty="0">
-                    <a:solidFill>
-                      <a:srgbClr val="FFC000"/>
-                    </a:solidFill>
-                  </a:rPr>
-                  <a:t> </a:t>
-                </a:r>
-                <a:r>
-                  <a:rPr lang="en-US" b="1" dirty="0">
-                    <a:solidFill>
-                      <a:srgbClr val="46B1E1"/>
-                    </a:solidFill>
-                  </a:rPr>
-                  <a:t>Indirect effect</a:t>
-                </a:r>
-                <a:r>
-                  <a:rPr lang="en-US" dirty="0">
-                    <a:solidFill>
-                      <a:schemeClr val="tx1">
-                        <a:lumMod val="65000"/>
-                        <a:lumOff val="35000"/>
-                      </a:schemeClr>
-                    </a:solidFill>
-                  </a:rPr>
-                  <a:t>  </a:t>
-                </a:r>
+                <a:endParaRPr lang="en-US" dirty="0">
+                  <a:solidFill>
+                    <a:schemeClr val="tx1">
+                      <a:lumMod val="65000"/>
+                      <a:lumOff val="35000"/>
+                    </a:schemeClr>
+                  </a:solidFill>
+                </a:endParaRPr>
               </a:p>
               <a:p>
-                <a:r>
-                  <a:rPr lang="en-US" dirty="0">
-                    <a:solidFill>
-                      <a:schemeClr val="tx1">
-                        <a:lumMod val="65000"/>
-                        <a:lumOff val="35000"/>
-                      </a:schemeClr>
-                    </a:solidFill>
-                  </a:rPr>
-                  <a:t>= </a:t>
-                </a:r>
+                <a:pPr/>
                 <a14:m>
-                  <m:oMath xmlns:m="http://schemas.openxmlformats.org/officeDocument/2006/math">
-                    <m:r>
-                      <a:rPr lang="en-US" b="0" i="1" noProof="0" smtClean="0">
-                        <a:latin typeface="Cambria Math" panose="02040503050406030204" pitchFamily="18" charset="0"/>
-                      </a:rPr>
-                      <m:t>0.5−2=−1.5</m:t>
-                    </m:r>
-                  </m:oMath>
+                  <m:oMathPara xmlns:m="http://schemas.openxmlformats.org/officeDocument/2006/math">
+                    <m:oMathParaPr>
+                      <m:jc m:val="left"/>
+                    </m:oMathParaPr>
+                    <m:oMath xmlns:m="http://schemas.openxmlformats.org/officeDocument/2006/math">
+                      <m:r>
+                        <a:rPr lang="en-US" b="0" i="1" noProof="0" smtClean="0">
+                          <a:latin typeface="Cambria Math" panose="02040503050406030204" pitchFamily="18" charset="0"/>
+                        </a:rPr>
+                        <m:t>=−1.5</m:t>
+                      </m:r>
+                    </m:oMath>
+                  </m:oMathPara>
                 </a14:m>
                 <a:endParaRPr lang="en-US" noProof="0" dirty="0"/>
               </a:p>
             </p:txBody>
           </p:sp>
         </mc:Choice>
-        <mc:Fallback xmlns="">
+        <mc:Fallback>
           <p:sp>
             <p:nvSpPr>
               <p:cNvPr id="55" name="TextBox 32">
@@ -39344,7 +41274,7 @@
             <p:spPr>
               <a:xfrm>
                 <a:off x="3327229" y="2395355"/>
-                <a:ext cx="5601470" cy="1477328"/>
+                <a:ext cx="5554982" cy="1477328"/>
               </a:xfrm>
               <a:prstGeom prst="rect">
                 <a:avLst/>
@@ -39352,7 +41282,7 @@
               <a:blipFill>
                 <a:blip r:embed="rId8"/>
                 <a:stretch>
-                  <a:fillRect l="-979" t="-2066" b="-6198"/>
+                  <a:fillRect l="-988" t="-2066"/>
                 </a:stretch>
               </a:blipFill>
             </p:spPr>
@@ -39371,456 +41301,435 @@
           </p:sp>
         </mc:Fallback>
       </mc:AlternateContent>
-      <p:grpSp>
-        <p:nvGrpSpPr>
-          <p:cNvPr id="74" name="Grupp 73">
+      <p:sp>
+        <p:nvSpPr>
+          <p:cNvPr id="65" name="Oval 21">
             <a:extLst>
               <a:ext uri="{FF2B5EF4-FFF2-40B4-BE49-F238E27FC236}">
-                <a16:creationId xmlns:a16="http://schemas.microsoft.com/office/drawing/2014/main" id="{6EB4618A-532C-47D7-C6DD-9A1447BCE7D0}"/>
+                <a16:creationId xmlns:a16="http://schemas.microsoft.com/office/drawing/2014/main" id="{50DE2981-A962-743A-52E0-D86D3CA91308}"/>
               </a:ext>
             </a:extLst>
           </p:cNvPr>
-          <p:cNvGrpSpPr/>
+          <p:cNvSpPr/>
           <p:nvPr/>
-        </p:nvGrpSpPr>
-        <p:grpSpPr>
+        </p:nvSpPr>
+        <p:spPr>
+          <a:xfrm>
+            <a:off x="598641" y="2680093"/>
+            <a:ext cx="270570" cy="270570"/>
+          </a:xfrm>
+          <a:prstGeom prst="ellipse">
+            <a:avLst/>
+          </a:prstGeom>
+          <a:solidFill>
+            <a:srgbClr val="F8766D"/>
+          </a:solidFill>
+          <a:ln>
+            <a:solidFill>
+              <a:srgbClr val="D0180A"/>
+            </a:solidFill>
+          </a:ln>
+        </p:spPr>
+        <p:style>
+          <a:lnRef idx="2">
+            <a:schemeClr val="accent1">
+              <a:shade val="15000"/>
+            </a:schemeClr>
+          </a:lnRef>
+          <a:fillRef idx="1">
+            <a:schemeClr val="accent1"/>
+          </a:fillRef>
+          <a:effectRef idx="0">
+            <a:schemeClr val="accent1"/>
+          </a:effectRef>
+          <a:fontRef idx="minor">
+            <a:schemeClr val="lt1"/>
+          </a:fontRef>
+        </p:style>
+        <p:txBody>
+          <a:bodyPr rtlCol="0" anchor="ctr"/>
+          <a:lstStyle/>
+          <a:p>
+            <a:pPr algn="ctr"/>
+            <a:endParaRPr lang="en-US" noProof="0" dirty="0"/>
+          </a:p>
+        </p:txBody>
+      </p:sp>
+      <p:sp>
+        <p:nvSpPr>
+          <p:cNvPr id="66" name="Oval 22">
+            <a:extLst>
+              <a:ext uri="{FF2B5EF4-FFF2-40B4-BE49-F238E27FC236}">
+                <a16:creationId xmlns:a16="http://schemas.microsoft.com/office/drawing/2014/main" id="{9F800E6D-8FA9-B433-A1F3-34BA821F3866}"/>
+              </a:ext>
+            </a:extLst>
+          </p:cNvPr>
+          <p:cNvSpPr/>
+          <p:nvPr/>
+        </p:nvSpPr>
+        <p:spPr>
+          <a:xfrm>
+            <a:off x="2471123" y="2680093"/>
+            <a:ext cx="270570" cy="270570"/>
+          </a:xfrm>
+          <a:prstGeom prst="ellipse">
+            <a:avLst/>
+          </a:prstGeom>
+          <a:solidFill>
+            <a:srgbClr val="00BFC4"/>
+          </a:solidFill>
+          <a:ln>
+            <a:solidFill>
+              <a:srgbClr val="006D70"/>
+            </a:solidFill>
+          </a:ln>
+        </p:spPr>
+        <p:style>
+          <a:lnRef idx="2">
+            <a:schemeClr val="accent1">
+              <a:shade val="15000"/>
+            </a:schemeClr>
+          </a:lnRef>
+          <a:fillRef idx="1">
+            <a:schemeClr val="accent1"/>
+          </a:fillRef>
+          <a:effectRef idx="0">
+            <a:schemeClr val="accent1"/>
+          </a:effectRef>
+          <a:fontRef idx="minor">
+            <a:schemeClr val="lt1"/>
+          </a:fontRef>
+        </p:style>
+        <p:txBody>
+          <a:bodyPr rtlCol="0" anchor="ctr"/>
+          <a:lstStyle/>
+          <a:p>
+            <a:pPr algn="ctr"/>
+            <a:endParaRPr lang="en-US" noProof="0" dirty="0"/>
+          </a:p>
+        </p:txBody>
+      </p:sp>
+      <p:cxnSp>
+        <p:nvCxnSpPr>
+          <p:cNvPr id="67" name="Straight Arrow Connector 23">
+            <a:extLst>
+              <a:ext uri="{FF2B5EF4-FFF2-40B4-BE49-F238E27FC236}">
+                <a16:creationId xmlns:a16="http://schemas.microsoft.com/office/drawing/2014/main" id="{92328E2F-63CF-798E-B2A8-AF372DF85427}"/>
+              </a:ext>
+            </a:extLst>
+          </p:cNvPr>
+          <p:cNvCxnSpPr>
+            <a:stCxn id="65" idx="6"/>
+            <a:endCxn id="66" idx="2"/>
+          </p:cNvCxnSpPr>
+          <p:nvPr/>
+        </p:nvCxnSpPr>
+        <p:spPr>
+          <a:xfrm>
+            <a:off x="869211" y="2815379"/>
+            <a:ext cx="1601912" cy="0"/>
+          </a:xfrm>
+          <a:prstGeom prst="straightConnector1">
+            <a:avLst/>
+          </a:prstGeom>
+          <a:ln>
+            <a:solidFill>
+              <a:srgbClr val="FFC000"/>
+            </a:solidFill>
+            <a:tailEnd type="triangle"/>
+          </a:ln>
+        </p:spPr>
+        <p:style>
+          <a:lnRef idx="2">
+            <a:schemeClr val="dk1"/>
+          </a:lnRef>
+          <a:fillRef idx="0">
+            <a:schemeClr val="dk1"/>
+          </a:fillRef>
+          <a:effectRef idx="1">
+            <a:schemeClr val="dk1"/>
+          </a:effectRef>
+          <a:fontRef idx="minor">
+            <a:schemeClr val="tx1"/>
+          </a:fontRef>
+        </p:style>
+      </p:cxnSp>
+      <p:sp>
+        <p:nvSpPr>
+          <p:cNvPr id="68" name="TextBox 24">
+            <a:extLst>
+              <a:ext uri="{FF2B5EF4-FFF2-40B4-BE49-F238E27FC236}">
+                <a16:creationId xmlns:a16="http://schemas.microsoft.com/office/drawing/2014/main" id="{D2510700-D5DD-B752-DF14-4C51C843FB17}"/>
+              </a:ext>
+            </a:extLst>
+          </p:cNvPr>
+          <p:cNvSpPr txBox="1"/>
+          <p:nvPr/>
+        </p:nvSpPr>
+        <p:spPr>
           <a:xfrm>
             <a:off x="215301" y="2276891"/>
-            <a:ext cx="2948065" cy="1554352"/>
-            <a:chOff x="493867" y="2442357"/>
-            <a:chExt cx="3922467" cy="2068101"/>
+            <a:ext cx="894534" cy="277584"/>
           </a:xfrm>
-        </p:grpSpPr>
-        <p:sp>
-          <p:nvSpPr>
-            <p:cNvPr id="65" name="Oval 21">
-              <a:extLst>
-                <a:ext uri="{FF2B5EF4-FFF2-40B4-BE49-F238E27FC236}">
-                  <a16:creationId xmlns:a16="http://schemas.microsoft.com/office/drawing/2014/main" id="{50DE2981-A962-743A-52E0-D86D3CA91308}"/>
-                </a:ext>
-              </a:extLst>
-            </p:cNvPr>
-            <p:cNvSpPr/>
-            <p:nvPr/>
-          </p:nvSpPr>
-          <p:spPr>
-            <a:xfrm>
-              <a:off x="1003909" y="2978827"/>
-              <a:ext cx="360000" cy="360000"/>
-            </a:xfrm>
-            <a:prstGeom prst="ellipse">
-              <a:avLst/>
-            </a:prstGeom>
-            <a:solidFill>
-              <a:srgbClr val="F8766D"/>
-            </a:solidFill>
-            <a:ln>
-              <a:solidFill>
-                <a:srgbClr val="D0180A"/>
-              </a:solidFill>
-            </a:ln>
-          </p:spPr>
-          <p:style>
-            <a:lnRef idx="2">
-              <a:schemeClr val="accent1">
-                <a:shade val="15000"/>
-              </a:schemeClr>
-            </a:lnRef>
-            <a:fillRef idx="1">
-              <a:schemeClr val="accent1"/>
-            </a:fillRef>
-            <a:effectRef idx="0">
-              <a:schemeClr val="accent1"/>
-            </a:effectRef>
-            <a:fontRef idx="minor">
-              <a:schemeClr val="lt1"/>
-            </a:fontRef>
-          </p:style>
-          <p:txBody>
-            <a:bodyPr rtlCol="0" anchor="ctr"/>
-            <a:lstStyle/>
-            <a:p>
-              <a:pPr algn="ctr"/>
-              <a:endParaRPr lang="en-US" noProof="0" dirty="0"/>
-            </a:p>
-          </p:txBody>
-        </p:sp>
-        <p:sp>
-          <p:nvSpPr>
-            <p:cNvPr id="66" name="Oval 22">
-              <a:extLst>
-                <a:ext uri="{FF2B5EF4-FFF2-40B4-BE49-F238E27FC236}">
-                  <a16:creationId xmlns:a16="http://schemas.microsoft.com/office/drawing/2014/main" id="{9F800E6D-8FA9-B433-A1F3-34BA821F3866}"/>
-                </a:ext>
-              </a:extLst>
-            </p:cNvPr>
-            <p:cNvSpPr/>
-            <p:nvPr/>
-          </p:nvSpPr>
-          <p:spPr>
-            <a:xfrm>
-              <a:off x="3495289" y="2978827"/>
-              <a:ext cx="360000" cy="360000"/>
-            </a:xfrm>
-            <a:prstGeom prst="ellipse">
-              <a:avLst/>
-            </a:prstGeom>
-            <a:solidFill>
-              <a:srgbClr val="00BFC4"/>
-            </a:solidFill>
-            <a:ln>
-              <a:solidFill>
-                <a:srgbClr val="006D70"/>
-              </a:solidFill>
-            </a:ln>
-          </p:spPr>
-          <p:style>
-            <a:lnRef idx="2">
-              <a:schemeClr val="accent1">
-                <a:shade val="15000"/>
-              </a:schemeClr>
-            </a:lnRef>
-            <a:fillRef idx="1">
-              <a:schemeClr val="accent1"/>
-            </a:fillRef>
-            <a:effectRef idx="0">
-              <a:schemeClr val="accent1"/>
-            </a:effectRef>
-            <a:fontRef idx="minor">
-              <a:schemeClr val="lt1"/>
-            </a:fontRef>
-          </p:style>
-          <p:txBody>
-            <a:bodyPr rtlCol="0" anchor="ctr"/>
-            <a:lstStyle/>
-            <a:p>
-              <a:pPr algn="ctr"/>
-              <a:endParaRPr lang="en-US" noProof="0" dirty="0"/>
-            </a:p>
-          </p:txBody>
-        </p:sp>
-        <p:cxnSp>
-          <p:nvCxnSpPr>
-            <p:cNvPr id="67" name="Straight Arrow Connector 23">
-              <a:extLst>
-                <a:ext uri="{FF2B5EF4-FFF2-40B4-BE49-F238E27FC236}">
-                  <a16:creationId xmlns:a16="http://schemas.microsoft.com/office/drawing/2014/main" id="{92328E2F-63CF-798E-B2A8-AF372DF85427}"/>
-                </a:ext>
-              </a:extLst>
-            </p:cNvPr>
-            <p:cNvCxnSpPr>
-              <a:stCxn id="65" idx="6"/>
-              <a:endCxn id="66" idx="2"/>
-            </p:cNvCxnSpPr>
-            <p:nvPr/>
-          </p:nvCxnSpPr>
-          <p:spPr>
-            <a:xfrm>
-              <a:off x="1363909" y="3158827"/>
-              <a:ext cx="2131380" cy="0"/>
-            </a:xfrm>
-            <a:prstGeom prst="straightConnector1">
-              <a:avLst/>
-            </a:prstGeom>
-            <a:ln>
-              <a:solidFill>
-                <a:srgbClr val="FFC000"/>
-              </a:solidFill>
-              <a:tailEnd type="triangle"/>
-            </a:ln>
-          </p:spPr>
-          <p:style>
-            <a:lnRef idx="2">
-              <a:schemeClr val="dk1"/>
-            </a:lnRef>
-            <a:fillRef idx="0">
-              <a:schemeClr val="dk1"/>
-            </a:fillRef>
-            <a:effectRef idx="1">
-              <a:schemeClr val="dk1"/>
-            </a:effectRef>
-            <a:fontRef idx="minor">
-              <a:schemeClr val="tx1"/>
-            </a:fontRef>
-          </p:style>
-        </p:cxnSp>
-        <p:sp>
-          <p:nvSpPr>
-            <p:cNvPr id="68" name="TextBox 24">
-              <a:extLst>
-                <a:ext uri="{FF2B5EF4-FFF2-40B4-BE49-F238E27FC236}">
-                  <a16:creationId xmlns:a16="http://schemas.microsoft.com/office/drawing/2014/main" id="{D2510700-D5DD-B752-DF14-4C51C843FB17}"/>
-                </a:ext>
-              </a:extLst>
-            </p:cNvPr>
-            <p:cNvSpPr txBox="1"/>
-            <p:nvPr/>
-          </p:nvSpPr>
-          <p:spPr>
-            <a:xfrm>
-              <a:off x="493867" y="2442357"/>
-              <a:ext cx="1190198" cy="369332"/>
-            </a:xfrm>
-            <a:prstGeom prst="rect">
-              <a:avLst/>
-            </a:prstGeom>
-            <a:noFill/>
-          </p:spPr>
-          <p:txBody>
-            <a:bodyPr wrap="none" rtlCol="0">
-              <a:spAutoFit/>
-            </a:bodyPr>
-            <a:lstStyle/>
-            <a:p>
-              <a:r>
-                <a:rPr lang="en-US" noProof="0" dirty="0">
-                  <a:solidFill>
-                    <a:srgbClr val="D0180A"/>
-                  </a:solidFill>
-                </a:rPr>
-                <a:t>technique</a:t>
-              </a:r>
-            </a:p>
-          </p:txBody>
-        </p:sp>
-        <p:sp>
-          <p:nvSpPr>
-            <p:cNvPr id="69" name="TextBox 25">
-              <a:extLst>
-                <a:ext uri="{FF2B5EF4-FFF2-40B4-BE49-F238E27FC236}">
-                  <a16:creationId xmlns:a16="http://schemas.microsoft.com/office/drawing/2014/main" id="{587DD4D9-320A-8815-6BDC-198ABE10AA11}"/>
-                </a:ext>
-              </a:extLst>
-            </p:cNvPr>
-            <p:cNvSpPr txBox="1"/>
-            <p:nvPr/>
-          </p:nvSpPr>
-          <p:spPr>
-            <a:xfrm>
-              <a:off x="2574244" y="2475604"/>
-              <a:ext cx="1842090" cy="491405"/>
-            </a:xfrm>
-            <a:prstGeom prst="rect">
-              <a:avLst/>
-            </a:prstGeom>
-            <a:noFill/>
-          </p:spPr>
-          <p:txBody>
-            <a:bodyPr wrap="square" rtlCol="0">
-              <a:spAutoFit/>
-            </a:bodyPr>
-            <a:lstStyle/>
-            <a:p>
-              <a:r>
-                <a:rPr lang="en-US" noProof="0" dirty="0">
-                  <a:solidFill>
-                    <a:srgbClr val="006D70"/>
-                  </a:solidFill>
-                </a:rPr>
-                <a:t>productivity</a:t>
-              </a:r>
-            </a:p>
-          </p:txBody>
-        </p:sp>
-        <p:sp>
-          <p:nvSpPr>
-            <p:cNvPr id="70" name="Oval 26">
-              <a:extLst>
-                <a:ext uri="{FF2B5EF4-FFF2-40B4-BE49-F238E27FC236}">
-                  <a16:creationId xmlns:a16="http://schemas.microsoft.com/office/drawing/2014/main" id="{EB47168D-54AF-EC1C-F7B2-1920778CC034}"/>
-                </a:ext>
-              </a:extLst>
-            </p:cNvPr>
-            <p:cNvSpPr/>
-            <p:nvPr/>
-          </p:nvSpPr>
-          <p:spPr>
-            <a:xfrm>
-              <a:off x="2249599" y="4150458"/>
-              <a:ext cx="360000" cy="360000"/>
-            </a:xfrm>
-            <a:prstGeom prst="ellipse">
-              <a:avLst/>
-            </a:prstGeom>
+          <a:prstGeom prst="rect">
+            <a:avLst/>
+          </a:prstGeom>
+          <a:noFill/>
+        </p:spPr>
+        <p:txBody>
+          <a:bodyPr wrap="none" rtlCol="0">
+            <a:spAutoFit/>
+          </a:bodyPr>
+          <a:lstStyle/>
+          <a:p>
+            <a:r>
+              <a:rPr lang="en-US" noProof="0" dirty="0">
+                <a:solidFill>
+                  <a:srgbClr val="D0180A"/>
+                </a:solidFill>
+              </a:rPr>
+              <a:t>technique</a:t>
+            </a:r>
+          </a:p>
+        </p:txBody>
+      </p:sp>
+      <p:sp>
+        <p:nvSpPr>
+          <p:cNvPr id="69" name="TextBox 25">
+            <a:extLst>
+              <a:ext uri="{FF2B5EF4-FFF2-40B4-BE49-F238E27FC236}">
+                <a16:creationId xmlns:a16="http://schemas.microsoft.com/office/drawing/2014/main" id="{587DD4D9-320A-8815-6BDC-198ABE10AA11}"/>
+              </a:ext>
+            </a:extLst>
+          </p:cNvPr>
+          <p:cNvSpPr txBox="1"/>
+          <p:nvPr/>
+        </p:nvSpPr>
+        <p:spPr>
+          <a:xfrm>
+            <a:off x="1778880" y="2301879"/>
+            <a:ext cx="1384486" cy="369332"/>
+          </a:xfrm>
+          <a:prstGeom prst="rect">
+            <a:avLst/>
+          </a:prstGeom>
+          <a:noFill/>
+        </p:spPr>
+        <p:txBody>
+          <a:bodyPr wrap="square" rtlCol="0">
+            <a:spAutoFit/>
+          </a:bodyPr>
+          <a:lstStyle/>
+          <a:p>
+            <a:r>
+              <a:rPr lang="en-US" noProof="0" dirty="0">
+                <a:solidFill>
+                  <a:srgbClr val="006D70"/>
+                </a:solidFill>
+              </a:rPr>
+              <a:t>productivity</a:t>
+            </a:r>
+          </a:p>
+        </p:txBody>
+      </p:sp>
+      <p:sp>
+        <p:nvSpPr>
+          <p:cNvPr id="70" name="Oval 26">
+            <a:extLst>
+              <a:ext uri="{FF2B5EF4-FFF2-40B4-BE49-F238E27FC236}">
+                <a16:creationId xmlns:a16="http://schemas.microsoft.com/office/drawing/2014/main" id="{EB47168D-54AF-EC1C-F7B2-1920778CC034}"/>
+              </a:ext>
+            </a:extLst>
+          </p:cNvPr>
+          <p:cNvSpPr/>
+          <p:nvPr/>
+        </p:nvSpPr>
+        <p:spPr>
+          <a:xfrm>
+            <a:off x="1534882" y="3560673"/>
+            <a:ext cx="270570" cy="270570"/>
+          </a:xfrm>
+          <a:prstGeom prst="ellipse">
+            <a:avLst/>
+          </a:prstGeom>
+          <a:solidFill>
+            <a:schemeClr val="bg1">
+              <a:lumMod val="75000"/>
+            </a:schemeClr>
+          </a:solidFill>
+          <a:ln>
             <a:solidFill>
               <a:schemeClr val="bg1">
-                <a:lumMod val="75000"/>
+                <a:lumMod val="50000"/>
               </a:schemeClr>
             </a:solidFill>
-            <a:ln>
-              <a:solidFill>
-                <a:schemeClr val="bg1">
-                  <a:lumMod val="50000"/>
-                </a:schemeClr>
-              </a:solidFill>
-            </a:ln>
-          </p:spPr>
-          <p:style>
-            <a:lnRef idx="2">
+          </a:ln>
+        </p:spPr>
+        <p:style>
+          <a:lnRef idx="2">
+            <a:schemeClr val="accent1">
+              <a:shade val="15000"/>
+            </a:schemeClr>
+          </a:lnRef>
+          <a:fillRef idx="1">
+            <a:schemeClr val="accent1"/>
+          </a:fillRef>
+          <a:effectRef idx="0">
+            <a:schemeClr val="accent1"/>
+          </a:effectRef>
+          <a:fontRef idx="minor">
+            <a:schemeClr val="lt1"/>
+          </a:fontRef>
+        </p:style>
+        <p:txBody>
+          <a:bodyPr rtlCol="0" anchor="ctr"/>
+          <a:lstStyle/>
+          <a:p>
+            <a:pPr algn="ctr"/>
+            <a:endParaRPr lang="en-US" noProof="0" dirty="0"/>
+          </a:p>
+        </p:txBody>
+      </p:sp>
+      <p:sp>
+        <p:nvSpPr>
+          <p:cNvPr id="71" name="TextBox 27">
+            <a:extLst>
+              <a:ext uri="{FF2B5EF4-FFF2-40B4-BE49-F238E27FC236}">
+                <a16:creationId xmlns:a16="http://schemas.microsoft.com/office/drawing/2014/main" id="{73E5A531-D83D-903A-ED23-B544E59AB80C}"/>
+              </a:ext>
+            </a:extLst>
+          </p:cNvPr>
+          <p:cNvSpPr txBox="1"/>
+          <p:nvPr/>
+        </p:nvSpPr>
+        <p:spPr>
+          <a:xfrm>
+            <a:off x="1826783" y="3553659"/>
+            <a:ext cx="981279" cy="277584"/>
+          </a:xfrm>
+          <a:prstGeom prst="rect">
+            <a:avLst/>
+          </a:prstGeom>
+          <a:noFill/>
+        </p:spPr>
+        <p:txBody>
+          <a:bodyPr wrap="none" rtlCol="0">
+            <a:spAutoFit/>
+          </a:bodyPr>
+          <a:lstStyle/>
+          <a:p>
+            <a:r>
+              <a:rPr lang="en-US" noProof="0" dirty="0">
+                <a:solidFill>
+                  <a:schemeClr val="tx1">
+                    <a:lumMod val="65000"/>
+                    <a:lumOff val="35000"/>
+                  </a:schemeClr>
+                </a:solidFill>
+              </a:rPr>
+              <a:t>tool appeal</a:t>
+            </a:r>
+          </a:p>
+        </p:txBody>
+      </p:sp>
+      <p:cxnSp>
+        <p:nvCxnSpPr>
+          <p:cNvPr id="72" name="Straight Arrow Connector 28">
+            <a:extLst>
+              <a:ext uri="{FF2B5EF4-FFF2-40B4-BE49-F238E27FC236}">
+                <a16:creationId xmlns:a16="http://schemas.microsoft.com/office/drawing/2014/main" id="{D0B9CDDA-CDBD-8132-9B79-C0B29AB11917}"/>
+              </a:ext>
+            </a:extLst>
+          </p:cNvPr>
+          <p:cNvCxnSpPr>
+            <a:cxnSpLocks/>
+            <a:stCxn id="70" idx="7"/>
+            <a:endCxn id="66" idx="3"/>
+          </p:cNvCxnSpPr>
+          <p:nvPr/>
+        </p:nvCxnSpPr>
+        <p:spPr>
+          <a:xfrm flipV="1">
+            <a:off x="1765828" y="2911039"/>
+            <a:ext cx="744919" cy="689258"/>
+          </a:xfrm>
+          <a:prstGeom prst="straightConnector1">
+            <a:avLst/>
+          </a:prstGeom>
+          <a:ln>
+            <a:solidFill>
               <a:schemeClr val="accent1">
-                <a:shade val="15000"/>
+                <a:lumMod val="60000"/>
+                <a:lumOff val="40000"/>
               </a:schemeClr>
-            </a:lnRef>
-            <a:fillRef idx="1">
-              <a:schemeClr val="accent1"/>
-            </a:fillRef>
-            <a:effectRef idx="0">
-              <a:schemeClr val="accent1"/>
-            </a:effectRef>
-            <a:fontRef idx="minor">
-              <a:schemeClr val="lt1"/>
-            </a:fontRef>
-          </p:style>
-          <p:txBody>
-            <a:bodyPr rtlCol="0" anchor="ctr"/>
-            <a:lstStyle/>
-            <a:p>
-              <a:pPr algn="ctr"/>
-              <a:endParaRPr lang="en-US" noProof="0" dirty="0"/>
-            </a:p>
-          </p:txBody>
-        </p:sp>
-        <p:sp>
-          <p:nvSpPr>
-            <p:cNvPr id="71" name="TextBox 27">
-              <a:extLst>
-                <a:ext uri="{FF2B5EF4-FFF2-40B4-BE49-F238E27FC236}">
-                  <a16:creationId xmlns:a16="http://schemas.microsoft.com/office/drawing/2014/main" id="{73E5A531-D83D-903A-ED23-B544E59AB80C}"/>
-                </a:ext>
-              </a:extLst>
-            </p:cNvPr>
-            <p:cNvSpPr txBox="1"/>
-            <p:nvPr/>
-          </p:nvSpPr>
-          <p:spPr>
-            <a:xfrm>
-              <a:off x="2637980" y="4141126"/>
-              <a:ext cx="1305614" cy="369332"/>
-            </a:xfrm>
-            <a:prstGeom prst="rect">
-              <a:avLst/>
-            </a:prstGeom>
-            <a:noFill/>
-          </p:spPr>
-          <p:txBody>
-            <a:bodyPr wrap="none" rtlCol="0">
-              <a:spAutoFit/>
-            </a:bodyPr>
-            <a:lstStyle/>
-            <a:p>
-              <a:r>
-                <a:rPr lang="en-US" noProof="0" dirty="0">
-                  <a:solidFill>
-                    <a:schemeClr val="tx1">
-                      <a:lumMod val="65000"/>
-                      <a:lumOff val="35000"/>
-                    </a:schemeClr>
-                  </a:solidFill>
-                </a:rPr>
-                <a:t>tool appeal</a:t>
-              </a:r>
-            </a:p>
-          </p:txBody>
-        </p:sp>
-        <p:cxnSp>
-          <p:nvCxnSpPr>
-            <p:cNvPr id="72" name="Straight Arrow Connector 28">
-              <a:extLst>
-                <a:ext uri="{FF2B5EF4-FFF2-40B4-BE49-F238E27FC236}">
-                  <a16:creationId xmlns:a16="http://schemas.microsoft.com/office/drawing/2014/main" id="{D0B9CDDA-CDBD-8132-9B79-C0B29AB11917}"/>
-                </a:ext>
-              </a:extLst>
-            </p:cNvPr>
-            <p:cNvCxnSpPr>
-              <a:cxnSpLocks/>
-              <a:stCxn id="70" idx="7"/>
-              <a:endCxn id="66" idx="3"/>
-            </p:cNvCxnSpPr>
-            <p:nvPr/>
-          </p:nvCxnSpPr>
-          <p:spPr>
-            <a:xfrm flipV="1">
-              <a:off x="2556878" y="3286106"/>
-              <a:ext cx="991132" cy="917073"/>
-            </a:xfrm>
-            <a:prstGeom prst="straightConnector1">
-              <a:avLst/>
-            </a:prstGeom>
-            <a:ln>
-              <a:solidFill>
-                <a:schemeClr val="accent1">
-                  <a:lumMod val="60000"/>
-                  <a:lumOff val="40000"/>
-                </a:schemeClr>
-              </a:solidFill>
-              <a:tailEnd type="triangle"/>
-            </a:ln>
-          </p:spPr>
-          <p:style>
-            <a:lnRef idx="2">
-              <a:schemeClr val="dk1"/>
-            </a:lnRef>
-            <a:fillRef idx="0">
-              <a:schemeClr val="dk1"/>
-            </a:fillRef>
-            <a:effectRef idx="1">
-              <a:schemeClr val="dk1"/>
-            </a:effectRef>
-            <a:fontRef idx="minor">
-              <a:schemeClr val="tx1"/>
-            </a:fontRef>
-          </p:style>
-        </p:cxnSp>
-        <p:cxnSp>
-          <p:nvCxnSpPr>
-            <p:cNvPr id="73" name="Straight Arrow Connector 29">
-              <a:extLst>
-                <a:ext uri="{FF2B5EF4-FFF2-40B4-BE49-F238E27FC236}">
-                  <a16:creationId xmlns:a16="http://schemas.microsoft.com/office/drawing/2014/main" id="{3C3A87DA-ACCE-A539-A33E-D3F6A39C7123}"/>
-                </a:ext>
-              </a:extLst>
-            </p:cNvPr>
-            <p:cNvCxnSpPr>
-              <a:cxnSpLocks/>
-              <a:stCxn id="65" idx="5"/>
-              <a:endCxn id="70" idx="1"/>
-            </p:cNvCxnSpPr>
-            <p:nvPr/>
-          </p:nvCxnSpPr>
-          <p:spPr>
-            <a:xfrm>
-              <a:off x="1311188" y="3286106"/>
-              <a:ext cx="991132" cy="917073"/>
-            </a:xfrm>
-            <a:prstGeom prst="straightConnector1">
-              <a:avLst/>
-            </a:prstGeom>
-            <a:ln>
-              <a:solidFill>
-                <a:schemeClr val="accent1">
-                  <a:lumMod val="60000"/>
-                  <a:lumOff val="40000"/>
-                </a:schemeClr>
-              </a:solidFill>
-              <a:tailEnd type="triangle"/>
-            </a:ln>
-          </p:spPr>
-          <p:style>
-            <a:lnRef idx="2">
-              <a:schemeClr val="dk1"/>
-            </a:lnRef>
-            <a:fillRef idx="0">
-              <a:schemeClr val="dk1"/>
-            </a:fillRef>
-            <a:effectRef idx="1">
-              <a:schemeClr val="dk1"/>
-            </a:effectRef>
-            <a:fontRef idx="minor">
-              <a:schemeClr val="tx1"/>
-            </a:fontRef>
-          </p:style>
-        </p:cxnSp>
-      </p:grpSp>
+            </a:solidFill>
+            <a:tailEnd type="triangle"/>
+          </a:ln>
+        </p:spPr>
+        <p:style>
+          <a:lnRef idx="2">
+            <a:schemeClr val="dk1"/>
+          </a:lnRef>
+          <a:fillRef idx="0">
+            <a:schemeClr val="dk1"/>
+          </a:fillRef>
+          <a:effectRef idx="1">
+            <a:schemeClr val="dk1"/>
+          </a:effectRef>
+          <a:fontRef idx="minor">
+            <a:schemeClr val="tx1"/>
+          </a:fontRef>
+        </p:style>
+      </p:cxnSp>
+      <p:cxnSp>
+        <p:nvCxnSpPr>
+          <p:cNvPr id="73" name="Straight Arrow Connector 29">
+            <a:extLst>
+              <a:ext uri="{FF2B5EF4-FFF2-40B4-BE49-F238E27FC236}">
+                <a16:creationId xmlns:a16="http://schemas.microsoft.com/office/drawing/2014/main" id="{3C3A87DA-ACCE-A539-A33E-D3F6A39C7123}"/>
+              </a:ext>
+            </a:extLst>
+          </p:cNvPr>
+          <p:cNvCxnSpPr>
+            <a:cxnSpLocks/>
+            <a:stCxn id="65" idx="5"/>
+            <a:endCxn id="70" idx="1"/>
+          </p:cNvCxnSpPr>
+          <p:nvPr/>
+        </p:nvCxnSpPr>
+        <p:spPr>
+          <a:xfrm>
+            <a:off x="829587" y="2911039"/>
+            <a:ext cx="744919" cy="689258"/>
+          </a:xfrm>
+          <a:prstGeom prst="straightConnector1">
+            <a:avLst/>
+          </a:prstGeom>
+          <a:ln>
+            <a:solidFill>
+              <a:schemeClr val="accent1">
+                <a:lumMod val="60000"/>
+                <a:lumOff val="40000"/>
+              </a:schemeClr>
+            </a:solidFill>
+            <a:tailEnd type="triangle"/>
+          </a:ln>
+        </p:spPr>
+        <p:style>
+          <a:lnRef idx="2">
+            <a:schemeClr val="dk1"/>
+          </a:lnRef>
+          <a:fillRef idx="0">
+            <a:schemeClr val="dk1"/>
+          </a:fillRef>
+          <a:effectRef idx="1">
+            <a:schemeClr val="dk1"/>
+          </a:effectRef>
+          <a:fontRef idx="minor">
+            <a:schemeClr val="tx1"/>
+          </a:fontRef>
+        </p:style>
+      </p:cxnSp>
       <p:grpSp>
         <p:nvGrpSpPr>
           <p:cNvPr id="75" name="Grupp 74">
@@ -40475,6 +42384,207 @@
           </a:prstGeom>
         </p:spPr>
       </p:pic>
+      <p:sp>
+        <p:nvSpPr>
+          <p:cNvPr id="9" name="TextBox 32">
+            <a:extLst>
+              <a:ext uri="{FF2B5EF4-FFF2-40B4-BE49-F238E27FC236}">
+                <a16:creationId xmlns:a16="http://schemas.microsoft.com/office/drawing/2014/main" id="{48DF3816-BC0E-D426-3BCA-7A47401188FA}"/>
+              </a:ext>
+            </a:extLst>
+          </p:cNvPr>
+          <p:cNvSpPr txBox="1"/>
+          <p:nvPr/>
+        </p:nvSpPr>
+        <p:spPr>
+          <a:xfrm>
+            <a:off x="4536136" y="3230965"/>
+            <a:ext cx="3452484" cy="369332"/>
+          </a:xfrm>
+          <a:prstGeom prst="rect">
+            <a:avLst/>
+          </a:prstGeom>
+          <a:noFill/>
+        </p:spPr>
+        <p:txBody>
+          <a:bodyPr wrap="none" rtlCol="0">
+            <a:spAutoFit/>
+          </a:bodyPr>
+          <a:lstStyle/>
+          <a:p>
+            <a:r>
+              <a:rPr lang="en-US" dirty="0"/>
+              <a:t>= </a:t>
+            </a:r>
+            <a:r>
+              <a:rPr lang="en-US" b="1" dirty="0">
+                <a:solidFill>
+                  <a:srgbClr val="FFC000"/>
+                </a:solidFill>
+              </a:rPr>
+              <a:t>Direct effect </a:t>
+            </a:r>
+            <a:r>
+              <a:rPr lang="en-US" dirty="0">
+                <a:solidFill>
+                  <a:schemeClr val="tx1">
+                    <a:lumMod val="65000"/>
+                    <a:lumOff val="35000"/>
+                  </a:schemeClr>
+                </a:solidFill>
+              </a:rPr>
+              <a:t>+</a:t>
+            </a:r>
+            <a:r>
+              <a:rPr lang="en-US" b="1" dirty="0">
+                <a:solidFill>
+                  <a:srgbClr val="FFC000"/>
+                </a:solidFill>
+              </a:rPr>
+              <a:t> </a:t>
+            </a:r>
+            <a:r>
+              <a:rPr lang="en-US" b="1" dirty="0">
+                <a:solidFill>
+                  <a:srgbClr val="46B1E1"/>
+                </a:solidFill>
+              </a:rPr>
+              <a:t>Indirect effect</a:t>
+            </a:r>
+            <a:r>
+              <a:rPr lang="en-US" dirty="0">
+                <a:solidFill>
+                  <a:schemeClr val="tx1">
+                    <a:lumMod val="65000"/>
+                    <a:lumOff val="35000"/>
+                  </a:schemeClr>
+                </a:solidFill>
+              </a:rPr>
+              <a:t>  </a:t>
+            </a:r>
+          </a:p>
+        </p:txBody>
+      </p:sp>
+      <mc:AlternateContent xmlns:mc="http://schemas.openxmlformats.org/markup-compatibility/2006">
+        <mc:Choice xmlns:a14="http://schemas.microsoft.com/office/drawing/2010/main" Requires="a14">
+          <p:sp>
+            <p:nvSpPr>
+              <p:cNvPr id="16" name="TextBox 32">
+                <a:extLst>
+                  <a:ext uri="{FF2B5EF4-FFF2-40B4-BE49-F238E27FC236}">
+                    <a16:creationId xmlns:a16="http://schemas.microsoft.com/office/drawing/2014/main" id="{5E35DF64-151A-FD5C-C336-BEA22021C1F2}"/>
+                  </a:ext>
+                </a:extLst>
+              </p:cNvPr>
+              <p:cNvSpPr txBox="1"/>
+              <p:nvPr/>
+            </p:nvSpPr>
+            <p:spPr>
+              <a:xfrm>
+                <a:off x="4102571" y="3498794"/>
+                <a:ext cx="1350050" cy="369332"/>
+              </a:xfrm>
+              <a:prstGeom prst="rect">
+                <a:avLst/>
+              </a:prstGeom>
+              <a:noFill/>
+            </p:spPr>
+            <p:txBody>
+              <a:bodyPr wrap="none" rtlCol="0">
+                <a:spAutoFit/>
+              </a:bodyPr>
+              <a:lstStyle/>
+              <a:p>
+                <a:pPr/>
+                <a14:m>
+                  <m:oMathPara xmlns:m="http://schemas.openxmlformats.org/officeDocument/2006/math">
+                    <m:oMathParaPr>
+                      <m:jc m:val="left"/>
+                    </m:oMathParaPr>
+                    <m:oMath xmlns:m="http://schemas.openxmlformats.org/officeDocument/2006/math">
+                      <m:r>
+                        <a:rPr lang="en-US" b="0" i="1" noProof="0" smtClean="0">
+                          <a:latin typeface="Cambria Math" panose="02040503050406030204" pitchFamily="18" charset="0"/>
+                        </a:rPr>
+                        <m:t>=</m:t>
+                      </m:r>
+                      <m:r>
+                        <a:rPr lang="en-GB" b="0" i="1" noProof="0" smtClean="0">
+                          <a:solidFill>
+                            <a:srgbClr val="FFC000"/>
+                          </a:solidFill>
+                          <a:latin typeface="Cambria Math" panose="02040503050406030204" pitchFamily="18" charset="0"/>
+                        </a:rPr>
+                        <m:t>0.5</m:t>
+                      </m:r>
+                      <m:r>
+                        <a:rPr lang="en-GB" b="0" i="1" noProof="0" smtClean="0">
+                          <a:latin typeface="Cambria Math" panose="02040503050406030204" pitchFamily="18" charset="0"/>
+                        </a:rPr>
+                        <m:t>+</m:t>
+                      </m:r>
+                      <m:r>
+                        <a:rPr lang="en-GB" b="0" i="1" noProof="0" smtClean="0">
+                          <a:solidFill>
+                            <a:srgbClr val="46B1E1"/>
+                          </a:solidFill>
+                          <a:latin typeface="Cambria Math" panose="02040503050406030204" pitchFamily="18" charset="0"/>
+                        </a:rPr>
+                        <m:t>−2</m:t>
+                      </m:r>
+                    </m:oMath>
+                  </m:oMathPara>
+                </a14:m>
+                <a:endParaRPr lang="en-US" noProof="0" dirty="0"/>
+              </a:p>
+            </p:txBody>
+          </p:sp>
+        </mc:Choice>
+        <mc:Fallback>
+          <p:sp>
+            <p:nvSpPr>
+              <p:cNvPr id="16" name="TextBox 32">
+                <a:extLst>
+                  <a:ext uri="{FF2B5EF4-FFF2-40B4-BE49-F238E27FC236}">
+                    <a16:creationId xmlns:a16="http://schemas.microsoft.com/office/drawing/2014/main" id="{5E35DF64-151A-FD5C-C336-BEA22021C1F2}"/>
+                  </a:ext>
+                </a:extLst>
+              </p:cNvPr>
+              <p:cNvSpPr txBox="1">
+                <a:spLocks noRot="1" noChangeAspect="1" noMove="1" noResize="1" noEditPoints="1" noAdjustHandles="1" noChangeArrowheads="1" noChangeShapeType="1" noTextEdit="1"/>
+              </p:cNvSpPr>
+              <p:nvPr/>
+            </p:nvSpPr>
+            <p:spPr>
+              <a:xfrm>
+                <a:off x="4102571" y="3498794"/>
+                <a:ext cx="1350050" cy="369332"/>
+              </a:xfrm>
+              <a:prstGeom prst="rect">
+                <a:avLst/>
+              </a:prstGeom>
+              <a:blipFill>
+                <a:blip r:embed="rId13"/>
+                <a:stretch>
+                  <a:fillRect/>
+                </a:stretch>
+              </a:blipFill>
+            </p:spPr>
+            <p:txBody>
+              <a:bodyPr/>
+              <a:lstStyle/>
+              <a:p>
+                <a:r>
+                  <a:rPr lang="en-SE">
+                    <a:noFill/>
+                  </a:rPr>
+                  <a:t> </a:t>
+                </a:r>
+              </a:p>
+            </p:txBody>
+          </p:sp>
+        </mc:Fallback>
+      </mc:AlternateContent>
     </p:spTree>
     <p:extLst>
       <p:ext uri="{BB962C8B-B14F-4D97-AF65-F5344CB8AC3E}">
@@ -40506,7 +42616,7 @@
                             </p:stCondLst>
                             <p:childTnLst>
                               <p:par>
-                                <p:cTn id="5" presetID="1" presetClass="entr" presetSubtype="0" fill="hold" nodeType="clickEffect">
+                                <p:cTn id="5" presetID="10" presetClass="entr" presetSubtype="0" fill="hold" grpId="0" nodeType="clickEffect">
                                   <p:stCondLst>
                                     <p:cond delay="0"/>
                                   </p:stCondLst>
@@ -40519,7 +42629,7 @@
                                           </p:stCondLst>
                                         </p:cTn>
                                         <p:tgtEl>
-                                          <p:spTgt spid="3"/>
+                                          <p:spTgt spid="86"/>
                                         </p:tgtEl>
                                         <p:attrNameLst>
                                           <p:attrName>style.visibility</p:attrName>
@@ -40529,36 +42639,96 @@
                                         <p:strVal val="visible"/>
                                       </p:to>
                                     </p:set>
+                                    <p:animEffect transition="in" filter="fade">
+                                      <p:cBhvr>
+                                        <p:cTn id="7" dur="500"/>
+                                        <p:tgtEl>
+                                          <p:spTgt spid="86"/>
+                                        </p:tgtEl>
+                                      </p:cBhvr>
+                                    </p:animEffect>
                                   </p:childTnLst>
                                 </p:cTn>
                               </p:par>
-                            </p:childTnLst>
-                          </p:cTn>
-                        </p:par>
-                      </p:childTnLst>
-                    </p:cTn>
-                  </p:par>
-                  <p:par>
-                    <p:cTn id="7" fill="hold">
-                      <p:stCondLst>
-                        <p:cond delay="indefinite"/>
-                      </p:stCondLst>
-                      <p:childTnLst>
-                        <p:par>
-                          <p:cTn id="8" fill="hold">
-                            <p:stCondLst>
-                              <p:cond delay="0"/>
-                            </p:stCondLst>
-                            <p:childTnLst>
                               <p:par>
-                                <p:cTn id="9" presetID="1" presetClass="entr" presetSubtype="0" fill="hold" grpId="0" nodeType="clickEffect">
+                                <p:cTn id="8" presetID="10" presetClass="entr" presetSubtype="0" fill="hold" grpId="0" nodeType="withEffect">
                                   <p:stCondLst>
                                     <p:cond delay="0"/>
                                   </p:stCondLst>
                                   <p:childTnLst>
                                     <p:set>
                                       <p:cBhvr>
-                                        <p:cTn id="10" dur="1" fill="hold">
+                                        <p:cTn id="9" dur="1" fill="hold">
+                                          <p:stCondLst>
+                                            <p:cond delay="0"/>
+                                          </p:stCondLst>
+                                        </p:cTn>
+                                        <p:tgtEl>
+                                          <p:spTgt spid="90"/>
+                                        </p:tgtEl>
+                                        <p:attrNameLst>
+                                          <p:attrName>style.visibility</p:attrName>
+                                        </p:attrNameLst>
+                                      </p:cBhvr>
+                                      <p:to>
+                                        <p:strVal val="visible"/>
+                                      </p:to>
+                                    </p:set>
+                                    <p:animEffect transition="in" filter="fade">
+                                      <p:cBhvr>
+                                        <p:cTn id="10" dur="500"/>
+                                        <p:tgtEl>
+                                          <p:spTgt spid="90"/>
+                                        </p:tgtEl>
+                                      </p:cBhvr>
+                                    </p:animEffect>
+                                  </p:childTnLst>
+                                </p:cTn>
+                              </p:par>
+                              <p:par>
+                                <p:cTn id="11" presetID="10" presetClass="entr" presetSubtype="0" fill="hold" nodeType="withEffect">
+                                  <p:stCondLst>
+                                    <p:cond delay="0"/>
+                                  </p:stCondLst>
+                                  <p:childTnLst>
+                                    <p:set>
+                                      <p:cBhvr>
+                                        <p:cTn id="12" dur="1" fill="hold">
+                                          <p:stCondLst>
+                                            <p:cond delay="0"/>
+                                          </p:stCondLst>
+                                        </p:cTn>
+                                        <p:tgtEl>
+                                          <p:spTgt spid="75"/>
+                                        </p:tgtEl>
+                                        <p:attrNameLst>
+                                          <p:attrName>style.visibility</p:attrName>
+                                        </p:attrNameLst>
+                                      </p:cBhvr>
+                                      <p:to>
+                                        <p:strVal val="visible"/>
+                                      </p:to>
+                                    </p:set>
+                                    <p:animEffect transition="in" filter="fade">
+                                      <p:cBhvr>
+                                        <p:cTn id="13" dur="500"/>
+                                        <p:tgtEl>
+                                          <p:spTgt spid="75"/>
+                                        </p:tgtEl>
+                                      </p:cBhvr>
+                                    </p:animEffect>
+                                  </p:childTnLst>
+                                </p:cTn>
+                              </p:par>
+                              <p:par>
+                                <p:cTn id="14" presetID="10" presetClass="entr" presetSubtype="0" fill="hold" grpId="0" nodeType="withEffect">
+                                  <p:stCondLst>
+                                    <p:cond delay="0"/>
+                                  </p:stCondLst>
+                                  <p:childTnLst>
+                                    <p:set>
+                                      <p:cBhvr>
+                                        <p:cTn id="15" dur="1" fill="hold">
                                           <p:stCondLst>
                                             <p:cond delay="0"/>
                                           </p:stCondLst>
@@ -40574,18 +42744,795 @@
                                         <p:strVal val="visible"/>
                                       </p:to>
                                     </p:set>
+                                    <p:animEffect transition="in" filter="fade">
+                                      <p:cBhvr>
+                                        <p:cTn id="16" dur="500"/>
+                                        <p:tgtEl>
+                                          <p:spTgt spid="46"/>
+                                        </p:tgtEl>
+                                      </p:cBhvr>
+                                    </p:animEffect>
                                   </p:childTnLst>
                                 </p:cTn>
                               </p:par>
                               <p:par>
-                                <p:cTn id="11" presetID="1" presetClass="entr" presetSubtype="0" fill="hold" grpId="0" nodeType="withEffect">
+                                <p:cTn id="17" presetID="10" presetClass="entr" presetSubtype="0" fill="hold" nodeType="withEffect">
                                   <p:stCondLst>
                                     <p:cond delay="0"/>
                                   </p:stCondLst>
                                   <p:childTnLst>
                                     <p:set>
                                       <p:cBhvr>
-                                        <p:cTn id="12" dur="1" fill="hold">
+                                        <p:cTn id="18" dur="1" fill="hold">
+                                          <p:stCondLst>
+                                            <p:cond delay="0"/>
+                                          </p:stCondLst>
+                                        </p:cTn>
+                                        <p:tgtEl>
+                                          <p:spTgt spid="55">
+                                            <p:txEl>
+                                              <p:pRg st="2" end="2"/>
+                                            </p:txEl>
+                                          </p:spTgt>
+                                        </p:tgtEl>
+                                        <p:attrNameLst>
+                                          <p:attrName>style.visibility</p:attrName>
+                                        </p:attrNameLst>
+                                      </p:cBhvr>
+                                      <p:to>
+                                        <p:strVal val="visible"/>
+                                      </p:to>
+                                    </p:set>
+                                    <p:animEffect transition="in" filter="fade">
+                                      <p:cBhvr>
+                                        <p:cTn id="19" dur="500"/>
+                                        <p:tgtEl>
+                                          <p:spTgt spid="55">
+                                            <p:txEl>
+                                              <p:pRg st="2" end="2"/>
+                                            </p:txEl>
+                                          </p:spTgt>
+                                        </p:tgtEl>
+                                      </p:cBhvr>
+                                    </p:animEffect>
+                                  </p:childTnLst>
+                                </p:cTn>
+                              </p:par>
+                              <p:par>
+                                <p:cTn id="20" presetID="10" presetClass="entr" presetSubtype="0" fill="hold" nodeType="withEffect">
+                                  <p:stCondLst>
+                                    <p:cond delay="0"/>
+                                  </p:stCondLst>
+                                  <p:childTnLst>
+                                    <p:set>
+                                      <p:cBhvr>
+                                        <p:cTn id="21" dur="1" fill="hold">
+                                          <p:stCondLst>
+                                            <p:cond delay="0"/>
+                                          </p:stCondLst>
+                                        </p:cTn>
+                                        <p:tgtEl>
+                                          <p:spTgt spid="55">
+                                            <p:txEl>
+                                              <p:pRg st="3" end="3"/>
+                                            </p:txEl>
+                                          </p:spTgt>
+                                        </p:tgtEl>
+                                        <p:attrNameLst>
+                                          <p:attrName>style.visibility</p:attrName>
+                                        </p:attrNameLst>
+                                      </p:cBhvr>
+                                      <p:to>
+                                        <p:strVal val="visible"/>
+                                      </p:to>
+                                    </p:set>
+                                    <p:animEffect transition="in" filter="fade">
+                                      <p:cBhvr>
+                                        <p:cTn id="22" dur="500"/>
+                                        <p:tgtEl>
+                                          <p:spTgt spid="55">
+                                            <p:txEl>
+                                              <p:pRg st="3" end="3"/>
+                                            </p:txEl>
+                                          </p:spTgt>
+                                        </p:tgtEl>
+                                      </p:cBhvr>
+                                    </p:animEffect>
+                                  </p:childTnLst>
+                                </p:cTn>
+                              </p:par>
+                            </p:childTnLst>
+                          </p:cTn>
+                        </p:par>
+                      </p:childTnLst>
+                    </p:cTn>
+                  </p:par>
+                  <p:par>
+                    <p:cTn id="23" fill="hold">
+                      <p:stCondLst>
+                        <p:cond delay="indefinite"/>
+                      </p:stCondLst>
+                      <p:childTnLst>
+                        <p:par>
+                          <p:cTn id="24" fill="hold">
+                            <p:stCondLst>
+                              <p:cond delay="0"/>
+                            </p:stCondLst>
+                            <p:childTnLst>
+                              <p:par>
+                                <p:cTn id="25" presetID="10" presetClass="entr" presetSubtype="0" fill="hold" grpId="0" nodeType="clickEffect">
+                                  <p:stCondLst>
+                                    <p:cond delay="0"/>
+                                  </p:stCondLst>
+                                  <p:childTnLst>
+                                    <p:set>
+                                      <p:cBhvr>
+                                        <p:cTn id="26" dur="1" fill="hold">
+                                          <p:stCondLst>
+                                            <p:cond delay="0"/>
+                                          </p:stCondLst>
+                                        </p:cTn>
+                                        <p:tgtEl>
+                                          <p:spTgt spid="9"/>
+                                        </p:tgtEl>
+                                        <p:attrNameLst>
+                                          <p:attrName>style.visibility</p:attrName>
+                                        </p:attrNameLst>
+                                      </p:cBhvr>
+                                      <p:to>
+                                        <p:strVal val="visible"/>
+                                      </p:to>
+                                    </p:set>
+                                    <p:animEffect transition="in" filter="fade">
+                                      <p:cBhvr>
+                                        <p:cTn id="27" dur="500"/>
+                                        <p:tgtEl>
+                                          <p:spTgt spid="9"/>
+                                        </p:tgtEl>
+                                      </p:cBhvr>
+                                    </p:animEffect>
+                                  </p:childTnLst>
+                                </p:cTn>
+                              </p:par>
+                            </p:childTnLst>
+                          </p:cTn>
+                        </p:par>
+                      </p:childTnLst>
+                    </p:cTn>
+                  </p:par>
+                  <p:par>
+                    <p:cTn id="28" fill="hold">
+                      <p:stCondLst>
+                        <p:cond delay="indefinite"/>
+                      </p:stCondLst>
+                      <p:childTnLst>
+                        <p:par>
+                          <p:cTn id="29" fill="hold">
+                            <p:stCondLst>
+                              <p:cond delay="0"/>
+                            </p:stCondLst>
+                            <p:childTnLst>
+                              <p:par>
+                                <p:cTn id="30" presetID="10" presetClass="entr" presetSubtype="0" fill="hold" nodeType="clickEffect">
+                                  <p:stCondLst>
+                                    <p:cond delay="0"/>
+                                  </p:stCondLst>
+                                  <p:childTnLst>
+                                    <p:set>
+                                      <p:cBhvr>
+                                        <p:cTn id="31" dur="1" fill="hold">
+                                          <p:stCondLst>
+                                            <p:cond delay="0"/>
+                                          </p:stCondLst>
+                                        </p:cTn>
+                                        <p:tgtEl>
+                                          <p:spTgt spid="55">
+                                            <p:txEl>
+                                              <p:pRg st="0" end="0"/>
+                                            </p:txEl>
+                                          </p:spTgt>
+                                        </p:tgtEl>
+                                        <p:attrNameLst>
+                                          <p:attrName>style.visibility</p:attrName>
+                                        </p:attrNameLst>
+                                      </p:cBhvr>
+                                      <p:to>
+                                        <p:strVal val="visible"/>
+                                      </p:to>
+                                    </p:set>
+                                    <p:animEffect transition="in" filter="fade">
+                                      <p:cBhvr>
+                                        <p:cTn id="32" dur="500"/>
+                                        <p:tgtEl>
+                                          <p:spTgt spid="55">
+                                            <p:txEl>
+                                              <p:pRg st="0" end="0"/>
+                                            </p:txEl>
+                                          </p:spTgt>
+                                        </p:tgtEl>
+                                      </p:cBhvr>
+                                    </p:animEffect>
+                                  </p:childTnLst>
+                                </p:cTn>
+                              </p:par>
+                              <p:par>
+                                <p:cTn id="33" presetID="10" presetClass="entr" presetSubtype="0" fill="hold" grpId="0" nodeType="withEffect">
+                                  <p:stCondLst>
+                                    <p:cond delay="0"/>
+                                  </p:stCondLst>
+                                  <p:childTnLst>
+                                    <p:set>
+                                      <p:cBhvr>
+                                        <p:cTn id="34" dur="1" fill="hold">
+                                          <p:stCondLst>
+                                            <p:cond delay="0"/>
+                                          </p:stCondLst>
+                                        </p:cTn>
+                                        <p:tgtEl>
+                                          <p:spTgt spid="88"/>
+                                        </p:tgtEl>
+                                        <p:attrNameLst>
+                                          <p:attrName>style.visibility</p:attrName>
+                                        </p:attrNameLst>
+                                      </p:cBhvr>
+                                      <p:to>
+                                        <p:strVal val="visible"/>
+                                      </p:to>
+                                    </p:set>
+                                    <p:animEffect transition="in" filter="fade">
+                                      <p:cBhvr>
+                                        <p:cTn id="35" dur="500"/>
+                                        <p:tgtEl>
+                                          <p:spTgt spid="88"/>
+                                        </p:tgtEl>
+                                      </p:cBhvr>
+                                    </p:animEffect>
+                                  </p:childTnLst>
+                                </p:cTn>
+                              </p:par>
+                              <p:par>
+                                <p:cTn id="36" presetID="10" presetClass="entr" presetSubtype="0" fill="hold" grpId="0" nodeType="withEffect">
+                                  <p:stCondLst>
+                                    <p:cond delay="0"/>
+                                  </p:stCondLst>
+                                  <p:childTnLst>
+                                    <p:set>
+                                      <p:cBhvr>
+                                        <p:cTn id="37" dur="1" fill="hold">
+                                          <p:stCondLst>
+                                            <p:cond delay="0"/>
+                                          </p:stCondLst>
+                                        </p:cTn>
+                                        <p:tgtEl>
+                                          <p:spTgt spid="65"/>
+                                        </p:tgtEl>
+                                        <p:attrNameLst>
+                                          <p:attrName>style.visibility</p:attrName>
+                                        </p:attrNameLst>
+                                      </p:cBhvr>
+                                      <p:to>
+                                        <p:strVal val="visible"/>
+                                      </p:to>
+                                    </p:set>
+                                    <p:animEffect transition="in" filter="fade">
+                                      <p:cBhvr>
+                                        <p:cTn id="38" dur="500"/>
+                                        <p:tgtEl>
+                                          <p:spTgt spid="65"/>
+                                        </p:tgtEl>
+                                      </p:cBhvr>
+                                    </p:animEffect>
+                                  </p:childTnLst>
+                                </p:cTn>
+                              </p:par>
+                              <p:par>
+                                <p:cTn id="39" presetID="10" presetClass="entr" presetSubtype="0" fill="hold" nodeType="withEffect">
+                                  <p:stCondLst>
+                                    <p:cond delay="0"/>
+                                  </p:stCondLst>
+                                  <p:childTnLst>
+                                    <p:set>
+                                      <p:cBhvr>
+                                        <p:cTn id="40" dur="1" fill="hold">
+                                          <p:stCondLst>
+                                            <p:cond delay="0"/>
+                                          </p:stCondLst>
+                                        </p:cTn>
+                                        <p:tgtEl>
+                                          <p:spTgt spid="67"/>
+                                        </p:tgtEl>
+                                        <p:attrNameLst>
+                                          <p:attrName>style.visibility</p:attrName>
+                                        </p:attrNameLst>
+                                      </p:cBhvr>
+                                      <p:to>
+                                        <p:strVal val="visible"/>
+                                      </p:to>
+                                    </p:set>
+                                    <p:animEffect transition="in" filter="fade">
+                                      <p:cBhvr>
+                                        <p:cTn id="41" dur="500"/>
+                                        <p:tgtEl>
+                                          <p:spTgt spid="67"/>
+                                        </p:tgtEl>
+                                      </p:cBhvr>
+                                    </p:animEffect>
+                                  </p:childTnLst>
+                                </p:cTn>
+                              </p:par>
+                              <p:par>
+                                <p:cTn id="42" presetID="10" presetClass="entr" presetSubtype="0" fill="hold" grpId="0" nodeType="withEffect">
+                                  <p:stCondLst>
+                                    <p:cond delay="0"/>
+                                  </p:stCondLst>
+                                  <p:childTnLst>
+                                    <p:set>
+                                      <p:cBhvr>
+                                        <p:cTn id="43" dur="1" fill="hold">
+                                          <p:stCondLst>
+                                            <p:cond delay="0"/>
+                                          </p:stCondLst>
+                                        </p:cTn>
+                                        <p:tgtEl>
+                                          <p:spTgt spid="50"/>
+                                        </p:tgtEl>
+                                        <p:attrNameLst>
+                                          <p:attrName>style.visibility</p:attrName>
+                                        </p:attrNameLst>
+                                      </p:cBhvr>
+                                      <p:to>
+                                        <p:strVal val="visible"/>
+                                      </p:to>
+                                    </p:set>
+                                    <p:animEffect transition="in" filter="fade">
+                                      <p:cBhvr>
+                                        <p:cTn id="44" dur="500"/>
+                                        <p:tgtEl>
+                                          <p:spTgt spid="50"/>
+                                        </p:tgtEl>
+                                      </p:cBhvr>
+                                    </p:animEffect>
+                                  </p:childTnLst>
+                                </p:cTn>
+                              </p:par>
+                              <p:par>
+                                <p:cTn id="45" presetID="10" presetClass="entr" presetSubtype="0" fill="hold" grpId="0" nodeType="withEffect">
+                                  <p:stCondLst>
+                                    <p:cond delay="0"/>
+                                  </p:stCondLst>
+                                  <p:childTnLst>
+                                    <p:set>
+                                      <p:cBhvr>
+                                        <p:cTn id="46" dur="1" fill="hold">
+                                          <p:stCondLst>
+                                            <p:cond delay="0"/>
+                                          </p:stCondLst>
+                                        </p:cTn>
+                                        <p:tgtEl>
+                                          <p:spTgt spid="66"/>
+                                        </p:tgtEl>
+                                        <p:attrNameLst>
+                                          <p:attrName>style.visibility</p:attrName>
+                                        </p:attrNameLst>
+                                      </p:cBhvr>
+                                      <p:to>
+                                        <p:strVal val="visible"/>
+                                      </p:to>
+                                    </p:set>
+                                    <p:animEffect transition="in" filter="fade">
+                                      <p:cBhvr>
+                                        <p:cTn id="47" dur="500"/>
+                                        <p:tgtEl>
+                                          <p:spTgt spid="66"/>
+                                        </p:tgtEl>
+                                      </p:cBhvr>
+                                    </p:animEffect>
+                                  </p:childTnLst>
+                                </p:cTn>
+                              </p:par>
+                              <p:par>
+                                <p:cTn id="48" presetID="10" presetClass="entr" presetSubtype="0" fill="hold" grpId="0" nodeType="withEffect">
+                                  <p:stCondLst>
+                                    <p:cond delay="0"/>
+                                  </p:stCondLst>
+                                  <p:childTnLst>
+                                    <p:set>
+                                      <p:cBhvr>
+                                        <p:cTn id="49" dur="1" fill="hold">
+                                          <p:stCondLst>
+                                            <p:cond delay="0"/>
+                                          </p:stCondLst>
+                                        </p:cTn>
+                                        <p:tgtEl>
+                                          <p:spTgt spid="69"/>
+                                        </p:tgtEl>
+                                        <p:attrNameLst>
+                                          <p:attrName>style.visibility</p:attrName>
+                                        </p:attrNameLst>
+                                      </p:cBhvr>
+                                      <p:to>
+                                        <p:strVal val="visible"/>
+                                      </p:to>
+                                    </p:set>
+                                    <p:animEffect transition="in" filter="fade">
+                                      <p:cBhvr>
+                                        <p:cTn id="50" dur="500"/>
+                                        <p:tgtEl>
+                                          <p:spTgt spid="69"/>
+                                        </p:tgtEl>
+                                      </p:cBhvr>
+                                    </p:animEffect>
+                                  </p:childTnLst>
+                                </p:cTn>
+                              </p:par>
+                              <p:par>
+                                <p:cTn id="51" presetID="10" presetClass="entr" presetSubtype="0" fill="hold" grpId="0" nodeType="withEffect">
+                                  <p:stCondLst>
+                                    <p:cond delay="0"/>
+                                  </p:stCondLst>
+                                  <p:childTnLst>
+                                    <p:set>
+                                      <p:cBhvr>
+                                        <p:cTn id="52" dur="1" fill="hold">
+                                          <p:stCondLst>
+                                            <p:cond delay="0"/>
+                                          </p:stCondLst>
+                                        </p:cTn>
+                                        <p:tgtEl>
+                                          <p:spTgt spid="68"/>
+                                        </p:tgtEl>
+                                        <p:attrNameLst>
+                                          <p:attrName>style.visibility</p:attrName>
+                                        </p:attrNameLst>
+                                      </p:cBhvr>
+                                      <p:to>
+                                        <p:strVal val="visible"/>
+                                      </p:to>
+                                    </p:set>
+                                    <p:animEffect transition="in" filter="fade">
+                                      <p:cBhvr>
+                                        <p:cTn id="53" dur="500"/>
+                                        <p:tgtEl>
+                                          <p:spTgt spid="68"/>
+                                        </p:tgtEl>
+                                      </p:cBhvr>
+                                    </p:animEffect>
+                                  </p:childTnLst>
+                                </p:cTn>
+                              </p:par>
+                            </p:childTnLst>
+                          </p:cTn>
+                        </p:par>
+                      </p:childTnLst>
+                    </p:cTn>
+                  </p:par>
+                  <p:par>
+                    <p:cTn id="54" fill="hold">
+                      <p:stCondLst>
+                        <p:cond delay="indefinite"/>
+                      </p:stCondLst>
+                      <p:childTnLst>
+                        <p:par>
+                          <p:cTn id="55" fill="hold">
+                            <p:stCondLst>
+                              <p:cond delay="0"/>
+                            </p:stCondLst>
+                            <p:childTnLst>
+                              <p:par>
+                                <p:cTn id="56" presetID="10" presetClass="entr" presetSubtype="0" fill="hold" nodeType="clickEffect">
+                                  <p:stCondLst>
+                                    <p:cond delay="0"/>
+                                  </p:stCondLst>
+                                  <p:childTnLst>
+                                    <p:set>
+                                      <p:cBhvr>
+                                        <p:cTn id="57" dur="1" fill="hold">
+                                          <p:stCondLst>
+                                            <p:cond delay="0"/>
+                                          </p:stCondLst>
+                                        </p:cTn>
+                                        <p:tgtEl>
+                                          <p:spTgt spid="73"/>
+                                        </p:tgtEl>
+                                        <p:attrNameLst>
+                                          <p:attrName>style.visibility</p:attrName>
+                                        </p:attrNameLst>
+                                      </p:cBhvr>
+                                      <p:to>
+                                        <p:strVal val="visible"/>
+                                      </p:to>
+                                    </p:set>
+                                    <p:animEffect transition="in" filter="fade">
+                                      <p:cBhvr>
+                                        <p:cTn id="58" dur="500"/>
+                                        <p:tgtEl>
+                                          <p:spTgt spid="73"/>
+                                        </p:tgtEl>
+                                      </p:cBhvr>
+                                    </p:animEffect>
+                                  </p:childTnLst>
+                                </p:cTn>
+                              </p:par>
+                              <p:par>
+                                <p:cTn id="59" presetID="10" presetClass="entr" presetSubtype="0" fill="hold" grpId="0" nodeType="withEffect">
+                                  <p:stCondLst>
+                                    <p:cond delay="0"/>
+                                  </p:stCondLst>
+                                  <p:childTnLst>
+                                    <p:set>
+                                      <p:cBhvr>
+                                        <p:cTn id="60" dur="1" fill="hold">
+                                          <p:stCondLst>
+                                            <p:cond delay="0"/>
+                                          </p:stCondLst>
+                                        </p:cTn>
+                                        <p:tgtEl>
+                                          <p:spTgt spid="52"/>
+                                        </p:tgtEl>
+                                        <p:attrNameLst>
+                                          <p:attrName>style.visibility</p:attrName>
+                                        </p:attrNameLst>
+                                      </p:cBhvr>
+                                      <p:to>
+                                        <p:strVal val="visible"/>
+                                      </p:to>
+                                    </p:set>
+                                    <p:animEffect transition="in" filter="fade">
+                                      <p:cBhvr>
+                                        <p:cTn id="61" dur="500"/>
+                                        <p:tgtEl>
+                                          <p:spTgt spid="52"/>
+                                        </p:tgtEl>
+                                      </p:cBhvr>
+                                    </p:animEffect>
+                                  </p:childTnLst>
+                                </p:cTn>
+                              </p:par>
+                              <p:par>
+                                <p:cTn id="62" presetID="10" presetClass="entr" presetSubtype="0" fill="hold" grpId="0" nodeType="withEffect">
+                                  <p:stCondLst>
+                                    <p:cond delay="0"/>
+                                  </p:stCondLst>
+                                  <p:childTnLst>
+                                    <p:set>
+                                      <p:cBhvr>
+                                        <p:cTn id="63" dur="1" fill="hold">
+                                          <p:stCondLst>
+                                            <p:cond delay="0"/>
+                                          </p:stCondLst>
+                                        </p:cTn>
+                                        <p:tgtEl>
+                                          <p:spTgt spid="70"/>
+                                        </p:tgtEl>
+                                        <p:attrNameLst>
+                                          <p:attrName>style.visibility</p:attrName>
+                                        </p:attrNameLst>
+                                      </p:cBhvr>
+                                      <p:to>
+                                        <p:strVal val="visible"/>
+                                      </p:to>
+                                    </p:set>
+                                    <p:animEffect transition="in" filter="fade">
+                                      <p:cBhvr>
+                                        <p:cTn id="64" dur="500"/>
+                                        <p:tgtEl>
+                                          <p:spTgt spid="70"/>
+                                        </p:tgtEl>
+                                      </p:cBhvr>
+                                    </p:animEffect>
+                                  </p:childTnLst>
+                                </p:cTn>
+                              </p:par>
+                              <p:par>
+                                <p:cTn id="65" presetID="10" presetClass="entr" presetSubtype="0" fill="hold" nodeType="withEffect">
+                                  <p:stCondLst>
+                                    <p:cond delay="0"/>
+                                  </p:stCondLst>
+                                  <p:childTnLst>
+                                    <p:set>
+                                      <p:cBhvr>
+                                        <p:cTn id="66" dur="1" fill="hold">
+                                          <p:stCondLst>
+                                            <p:cond delay="0"/>
+                                          </p:stCondLst>
+                                        </p:cTn>
+                                        <p:tgtEl>
+                                          <p:spTgt spid="72"/>
+                                        </p:tgtEl>
+                                        <p:attrNameLst>
+                                          <p:attrName>style.visibility</p:attrName>
+                                        </p:attrNameLst>
+                                      </p:cBhvr>
+                                      <p:to>
+                                        <p:strVal val="visible"/>
+                                      </p:to>
+                                    </p:set>
+                                    <p:animEffect transition="in" filter="fade">
+                                      <p:cBhvr>
+                                        <p:cTn id="67" dur="500"/>
+                                        <p:tgtEl>
+                                          <p:spTgt spid="72"/>
+                                        </p:tgtEl>
+                                      </p:cBhvr>
+                                    </p:animEffect>
+                                  </p:childTnLst>
+                                </p:cTn>
+                              </p:par>
+                              <p:par>
+                                <p:cTn id="68" presetID="10" presetClass="entr" presetSubtype="0" fill="hold" grpId="0" nodeType="withEffect">
+                                  <p:stCondLst>
+                                    <p:cond delay="0"/>
+                                  </p:stCondLst>
+                                  <p:childTnLst>
+                                    <p:set>
+                                      <p:cBhvr>
+                                        <p:cTn id="69" dur="1" fill="hold">
+                                          <p:stCondLst>
+                                            <p:cond delay="0"/>
+                                          </p:stCondLst>
+                                        </p:cTn>
+                                        <p:tgtEl>
+                                          <p:spTgt spid="54"/>
+                                        </p:tgtEl>
+                                        <p:attrNameLst>
+                                          <p:attrName>style.visibility</p:attrName>
+                                        </p:attrNameLst>
+                                      </p:cBhvr>
+                                      <p:to>
+                                        <p:strVal val="visible"/>
+                                      </p:to>
+                                    </p:set>
+                                    <p:animEffect transition="in" filter="fade">
+                                      <p:cBhvr>
+                                        <p:cTn id="70" dur="500"/>
+                                        <p:tgtEl>
+                                          <p:spTgt spid="54"/>
+                                        </p:tgtEl>
+                                      </p:cBhvr>
+                                    </p:animEffect>
+                                  </p:childTnLst>
+                                </p:cTn>
+                              </p:par>
+                              <p:par>
+                                <p:cTn id="71" presetID="10" presetClass="entr" presetSubtype="0" fill="hold" grpId="0" nodeType="withEffect">
+                                  <p:stCondLst>
+                                    <p:cond delay="0"/>
+                                  </p:stCondLst>
+                                  <p:childTnLst>
+                                    <p:set>
+                                      <p:cBhvr>
+                                        <p:cTn id="72" dur="1" fill="hold">
+                                          <p:stCondLst>
+                                            <p:cond delay="0"/>
+                                          </p:stCondLst>
+                                        </p:cTn>
+                                        <p:tgtEl>
+                                          <p:spTgt spid="71"/>
+                                        </p:tgtEl>
+                                        <p:attrNameLst>
+                                          <p:attrName>style.visibility</p:attrName>
+                                        </p:attrNameLst>
+                                      </p:cBhvr>
+                                      <p:to>
+                                        <p:strVal val="visible"/>
+                                      </p:to>
+                                    </p:set>
+                                    <p:animEffect transition="in" filter="fade">
+                                      <p:cBhvr>
+                                        <p:cTn id="73" dur="500"/>
+                                        <p:tgtEl>
+                                          <p:spTgt spid="71"/>
+                                        </p:tgtEl>
+                                      </p:cBhvr>
+                                    </p:animEffect>
+                                  </p:childTnLst>
+                                </p:cTn>
+                              </p:par>
+                              <p:par>
+                                <p:cTn id="74" presetID="10" presetClass="entr" presetSubtype="0" fill="hold" nodeType="withEffect">
+                                  <p:stCondLst>
+                                    <p:cond delay="0"/>
+                                  </p:stCondLst>
+                                  <p:childTnLst>
+                                    <p:set>
+                                      <p:cBhvr>
+                                        <p:cTn id="75" dur="1" fill="hold">
+                                          <p:stCondLst>
+                                            <p:cond delay="0"/>
+                                          </p:stCondLst>
+                                        </p:cTn>
+                                        <p:tgtEl>
+                                          <p:spTgt spid="55">
+                                            <p:txEl>
+                                              <p:pRg st="1" end="1"/>
+                                            </p:txEl>
+                                          </p:spTgt>
+                                        </p:tgtEl>
+                                        <p:attrNameLst>
+                                          <p:attrName>style.visibility</p:attrName>
+                                        </p:attrNameLst>
+                                      </p:cBhvr>
+                                      <p:to>
+                                        <p:strVal val="visible"/>
+                                      </p:to>
+                                    </p:set>
+                                    <p:animEffect transition="in" filter="fade">
+                                      <p:cBhvr>
+                                        <p:cTn id="76" dur="500"/>
+                                        <p:tgtEl>
+                                          <p:spTgt spid="55">
+                                            <p:txEl>
+                                              <p:pRg st="1" end="1"/>
+                                            </p:txEl>
+                                          </p:spTgt>
+                                        </p:tgtEl>
+                                      </p:cBhvr>
+                                    </p:animEffect>
+                                  </p:childTnLst>
+                                </p:cTn>
+                              </p:par>
+                            </p:childTnLst>
+                          </p:cTn>
+                        </p:par>
+                      </p:childTnLst>
+                    </p:cTn>
+                  </p:par>
+                  <p:par>
+                    <p:cTn id="77" fill="hold">
+                      <p:stCondLst>
+                        <p:cond delay="indefinite"/>
+                      </p:stCondLst>
+                      <p:childTnLst>
+                        <p:par>
+                          <p:cTn id="78" fill="hold">
+                            <p:stCondLst>
+                              <p:cond delay="0"/>
+                            </p:stCondLst>
+                            <p:childTnLst>
+                              <p:par>
+                                <p:cTn id="79" presetID="10" presetClass="entr" presetSubtype="0" fill="hold" grpId="0" nodeType="clickEffect">
+                                  <p:stCondLst>
+                                    <p:cond delay="0"/>
+                                  </p:stCondLst>
+                                  <p:childTnLst>
+                                    <p:set>
+                                      <p:cBhvr>
+                                        <p:cTn id="80" dur="1" fill="hold">
+                                          <p:stCondLst>
+                                            <p:cond delay="0"/>
+                                          </p:stCondLst>
+                                        </p:cTn>
+                                        <p:tgtEl>
+                                          <p:spTgt spid="16"/>
+                                        </p:tgtEl>
+                                        <p:attrNameLst>
+                                          <p:attrName>style.visibility</p:attrName>
+                                        </p:attrNameLst>
+                                      </p:cBhvr>
+                                      <p:to>
+                                        <p:strVal val="visible"/>
+                                      </p:to>
+                                    </p:set>
+                                    <p:animEffect transition="in" filter="fade">
+                                      <p:cBhvr>
+                                        <p:cTn id="81" dur="500"/>
+                                        <p:tgtEl>
+                                          <p:spTgt spid="16"/>
+                                        </p:tgtEl>
+                                      </p:cBhvr>
+                                    </p:animEffect>
+                                  </p:childTnLst>
+                                </p:cTn>
+                              </p:par>
+                              <p:par>
+                                <p:cTn id="82" presetID="10" presetClass="entr" presetSubtype="0" fill="hold" grpId="0" nodeType="withEffect">
+                                  <p:stCondLst>
+                                    <p:cond delay="0"/>
+                                  </p:stCondLst>
+                                  <p:childTnLst>
+                                    <p:set>
+                                      <p:cBhvr>
+                                        <p:cTn id="83" dur="1" fill="hold">
                                           <p:stCondLst>
                                             <p:cond delay="0"/>
                                           </p:stCondLst>
@@ -40601,51 +43548,14 @@
                                         <p:strVal val="visible"/>
                                       </p:to>
                                     </p:set>
-                                  </p:childTnLst>
-                                </p:cTn>
-                              </p:par>
-                            </p:childTnLst>
-                          </p:cTn>
-                        </p:par>
-                      </p:childTnLst>
-                    </p:cTn>
-                  </p:par>
-                  <p:par>
-                    <p:cTn id="13" fill="hold">
-                      <p:stCondLst>
-                        <p:cond delay="indefinite"/>
-                      </p:stCondLst>
-                      <p:childTnLst>
-                        <p:par>
-                          <p:cTn id="14" fill="hold">
-                            <p:stCondLst>
-                              <p:cond delay="0"/>
-                            </p:stCondLst>
-                            <p:childTnLst>
-                              <p:par>
-                                <p:cTn id="15" presetID="1" presetClass="entr" presetSubtype="0" fill="hold" grpId="0" nodeType="clickEffect">
-                                  <p:stCondLst>
-                                    <p:cond delay="0"/>
-                                  </p:stCondLst>
-                                  <p:childTnLst>
-                                    <p:set>
+                                    <p:animEffect transition="in" filter="fade">
                                       <p:cBhvr>
-                                        <p:cTn id="16" dur="1" fill="hold">
-                                          <p:stCondLst>
-                                            <p:cond delay="0"/>
-                                          </p:stCondLst>
-                                        </p:cTn>
+                                        <p:cTn id="84" dur="500"/>
                                         <p:tgtEl>
-                                          <p:spTgt spid="55"/>
+                                          <p:spTgt spid="47"/>
                                         </p:tgtEl>
-                                        <p:attrNameLst>
-                                          <p:attrName>style.visibility</p:attrName>
-                                        </p:attrNameLst>
                                       </p:cBhvr>
-                                      <p:to>
-                                        <p:strVal val="visible"/>
-                                      </p:to>
-                                    </p:set>
+                                    </p:animEffect>
                                   </p:childTnLst>
                                 </p:cTn>
                               </p:par>
@@ -40679,7 +43589,20 @@
     <p:bldLst>
       <p:bldP spid="46" grpId="0"/>
       <p:bldP spid="47" grpId="0"/>
-      <p:bldP spid="55" grpId="0"/>
+      <p:bldP spid="50" grpId="0"/>
+      <p:bldP spid="52" grpId="0"/>
+      <p:bldP spid="54" grpId="0"/>
+      <p:bldP spid="65" grpId="0" animBg="1"/>
+      <p:bldP spid="66" grpId="0" animBg="1"/>
+      <p:bldP spid="68" grpId="0"/>
+      <p:bldP spid="69" grpId="0"/>
+      <p:bldP spid="70" grpId="0" animBg="1"/>
+      <p:bldP spid="71" grpId="0"/>
+      <p:bldP spid="86" grpId="0"/>
+      <p:bldP spid="88" grpId="0"/>
+      <p:bldP spid="90" grpId="0"/>
+      <p:bldP spid="9" grpId="0"/>
+      <p:bldP spid="16" grpId="0"/>
     </p:bldLst>
   </p:timing>
 </p:sld>
@@ -42009,9 +44932,6 @@
                     <p:cTn id="3" fill="hold">
                       <p:stCondLst>
                         <p:cond delay="indefinite"/>
-                        <p:cond evt="onBegin" delay="0">
-                          <p:tn val="2"/>
-                        </p:cond>
                       </p:stCondLst>
                       <p:childTnLst>
                         <p:par>
@@ -42021,7 +44941,7 @@
                             </p:stCondLst>
                             <p:childTnLst>
                               <p:par>
-                                <p:cTn id="5" presetID="1" presetClass="entr" presetSubtype="0" fill="hold" grpId="0" nodeType="withEffect">
+                                <p:cTn id="5" presetID="10" presetClass="entr" presetSubtype="0" fill="hold" grpId="0" nodeType="clickEffect">
                                   <p:stCondLst>
                                     <p:cond delay="0"/>
                                   </p:stCondLst>
@@ -42029,6 +44949,339 @@
                                     <p:set>
                                       <p:cBhvr>
                                         <p:cTn id="6" dur="1" fill="hold">
+                                          <p:stCondLst>
+                                            <p:cond delay="0"/>
+                                          </p:stCondLst>
+                                        </p:cTn>
+                                        <p:tgtEl>
+                                          <p:spTgt spid="35"/>
+                                        </p:tgtEl>
+                                        <p:attrNameLst>
+                                          <p:attrName>style.visibility</p:attrName>
+                                        </p:attrNameLst>
+                                      </p:cBhvr>
+                                      <p:to>
+                                        <p:strVal val="visible"/>
+                                      </p:to>
+                                    </p:set>
+                                    <p:animEffect transition="in" filter="fade">
+                                      <p:cBhvr>
+                                        <p:cTn id="7" dur="500"/>
+                                        <p:tgtEl>
+                                          <p:spTgt spid="35"/>
+                                        </p:tgtEl>
+                                      </p:cBhvr>
+                                    </p:animEffect>
+                                  </p:childTnLst>
+                                </p:cTn>
+                              </p:par>
+                              <p:par>
+                                <p:cTn id="8" presetID="10" presetClass="entr" presetSubtype="0" fill="hold" grpId="0" nodeType="withEffect">
+                                  <p:stCondLst>
+                                    <p:cond delay="0"/>
+                                  </p:stCondLst>
+                                  <p:childTnLst>
+                                    <p:set>
+                                      <p:cBhvr>
+                                        <p:cTn id="9" dur="1" fill="hold">
+                                          <p:stCondLst>
+                                            <p:cond delay="0"/>
+                                          </p:stCondLst>
+                                        </p:cTn>
+                                        <p:tgtEl>
+                                          <p:spTgt spid="15"/>
+                                        </p:tgtEl>
+                                        <p:attrNameLst>
+                                          <p:attrName>style.visibility</p:attrName>
+                                        </p:attrNameLst>
+                                      </p:cBhvr>
+                                      <p:to>
+                                        <p:strVal val="visible"/>
+                                      </p:to>
+                                    </p:set>
+                                    <p:animEffect transition="in" filter="fade">
+                                      <p:cBhvr>
+                                        <p:cTn id="10" dur="500"/>
+                                        <p:tgtEl>
+                                          <p:spTgt spid="15"/>
+                                        </p:tgtEl>
+                                      </p:cBhvr>
+                                    </p:animEffect>
+                                  </p:childTnLst>
+                                </p:cTn>
+                              </p:par>
+                              <p:par>
+                                <p:cTn id="11" presetID="10" presetClass="entr" presetSubtype="0" fill="hold" nodeType="withEffect">
+                                  <p:stCondLst>
+                                    <p:cond delay="0"/>
+                                  </p:stCondLst>
+                                  <p:childTnLst>
+                                    <p:set>
+                                      <p:cBhvr>
+                                        <p:cTn id="12" dur="1" fill="hold">
+                                          <p:stCondLst>
+                                            <p:cond delay="0"/>
+                                          </p:stCondLst>
+                                        </p:cTn>
+                                        <p:tgtEl>
+                                          <p:spTgt spid="34"/>
+                                        </p:tgtEl>
+                                        <p:attrNameLst>
+                                          <p:attrName>style.visibility</p:attrName>
+                                        </p:attrNameLst>
+                                      </p:cBhvr>
+                                      <p:to>
+                                        <p:strVal val="visible"/>
+                                      </p:to>
+                                    </p:set>
+                                    <p:animEffect transition="in" filter="fade">
+                                      <p:cBhvr>
+                                        <p:cTn id="13" dur="500"/>
+                                        <p:tgtEl>
+                                          <p:spTgt spid="34"/>
+                                        </p:tgtEl>
+                                      </p:cBhvr>
+                                    </p:animEffect>
+                                  </p:childTnLst>
+                                </p:cTn>
+                              </p:par>
+                              <p:par>
+                                <p:cTn id="14" presetID="10" presetClass="entr" presetSubtype="0" fill="hold" grpId="0" nodeType="withEffect">
+                                  <p:stCondLst>
+                                    <p:cond delay="0"/>
+                                  </p:stCondLst>
+                                  <p:childTnLst>
+                                    <p:set>
+                                      <p:cBhvr>
+                                        <p:cTn id="15" dur="1" fill="hold">
+                                          <p:stCondLst>
+                                            <p:cond delay="0"/>
+                                          </p:stCondLst>
+                                        </p:cTn>
+                                        <p:tgtEl>
+                                          <p:spTgt spid="36"/>
+                                        </p:tgtEl>
+                                        <p:attrNameLst>
+                                          <p:attrName>style.visibility</p:attrName>
+                                        </p:attrNameLst>
+                                      </p:cBhvr>
+                                      <p:to>
+                                        <p:strVal val="visible"/>
+                                      </p:to>
+                                    </p:set>
+                                    <p:animEffect transition="in" filter="fade">
+                                      <p:cBhvr>
+                                        <p:cTn id="16" dur="500"/>
+                                        <p:tgtEl>
+                                          <p:spTgt spid="36"/>
+                                        </p:tgtEl>
+                                      </p:cBhvr>
+                                    </p:animEffect>
+                                  </p:childTnLst>
+                                </p:cTn>
+                              </p:par>
+                              <p:par>
+                                <p:cTn id="17" presetID="10" presetClass="entr" presetSubtype="0" fill="hold" grpId="0" nodeType="withEffect">
+                                  <p:stCondLst>
+                                    <p:cond delay="0"/>
+                                  </p:stCondLst>
+                                  <p:childTnLst>
+                                    <p:set>
+                                      <p:cBhvr>
+                                        <p:cTn id="18" dur="1" fill="hold">
+                                          <p:stCondLst>
+                                            <p:cond delay="0"/>
+                                          </p:stCondLst>
+                                        </p:cTn>
+                                        <p:tgtEl>
+                                          <p:spTgt spid="27"/>
+                                        </p:tgtEl>
+                                        <p:attrNameLst>
+                                          <p:attrName>style.visibility</p:attrName>
+                                        </p:attrNameLst>
+                                      </p:cBhvr>
+                                      <p:to>
+                                        <p:strVal val="visible"/>
+                                      </p:to>
+                                    </p:set>
+                                    <p:animEffect transition="in" filter="fade">
+                                      <p:cBhvr>
+                                        <p:cTn id="19" dur="500"/>
+                                        <p:tgtEl>
+                                          <p:spTgt spid="27"/>
+                                        </p:tgtEl>
+                                      </p:cBhvr>
+                                    </p:animEffect>
+                                  </p:childTnLst>
+                                </p:cTn>
+                              </p:par>
+                              <p:par>
+                                <p:cTn id="20" presetID="10" presetClass="entr" presetSubtype="0" fill="hold" nodeType="withEffect">
+                                  <p:stCondLst>
+                                    <p:cond delay="0"/>
+                                  </p:stCondLst>
+                                  <p:childTnLst>
+                                    <p:set>
+                                      <p:cBhvr>
+                                        <p:cTn id="21" dur="1" fill="hold">
+                                          <p:stCondLst>
+                                            <p:cond delay="0"/>
+                                          </p:stCondLst>
+                                        </p:cTn>
+                                        <p:tgtEl>
+                                          <p:spTgt spid="39"/>
+                                        </p:tgtEl>
+                                        <p:attrNameLst>
+                                          <p:attrName>style.visibility</p:attrName>
+                                        </p:attrNameLst>
+                                      </p:cBhvr>
+                                      <p:to>
+                                        <p:strVal val="visible"/>
+                                      </p:to>
+                                    </p:set>
+                                    <p:animEffect transition="in" filter="fade">
+                                      <p:cBhvr>
+                                        <p:cTn id="22" dur="500"/>
+                                        <p:tgtEl>
+                                          <p:spTgt spid="39"/>
+                                        </p:tgtEl>
+                                      </p:cBhvr>
+                                    </p:animEffect>
+                                  </p:childTnLst>
+                                </p:cTn>
+                              </p:par>
+                              <p:par>
+                                <p:cTn id="23" presetID="10" presetClass="entr" presetSubtype="0" fill="hold" grpId="0" nodeType="withEffect">
+                                  <p:stCondLst>
+                                    <p:cond delay="0"/>
+                                  </p:stCondLst>
+                                  <p:childTnLst>
+                                    <p:set>
+                                      <p:cBhvr>
+                                        <p:cTn id="24" dur="1" fill="hold">
+                                          <p:stCondLst>
+                                            <p:cond delay="0"/>
+                                          </p:stCondLst>
+                                        </p:cTn>
+                                        <p:tgtEl>
+                                          <p:spTgt spid="38"/>
+                                        </p:tgtEl>
+                                        <p:attrNameLst>
+                                          <p:attrName>style.visibility</p:attrName>
+                                        </p:attrNameLst>
+                                      </p:cBhvr>
+                                      <p:to>
+                                        <p:strVal val="visible"/>
+                                      </p:to>
+                                    </p:set>
+                                    <p:animEffect transition="in" filter="fade">
+                                      <p:cBhvr>
+                                        <p:cTn id="25" dur="500"/>
+                                        <p:tgtEl>
+                                          <p:spTgt spid="38"/>
+                                        </p:tgtEl>
+                                      </p:cBhvr>
+                                    </p:animEffect>
+                                  </p:childTnLst>
+                                </p:cTn>
+                              </p:par>
+                              <p:par>
+                                <p:cTn id="26" presetID="10" presetClass="entr" presetSubtype="0" fill="hold" grpId="0" nodeType="withEffect">
+                                  <p:stCondLst>
+                                    <p:cond delay="0"/>
+                                  </p:stCondLst>
+                                  <p:childTnLst>
+                                    <p:set>
+                                      <p:cBhvr>
+                                        <p:cTn id="27" dur="1" fill="hold">
+                                          <p:stCondLst>
+                                            <p:cond delay="0"/>
+                                          </p:stCondLst>
+                                        </p:cTn>
+                                        <p:tgtEl>
+                                          <p:spTgt spid="37"/>
+                                        </p:tgtEl>
+                                        <p:attrNameLst>
+                                          <p:attrName>style.visibility</p:attrName>
+                                        </p:attrNameLst>
+                                      </p:cBhvr>
+                                      <p:to>
+                                        <p:strVal val="visible"/>
+                                      </p:to>
+                                    </p:set>
+                                    <p:animEffect transition="in" filter="fade">
+                                      <p:cBhvr>
+                                        <p:cTn id="28" dur="500"/>
+                                        <p:tgtEl>
+                                          <p:spTgt spid="37"/>
+                                        </p:tgtEl>
+                                      </p:cBhvr>
+                                    </p:animEffect>
+                                  </p:childTnLst>
+                                </p:cTn>
+                              </p:par>
+                              <p:par>
+                                <p:cTn id="29" presetID="10" presetClass="entr" presetSubtype="0" fill="hold" nodeType="withEffect">
+                                  <p:stCondLst>
+                                    <p:cond delay="0"/>
+                                  </p:stCondLst>
+                                  <p:childTnLst>
+                                    <p:set>
+                                      <p:cBhvr>
+                                        <p:cTn id="30" dur="1" fill="hold">
+                                          <p:stCondLst>
+                                            <p:cond delay="0"/>
+                                          </p:stCondLst>
+                                        </p:cTn>
+                                        <p:tgtEl>
+                                          <p:spTgt spid="40"/>
+                                        </p:tgtEl>
+                                        <p:attrNameLst>
+                                          <p:attrName>style.visibility</p:attrName>
+                                        </p:attrNameLst>
+                                      </p:cBhvr>
+                                      <p:to>
+                                        <p:strVal val="visible"/>
+                                      </p:to>
+                                    </p:set>
+                                    <p:animEffect transition="in" filter="fade">
+                                      <p:cBhvr>
+                                        <p:cTn id="31" dur="500"/>
+                                        <p:tgtEl>
+                                          <p:spTgt spid="40"/>
+                                        </p:tgtEl>
+                                      </p:cBhvr>
+                                    </p:animEffect>
+                                  </p:childTnLst>
+                                </p:cTn>
+                              </p:par>
+                            </p:childTnLst>
+                          </p:cTn>
+                        </p:par>
+                      </p:childTnLst>
+                    </p:cTn>
+                  </p:par>
+                  <p:par>
+                    <p:cTn id="32" fill="hold">
+                      <p:stCondLst>
+                        <p:cond delay="indefinite"/>
+                      </p:stCondLst>
+                      <p:childTnLst>
+                        <p:par>
+                          <p:cTn id="33" fill="hold">
+                            <p:stCondLst>
+                              <p:cond delay="0"/>
+                            </p:stCondLst>
+                            <p:childTnLst>
+                              <p:par>
+                                <p:cTn id="34" presetID="1" presetClass="entr" presetSubtype="0" fill="hold" grpId="0" nodeType="clickEffect">
+                                  <p:stCondLst>
+                                    <p:cond delay="0"/>
+                                  </p:stCondLst>
+                                  <p:childTnLst>
+                                    <p:set>
+                                      <p:cBhvr>
+                                        <p:cTn id="35" dur="1" fill="hold">
                                           <p:stCondLst>
                                             <p:cond delay="0"/>
                                           </p:stCondLst>
@@ -42048,14 +45301,14 @@
                                 </p:cTn>
                               </p:par>
                               <p:par>
-                                <p:cTn id="7" presetID="1" presetClass="entr" presetSubtype="0" fill="hold" grpId="0" nodeType="withEffect">
+                                <p:cTn id="36" presetID="1" presetClass="entr" presetSubtype="0" fill="hold" grpId="0" nodeType="withEffect">
                                   <p:stCondLst>
                                     <p:cond delay="0"/>
                                   </p:stCondLst>
                                   <p:childTnLst>
                                     <p:set>
                                       <p:cBhvr>
-                                        <p:cTn id="8" dur="1" fill="hold">
+                                        <p:cTn id="37" dur="1" fill="hold">
                                           <p:stCondLst>
                                             <p:cond delay="0"/>
                                           </p:stCondLst>
@@ -42102,6 +45355,12 @@
       </p:par>
     </p:tnLst>
     <p:bldLst>
+      <p:bldP spid="15" grpId="0" animBg="1"/>
+      <p:bldP spid="27" grpId="0" animBg="1"/>
+      <p:bldP spid="35" grpId="0"/>
+      <p:bldP spid="36" grpId="0"/>
+      <p:bldP spid="37" grpId="0" animBg="1"/>
+      <p:bldP spid="38" grpId="0"/>
       <p:bldP spid="41" grpId="0"/>
       <p:bldP spid="42" grpId="0"/>
     </p:bldLst>
@@ -42117,7 +45376,7 @@
         <p:cNvPr id="1" name="">
           <a:extLst>
             <a:ext uri="{FF2B5EF4-FFF2-40B4-BE49-F238E27FC236}">
-              <a16:creationId xmlns:a16="http://schemas.microsoft.com/office/drawing/2014/main" id="{C17A671A-A0F4-626A-A54F-2BAE990DE23D}"/>
+              <a16:creationId xmlns:a16="http://schemas.microsoft.com/office/drawing/2014/main" id="{18C91119-F0F4-BDA0-62C4-6C100A0111CD}"/>
             </a:ext>
           </a:extLst>
         </p:cNvPr>
@@ -42137,7 +45396,7 @@
           <p:cNvPr id="2" name="Platshållare för sidfot 1">
             <a:extLst>
               <a:ext uri="{FF2B5EF4-FFF2-40B4-BE49-F238E27FC236}">
-                <a16:creationId xmlns:a16="http://schemas.microsoft.com/office/drawing/2014/main" id="{C09641D4-C281-03F6-5E65-7F914ECC37E6}"/>
+                <a16:creationId xmlns:a16="http://schemas.microsoft.com/office/drawing/2014/main" id="{8EB734EF-2868-81EB-A45B-7AF176ED88EB}"/>
               </a:ext>
             </a:extLst>
           </p:cNvPr>
@@ -42173,7 +45432,7 @@
           <p:cNvPr id="5" name="Rubrik 4">
             <a:extLst>
               <a:ext uri="{FF2B5EF4-FFF2-40B4-BE49-F238E27FC236}">
-                <a16:creationId xmlns:a16="http://schemas.microsoft.com/office/drawing/2014/main" id="{77AF8F79-512F-3B46-DA7C-258872639B0D}"/>
+                <a16:creationId xmlns:a16="http://schemas.microsoft.com/office/drawing/2014/main" id="{E2B0A449-B512-1439-F29D-37EF2EE2D5CA}"/>
               </a:ext>
             </a:extLst>
           </p:cNvPr>
@@ -42204,7 +45463,7 @@
           <p:cNvPr id="4" name="Platshållare för bildnummer 3">
             <a:extLst>
               <a:ext uri="{FF2B5EF4-FFF2-40B4-BE49-F238E27FC236}">
-                <a16:creationId xmlns:a16="http://schemas.microsoft.com/office/drawing/2014/main" id="{9A1A9051-32C7-497A-9D2B-A279BCA9ED86}"/>
+                <a16:creationId xmlns:a16="http://schemas.microsoft.com/office/drawing/2014/main" id="{C8BCD1BC-49CA-8D3D-07FD-155D9FDCCC6D}"/>
               </a:ext>
             </a:extLst>
           </p:cNvPr>
@@ -42235,7 +45494,7 @@
           <p:cNvPr id="7" name="Platshållare för innehåll 6">
             <a:extLst>
               <a:ext uri="{FF2B5EF4-FFF2-40B4-BE49-F238E27FC236}">
-                <a16:creationId xmlns:a16="http://schemas.microsoft.com/office/drawing/2014/main" id="{31FC6D01-5799-67F4-AF6D-31F6DBCFE391}"/>
+                <a16:creationId xmlns:a16="http://schemas.microsoft.com/office/drawing/2014/main" id="{7FAFC216-8C4B-2714-63D3-2629D0936604}"/>
               </a:ext>
             </a:extLst>
           </p:cNvPr>
@@ -42307,7 +45566,7 @@
           <p:cNvPr id="91" name="Group 27">
             <a:extLst>
               <a:ext uri="{FF2B5EF4-FFF2-40B4-BE49-F238E27FC236}">
-                <a16:creationId xmlns:a16="http://schemas.microsoft.com/office/drawing/2014/main" id="{F4057587-C51A-8E2C-84E8-CD90027B0DB1}"/>
+                <a16:creationId xmlns:a16="http://schemas.microsoft.com/office/drawing/2014/main" id="{D3F8EF15-CEAA-88A8-0BFD-7CE34DA229E0}"/>
               </a:ext>
             </a:extLst>
           </p:cNvPr>
@@ -42327,7 +45586,7 @@
             <p:cNvPr id="92" name="Oval 29">
               <a:extLst>
                 <a:ext uri="{FF2B5EF4-FFF2-40B4-BE49-F238E27FC236}">
-                  <a16:creationId xmlns:a16="http://schemas.microsoft.com/office/drawing/2014/main" id="{BC0694D3-4718-E1FF-A8A6-57DFD0FB41BD}"/>
+                  <a16:creationId xmlns:a16="http://schemas.microsoft.com/office/drawing/2014/main" id="{5517DA0C-C48E-DE83-C12B-A0EFDA89F882}"/>
                 </a:ext>
               </a:extLst>
             </p:cNvPr>
@@ -42399,7 +45658,7 @@
             <p:cNvPr id="93" name="Oval 30">
               <a:extLst>
                 <a:ext uri="{FF2B5EF4-FFF2-40B4-BE49-F238E27FC236}">
-                  <a16:creationId xmlns:a16="http://schemas.microsoft.com/office/drawing/2014/main" id="{D29C6C42-C0B0-C178-85A5-A9EF4711D9FF}"/>
+                  <a16:creationId xmlns:a16="http://schemas.microsoft.com/office/drawing/2014/main" id="{86EEB4F4-9454-88C8-3F29-E7B90C1A6745}"/>
                 </a:ext>
               </a:extLst>
             </p:cNvPr>
@@ -42471,7 +45730,7 @@
             <p:cNvPr id="94" name="Straight Arrow Connector 31">
               <a:extLst>
                 <a:ext uri="{FF2B5EF4-FFF2-40B4-BE49-F238E27FC236}">
-                  <a16:creationId xmlns:a16="http://schemas.microsoft.com/office/drawing/2014/main" id="{CA23E612-2A60-3196-939D-5A28F51FA35E}"/>
+                  <a16:creationId xmlns:a16="http://schemas.microsoft.com/office/drawing/2014/main" id="{5C598F86-9FE9-8C8A-36E4-B3FD9603884B}"/>
                 </a:ext>
               </a:extLst>
             </p:cNvPr>
@@ -42514,7 +45773,7 @@
             <p:cNvPr id="95" name="Oval 32">
               <a:extLst>
                 <a:ext uri="{FF2B5EF4-FFF2-40B4-BE49-F238E27FC236}">
-                  <a16:creationId xmlns:a16="http://schemas.microsoft.com/office/drawing/2014/main" id="{3C7C65E5-61B3-49D8-575E-3BD316388B9D}"/>
+                  <a16:creationId xmlns:a16="http://schemas.microsoft.com/office/drawing/2014/main" id="{C80960E9-6EFA-C44B-021D-827D9FB7334C}"/>
                 </a:ext>
               </a:extLst>
             </p:cNvPr>
@@ -42596,7 +45855,7 @@
             <p:cNvPr id="96" name="Straight Arrow Connector 33">
               <a:extLst>
                 <a:ext uri="{FF2B5EF4-FFF2-40B4-BE49-F238E27FC236}">
-                  <a16:creationId xmlns:a16="http://schemas.microsoft.com/office/drawing/2014/main" id="{3D076B57-1285-B4B7-DD35-B7A56C7EB275}"/>
+                  <a16:creationId xmlns:a16="http://schemas.microsoft.com/office/drawing/2014/main" id="{78A03E18-4976-0726-DBCE-3C0FF16AD53B}"/>
                 </a:ext>
               </a:extLst>
             </p:cNvPr>
@@ -42639,7 +45898,7 @@
             <p:cNvPr id="97" name="Straight Arrow Connector 34">
               <a:extLst>
                 <a:ext uri="{FF2B5EF4-FFF2-40B4-BE49-F238E27FC236}">
-                  <a16:creationId xmlns:a16="http://schemas.microsoft.com/office/drawing/2014/main" id="{27C932F4-7CA8-6F4C-5BE5-69593BFBEB65}"/>
+                  <a16:creationId xmlns:a16="http://schemas.microsoft.com/office/drawing/2014/main" id="{92EB2434-66EB-F328-B298-BFBABB16F217}"/>
                 </a:ext>
               </a:extLst>
             </p:cNvPr>
@@ -42678,6 +45937,420 @@
           </p:style>
         </p:cxnSp>
       </p:grpSp>
+      <p:sp>
+        <p:nvSpPr>
+          <p:cNvPr id="15" name="Oval 1">
+            <a:extLst>
+              <a:ext uri="{FF2B5EF4-FFF2-40B4-BE49-F238E27FC236}">
+                <a16:creationId xmlns:a16="http://schemas.microsoft.com/office/drawing/2014/main" id="{159A4E45-186C-9C9C-8EF5-ECF7BD879438}"/>
+              </a:ext>
+            </a:extLst>
+          </p:cNvPr>
+          <p:cNvSpPr/>
+          <p:nvPr/>
+        </p:nvSpPr>
+        <p:spPr>
+          <a:xfrm>
+            <a:off x="5237564" y="2749665"/>
+            <a:ext cx="360000" cy="360000"/>
+          </a:xfrm>
+          <a:prstGeom prst="ellipse">
+            <a:avLst/>
+          </a:prstGeom>
+          <a:solidFill>
+            <a:srgbClr val="F8766D"/>
+          </a:solidFill>
+          <a:ln>
+            <a:solidFill>
+              <a:srgbClr val="D0180A"/>
+            </a:solidFill>
+          </a:ln>
+        </p:spPr>
+        <p:style>
+          <a:lnRef idx="2">
+            <a:schemeClr val="accent1">
+              <a:shade val="15000"/>
+            </a:schemeClr>
+          </a:lnRef>
+          <a:fillRef idx="1">
+            <a:schemeClr val="accent1"/>
+          </a:fillRef>
+          <a:effectRef idx="0">
+            <a:schemeClr val="accent1"/>
+          </a:effectRef>
+          <a:fontRef idx="minor">
+            <a:schemeClr val="lt1"/>
+          </a:fontRef>
+        </p:style>
+        <p:txBody>
+          <a:bodyPr rtlCol="0" anchor="ctr"/>
+          <a:lstStyle/>
+          <a:p>
+            <a:pPr algn="ctr"/>
+            <a:endParaRPr lang="en-US" noProof="0" dirty="0"/>
+          </a:p>
+        </p:txBody>
+      </p:sp>
+      <p:sp>
+        <p:nvSpPr>
+          <p:cNvPr id="27" name="Oval 8">
+            <a:extLst>
+              <a:ext uri="{FF2B5EF4-FFF2-40B4-BE49-F238E27FC236}">
+                <a16:creationId xmlns:a16="http://schemas.microsoft.com/office/drawing/2014/main" id="{E5D62259-3A5C-2CE3-1ABC-C2956F70770C}"/>
+              </a:ext>
+            </a:extLst>
+          </p:cNvPr>
+          <p:cNvSpPr/>
+          <p:nvPr/>
+        </p:nvSpPr>
+        <p:spPr>
+          <a:xfrm>
+            <a:off x="7728944" y="2749665"/>
+            <a:ext cx="360000" cy="360000"/>
+          </a:xfrm>
+          <a:prstGeom prst="ellipse">
+            <a:avLst/>
+          </a:prstGeom>
+          <a:solidFill>
+            <a:srgbClr val="00BFC4"/>
+          </a:solidFill>
+          <a:ln>
+            <a:solidFill>
+              <a:srgbClr val="006D70"/>
+            </a:solidFill>
+          </a:ln>
+        </p:spPr>
+        <p:style>
+          <a:lnRef idx="2">
+            <a:schemeClr val="accent1">
+              <a:shade val="15000"/>
+            </a:schemeClr>
+          </a:lnRef>
+          <a:fillRef idx="1">
+            <a:schemeClr val="accent1"/>
+          </a:fillRef>
+          <a:effectRef idx="0">
+            <a:schemeClr val="accent1"/>
+          </a:effectRef>
+          <a:fontRef idx="minor">
+            <a:schemeClr val="lt1"/>
+          </a:fontRef>
+        </p:style>
+        <p:txBody>
+          <a:bodyPr rtlCol="0" anchor="ctr"/>
+          <a:lstStyle/>
+          <a:p>
+            <a:pPr algn="ctr"/>
+            <a:endParaRPr lang="en-US" noProof="0" dirty="0"/>
+          </a:p>
+        </p:txBody>
+      </p:sp>
+      <p:cxnSp>
+        <p:nvCxnSpPr>
+          <p:cNvPr id="34" name="Straight Arrow Connector 10">
+            <a:extLst>
+              <a:ext uri="{FF2B5EF4-FFF2-40B4-BE49-F238E27FC236}">
+                <a16:creationId xmlns:a16="http://schemas.microsoft.com/office/drawing/2014/main" id="{48A566CC-72DD-E84D-6458-5DD92308C7C2}"/>
+              </a:ext>
+            </a:extLst>
+          </p:cNvPr>
+          <p:cNvCxnSpPr>
+            <a:stCxn id="15" idx="6"/>
+            <a:endCxn id="27" idx="2"/>
+          </p:cNvCxnSpPr>
+          <p:nvPr/>
+        </p:nvCxnSpPr>
+        <p:spPr>
+          <a:xfrm>
+            <a:off x="5597564" y="2929665"/>
+            <a:ext cx="2131380" cy="0"/>
+          </a:xfrm>
+          <a:prstGeom prst="straightConnector1">
+            <a:avLst/>
+          </a:prstGeom>
+          <a:ln>
+            <a:tailEnd type="triangle"/>
+          </a:ln>
+        </p:spPr>
+        <p:style>
+          <a:lnRef idx="2">
+            <a:schemeClr val="dk1"/>
+          </a:lnRef>
+          <a:fillRef idx="0">
+            <a:schemeClr val="dk1"/>
+          </a:fillRef>
+          <a:effectRef idx="1">
+            <a:schemeClr val="dk1"/>
+          </a:effectRef>
+          <a:fontRef idx="minor">
+            <a:schemeClr val="tx1"/>
+          </a:fontRef>
+        </p:style>
+      </p:cxnSp>
+      <p:sp>
+        <p:nvSpPr>
+          <p:cNvPr id="35" name="TextBox 18">
+            <a:extLst>
+              <a:ext uri="{FF2B5EF4-FFF2-40B4-BE49-F238E27FC236}">
+                <a16:creationId xmlns:a16="http://schemas.microsoft.com/office/drawing/2014/main" id="{77586F1C-CDF0-9AFF-D6A4-BBBF7C642D47}"/>
+              </a:ext>
+            </a:extLst>
+          </p:cNvPr>
+          <p:cNvSpPr txBox="1"/>
+          <p:nvPr/>
+        </p:nvSpPr>
+        <p:spPr>
+          <a:xfrm>
+            <a:off x="4746800" y="2290333"/>
+            <a:ext cx="1905843" cy="369332"/>
+          </a:xfrm>
+          <a:prstGeom prst="rect">
+            <a:avLst/>
+          </a:prstGeom>
+          <a:noFill/>
+        </p:spPr>
+        <p:txBody>
+          <a:bodyPr wrap="none" rtlCol="0">
+            <a:spAutoFit/>
+          </a:bodyPr>
+          <a:lstStyle/>
+          <a:p>
+            <a:r>
+              <a:rPr lang="en-US" noProof="0" dirty="0">
+                <a:solidFill>
+                  <a:srgbClr val="D0180A"/>
+                </a:solidFill>
+              </a:rPr>
+              <a:t>specification size</a:t>
+            </a:r>
+          </a:p>
+        </p:txBody>
+      </p:sp>
+      <p:sp>
+        <p:nvSpPr>
+          <p:cNvPr id="36" name="TextBox 19">
+            <a:extLst>
+              <a:ext uri="{FF2B5EF4-FFF2-40B4-BE49-F238E27FC236}">
+                <a16:creationId xmlns:a16="http://schemas.microsoft.com/office/drawing/2014/main" id="{B2AA9BCD-2183-E2AF-C35A-BDE491607532}"/>
+              </a:ext>
+            </a:extLst>
+          </p:cNvPr>
+          <p:cNvSpPr txBox="1"/>
+          <p:nvPr/>
+        </p:nvSpPr>
+        <p:spPr>
+          <a:xfrm>
+            <a:off x="6871635" y="2293622"/>
+            <a:ext cx="2194640" cy="369332"/>
+          </a:xfrm>
+          <a:prstGeom prst="rect">
+            <a:avLst/>
+          </a:prstGeom>
+          <a:noFill/>
+        </p:spPr>
+        <p:txBody>
+          <a:bodyPr wrap="none" rtlCol="0">
+            <a:spAutoFit/>
+          </a:bodyPr>
+          <a:lstStyle/>
+          <a:p>
+            <a:r>
+              <a:rPr lang="en-US" noProof="0" dirty="0">
+                <a:solidFill>
+                  <a:srgbClr val="006D70"/>
+                </a:solidFill>
+              </a:rPr>
+              <a:t>specification quality</a:t>
+            </a:r>
+          </a:p>
+        </p:txBody>
+      </p:sp>
+      <p:sp>
+        <p:nvSpPr>
+          <p:cNvPr id="37" name="Oval 20">
+            <a:extLst>
+              <a:ext uri="{FF2B5EF4-FFF2-40B4-BE49-F238E27FC236}">
+                <a16:creationId xmlns:a16="http://schemas.microsoft.com/office/drawing/2014/main" id="{C055C39C-5FB7-F19C-C672-FDCC3B3E8A79}"/>
+              </a:ext>
+            </a:extLst>
+          </p:cNvPr>
+          <p:cNvSpPr/>
+          <p:nvPr/>
+        </p:nvSpPr>
+        <p:spPr>
+          <a:xfrm>
+            <a:off x="6483254" y="3921296"/>
+            <a:ext cx="360000" cy="360000"/>
+          </a:xfrm>
+          <a:prstGeom prst="ellipse">
+            <a:avLst/>
+          </a:prstGeom>
+          <a:solidFill>
+            <a:schemeClr val="bg1">
+              <a:lumMod val="75000"/>
+            </a:schemeClr>
+          </a:solidFill>
+          <a:ln>
+            <a:solidFill>
+              <a:schemeClr val="bg1">
+                <a:lumMod val="50000"/>
+              </a:schemeClr>
+            </a:solidFill>
+          </a:ln>
+        </p:spPr>
+        <p:style>
+          <a:lnRef idx="2">
+            <a:schemeClr val="accent1">
+              <a:shade val="15000"/>
+            </a:schemeClr>
+          </a:lnRef>
+          <a:fillRef idx="1">
+            <a:schemeClr val="accent1"/>
+          </a:fillRef>
+          <a:effectRef idx="0">
+            <a:schemeClr val="accent1"/>
+          </a:effectRef>
+          <a:fontRef idx="minor">
+            <a:schemeClr val="lt1"/>
+          </a:fontRef>
+        </p:style>
+        <p:txBody>
+          <a:bodyPr rtlCol="0" anchor="ctr"/>
+          <a:lstStyle/>
+          <a:p>
+            <a:pPr algn="ctr"/>
+            <a:endParaRPr lang="en-US" noProof="0" dirty="0"/>
+          </a:p>
+        </p:txBody>
+      </p:sp>
+      <p:sp>
+        <p:nvSpPr>
+          <p:cNvPr id="38" name="TextBox 21">
+            <a:extLst>
+              <a:ext uri="{FF2B5EF4-FFF2-40B4-BE49-F238E27FC236}">
+                <a16:creationId xmlns:a16="http://schemas.microsoft.com/office/drawing/2014/main" id="{2C21FB09-8546-FF3B-E197-0EDC254A5622}"/>
+              </a:ext>
+            </a:extLst>
+          </p:cNvPr>
+          <p:cNvSpPr txBox="1"/>
+          <p:nvPr/>
+        </p:nvSpPr>
+        <p:spPr>
+          <a:xfrm>
+            <a:off x="6871635" y="3911964"/>
+            <a:ext cx="1769908" cy="369332"/>
+          </a:xfrm>
+          <a:prstGeom prst="rect">
+            <a:avLst/>
+          </a:prstGeom>
+          <a:noFill/>
+        </p:spPr>
+        <p:txBody>
+          <a:bodyPr wrap="none" rtlCol="0">
+            <a:spAutoFit/>
+          </a:bodyPr>
+          <a:lstStyle/>
+          <a:p>
+            <a:r>
+              <a:rPr lang="en-US" noProof="0" dirty="0">
+                <a:solidFill>
+                  <a:schemeClr val="tx1">
+                    <a:lumMod val="65000"/>
+                    <a:lumOff val="35000"/>
+                  </a:schemeClr>
+                </a:solidFill>
+              </a:rPr>
+              <a:t>feature success</a:t>
+            </a:r>
+          </a:p>
+        </p:txBody>
+      </p:sp>
+      <p:cxnSp>
+        <p:nvCxnSpPr>
+          <p:cNvPr id="39" name="Straight Arrow Connector 22">
+            <a:extLst>
+              <a:ext uri="{FF2B5EF4-FFF2-40B4-BE49-F238E27FC236}">
+                <a16:creationId xmlns:a16="http://schemas.microsoft.com/office/drawing/2014/main" id="{2DA46B51-0363-3A91-B124-3812FF54A03A}"/>
+              </a:ext>
+            </a:extLst>
+          </p:cNvPr>
+          <p:cNvCxnSpPr>
+            <a:cxnSpLocks/>
+            <a:stCxn id="27" idx="3"/>
+            <a:endCxn id="37" idx="7"/>
+          </p:cNvCxnSpPr>
+          <p:nvPr/>
+        </p:nvCxnSpPr>
+        <p:spPr>
+          <a:xfrm flipH="1">
+            <a:off x="6790533" y="3056944"/>
+            <a:ext cx="991132" cy="917073"/>
+          </a:xfrm>
+          <a:prstGeom prst="straightConnector1">
+            <a:avLst/>
+          </a:prstGeom>
+          <a:ln>
+            <a:tailEnd type="triangle"/>
+          </a:ln>
+        </p:spPr>
+        <p:style>
+          <a:lnRef idx="2">
+            <a:schemeClr val="dk1"/>
+          </a:lnRef>
+          <a:fillRef idx="0">
+            <a:schemeClr val="dk1"/>
+          </a:fillRef>
+          <a:effectRef idx="1">
+            <a:schemeClr val="dk1"/>
+          </a:effectRef>
+          <a:fontRef idx="minor">
+            <a:schemeClr val="tx1"/>
+          </a:fontRef>
+        </p:style>
+      </p:cxnSp>
+      <p:cxnSp>
+        <p:nvCxnSpPr>
+          <p:cNvPr id="40" name="Straight Arrow Connector 23">
+            <a:extLst>
+              <a:ext uri="{FF2B5EF4-FFF2-40B4-BE49-F238E27FC236}">
+                <a16:creationId xmlns:a16="http://schemas.microsoft.com/office/drawing/2014/main" id="{2417D5BF-921E-1994-3829-459A7CE4123B}"/>
+              </a:ext>
+            </a:extLst>
+          </p:cNvPr>
+          <p:cNvCxnSpPr>
+            <a:cxnSpLocks/>
+            <a:stCxn id="15" idx="5"/>
+            <a:endCxn id="37" idx="1"/>
+          </p:cNvCxnSpPr>
+          <p:nvPr/>
+        </p:nvCxnSpPr>
+        <p:spPr>
+          <a:xfrm>
+            <a:off x="5544843" y="3056944"/>
+            <a:ext cx="991132" cy="917073"/>
+          </a:xfrm>
+          <a:prstGeom prst="straightConnector1">
+            <a:avLst/>
+          </a:prstGeom>
+          <a:ln>
+            <a:tailEnd type="triangle"/>
+          </a:ln>
+        </p:spPr>
+        <p:style>
+          <a:lnRef idx="2">
+            <a:schemeClr val="dk1"/>
+          </a:lnRef>
+          <a:fillRef idx="0">
+            <a:schemeClr val="dk1"/>
+          </a:fillRef>
+          <a:effectRef idx="1">
+            <a:schemeClr val="dk1"/>
+          </a:effectRef>
+          <a:fontRef idx="minor">
+            <a:schemeClr val="tx1"/>
+          </a:fontRef>
+        </p:style>
+      </p:cxnSp>
       <mc:AlternateContent xmlns:mc="http://schemas.openxmlformats.org/markup-compatibility/2006" xmlns:a14="http://schemas.microsoft.com/office/drawing/2010/main">
         <mc:Choice Requires="a14">
           <p:sp>
@@ -42685,7 +46358,7 @@
               <p:cNvPr id="42" name="TextBox 30">
                 <a:extLst>
                   <a:ext uri="{FF2B5EF4-FFF2-40B4-BE49-F238E27FC236}">
-                    <a16:creationId xmlns:a16="http://schemas.microsoft.com/office/drawing/2014/main" id="{FA95D1DB-A58A-3E64-F4B2-4E454F039145}"/>
+                    <a16:creationId xmlns:a16="http://schemas.microsoft.com/office/drawing/2014/main" id="{FC48F212-9A7F-A615-E9BD-76A7071A2672}"/>
                   </a:ext>
                 </a:extLst>
               </p:cNvPr>
@@ -42807,7 +46480,7 @@
               <p:cNvPr id="42" name="TextBox 30">
                 <a:extLst>
                   <a:ext uri="{FF2B5EF4-FFF2-40B4-BE49-F238E27FC236}">
-                    <a16:creationId xmlns:a16="http://schemas.microsoft.com/office/drawing/2014/main" id="{FA95D1DB-A58A-3E64-F4B2-4E454F039145}"/>
+                    <a16:creationId xmlns:a16="http://schemas.microsoft.com/office/drawing/2014/main" id="{FC48F212-9A7F-A615-E9BD-76A7071A2672}"/>
                   </a:ext>
                 </a:extLst>
               </p:cNvPr>
@@ -42825,7 +46498,7 @@
                 <a:avLst/>
               </a:prstGeom>
               <a:blipFill>
-                <a:blip r:embed="rId2"/>
+                <a:blip r:embed="rId3"/>
                 <a:stretch>
                   <a:fillRect l="-844" t="-4444" r="-844" b="-35556"/>
                 </a:stretch>
@@ -42848,40 +46521,10 @@
       </mc:AlternateContent>
       <p:pic>
         <p:nvPicPr>
-          <p:cNvPr id="6" name="Picture 10">
+          <p:cNvPr id="3" name="Picture 10">
             <a:extLst>
               <a:ext uri="{FF2B5EF4-FFF2-40B4-BE49-F238E27FC236}">
-                <a16:creationId xmlns:a16="http://schemas.microsoft.com/office/drawing/2014/main" id="{D361C87C-B6E4-EEC6-1F22-6789E82A68F9}"/>
-              </a:ext>
-            </a:extLst>
-          </p:cNvPr>
-          <p:cNvPicPr>
-            <a:picLocks noChangeAspect="1"/>
-          </p:cNvPicPr>
-          <p:nvPr/>
-        </p:nvPicPr>
-        <p:blipFill>
-          <a:blip r:embed="rId3"/>
-          <a:stretch>
-            <a:fillRect/>
-          </a:stretch>
-        </p:blipFill>
-        <p:spPr>
-          <a:xfrm>
-            <a:off x="4643576" y="2124522"/>
-            <a:ext cx="4379241" cy="2701447"/>
-          </a:xfrm>
-          <a:prstGeom prst="rect">
-            <a:avLst/>
-          </a:prstGeom>
-        </p:spPr>
-      </p:pic>
-      <p:pic>
-        <p:nvPicPr>
-          <p:cNvPr id="9" name="Bildobjekt 8">
-            <a:extLst>
-              <a:ext uri="{FF2B5EF4-FFF2-40B4-BE49-F238E27FC236}">
-                <a16:creationId xmlns:a16="http://schemas.microsoft.com/office/drawing/2014/main" id="{3AA0C908-289E-401A-85D7-61775E712F1A}"/>
+                <a16:creationId xmlns:a16="http://schemas.microsoft.com/office/drawing/2014/main" id="{785B66DB-A94B-D73E-23FB-7BA448859655}"/>
               </a:ext>
             </a:extLst>
           </p:cNvPr>
@@ -42898,8 +46541,8 @@
         </p:blipFill>
         <p:spPr>
           <a:xfrm>
-            <a:off x="37547" y="2752203"/>
-            <a:ext cx="4462877" cy="972359"/>
+            <a:off x="640182" y="2662954"/>
+            <a:ext cx="3455020" cy="2131318"/>
           </a:xfrm>
           <a:prstGeom prst="rect">
             <a:avLst/>
@@ -42909,139 +46552,13 @@
     </p:spTree>
     <p:extLst>
       <p:ext uri="{BB962C8B-B14F-4D97-AF65-F5344CB8AC3E}">
-        <p14:creationId xmlns:p14="http://schemas.microsoft.com/office/powerpoint/2010/main" val="1411598685"/>
+        <p14:creationId xmlns:p14="http://schemas.microsoft.com/office/powerpoint/2010/main" val="562597400"/>
       </p:ext>
     </p:extLst>
   </p:cSld>
   <p:clrMapOvr>
     <a:masterClrMapping/>
   </p:clrMapOvr>
-  <p:timing>
-    <p:tnLst>
-      <p:par>
-        <p:cTn id="1" dur="indefinite" restart="never" nodeType="tmRoot">
-          <p:childTnLst>
-            <p:seq concurrent="1" nextAc="seek">
-              <p:cTn id="2" dur="indefinite" nodeType="mainSeq">
-                <p:childTnLst>
-                  <p:par>
-                    <p:cTn id="3" fill="hold">
-                      <p:stCondLst>
-                        <p:cond delay="indefinite"/>
-                        <p:cond evt="onBegin" delay="0">
-                          <p:tn val="2"/>
-                        </p:cond>
-                      </p:stCondLst>
-                      <p:childTnLst>
-                        <p:par>
-                          <p:cTn id="4" fill="hold">
-                            <p:stCondLst>
-                              <p:cond delay="0"/>
-                            </p:stCondLst>
-                            <p:childTnLst>
-                              <p:par>
-                                <p:cTn id="5" presetID="1" presetClass="entr" presetSubtype="0" fill="hold" grpId="0" nodeType="withEffect">
-                                  <p:stCondLst>
-                                    <p:cond delay="0"/>
-                                  </p:stCondLst>
-                                  <p:childTnLst>
-                                    <p:set>
-                                      <p:cBhvr>
-                                        <p:cTn id="6" dur="1" fill="hold">
-                                          <p:stCondLst>
-                                            <p:cond delay="0"/>
-                                          </p:stCondLst>
-                                        </p:cTn>
-                                        <p:tgtEl>
-                                          <p:spTgt spid="42"/>
-                                        </p:tgtEl>
-                                        <p:attrNameLst>
-                                          <p:attrName>style.visibility</p:attrName>
-                                        </p:attrNameLst>
-                                      </p:cBhvr>
-                                      <p:to>
-                                        <p:strVal val="visible"/>
-                                      </p:to>
-                                    </p:set>
-                                  </p:childTnLst>
-                                </p:cTn>
-                              </p:par>
-                            </p:childTnLst>
-                          </p:cTn>
-                        </p:par>
-                      </p:childTnLst>
-                    </p:cTn>
-                  </p:par>
-                  <p:par>
-                    <p:cTn id="7" fill="hold">
-                      <p:stCondLst>
-                        <p:cond delay="indefinite"/>
-                      </p:stCondLst>
-                      <p:childTnLst>
-                        <p:par>
-                          <p:cTn id="8" fill="hold">
-                            <p:stCondLst>
-                              <p:cond delay="0"/>
-                            </p:stCondLst>
-                            <p:childTnLst>
-                              <p:par>
-                                <p:cTn id="9" presetID="1" presetClass="entr" presetSubtype="0" fill="hold" nodeType="clickEffect">
-                                  <p:stCondLst>
-                                    <p:cond delay="0"/>
-                                  </p:stCondLst>
-                                  <p:childTnLst>
-                                    <p:set>
-                                      <p:cBhvr>
-                                        <p:cTn id="10" dur="1" fill="hold">
-                                          <p:stCondLst>
-                                            <p:cond delay="0"/>
-                                          </p:stCondLst>
-                                        </p:cTn>
-                                        <p:tgtEl>
-                                          <p:spTgt spid="6"/>
-                                        </p:tgtEl>
-                                        <p:attrNameLst>
-                                          <p:attrName>style.visibility</p:attrName>
-                                        </p:attrNameLst>
-                                      </p:cBhvr>
-                                      <p:to>
-                                        <p:strVal val="visible"/>
-                                      </p:to>
-                                    </p:set>
-                                  </p:childTnLst>
-                                </p:cTn>
-                              </p:par>
-                            </p:childTnLst>
-                          </p:cTn>
-                        </p:par>
-                      </p:childTnLst>
-                    </p:cTn>
-                  </p:par>
-                </p:childTnLst>
-              </p:cTn>
-              <p:prevCondLst>
-                <p:cond evt="onPrev" delay="0">
-                  <p:tgtEl>
-                    <p:sldTgt/>
-                  </p:tgtEl>
-                </p:cond>
-              </p:prevCondLst>
-              <p:nextCondLst>
-                <p:cond evt="onNext" delay="0">
-                  <p:tgtEl>
-                    <p:sldTgt/>
-                  </p:tgtEl>
-                </p:cond>
-              </p:nextCondLst>
-            </p:seq>
-          </p:childTnLst>
-        </p:cTn>
-      </p:par>
-    </p:tnLst>
-    <p:bldLst>
-      <p:bldP spid="42" grpId="0"/>
-    </p:bldLst>
-  </p:timing>
 </p:sld>
 </file>
 
